--- a/PRESENTACION_EP2_ESTILO_URBANO.pptx
+++ b/PRESENTACION_EP2_ESTILO_URBANO.pptx
@@ -15,8 +15,8 @@
   <p:notesMasterIdLst>
     <p:notesMasterId r:id="rId8"/>
   </p:notesMasterIdLst>
-  <p:sldSz cx="9144000" cy="5143500"/>
-  <p:notesSz cx="5143500" cy="9144000"/>
+  <p:sldSz cx="12191695" cy="6858000"/>
+  <p:notesSz cx="6858000" cy="12191695"/>
   <p:defaultTextStyle>
     <a:lvl1pPr marL="0" algn="l" defTabSz="914400" rtl="0" eaLnBrk="1" latinLnBrk="0" hangingPunct="1">
       <a:defRPr sz="1800" kern="1200">
@@ -1302,7 +1302,7 @@
     <p:bg>
       <p:bgPr>
         <a:solidFill>
-          <a:srgbClr val="0B0B0D"/>
+          <a:srgbClr val="0B0F19"/>
         </a:solidFill>
       </p:bgPr>
     </p:bg>
@@ -1329,7 +1329,7 @@
         <p:spPr>
           <a:xfrm>
             <a:off x="0" y="0"/>
-            <a:ext cx="9144000" cy="137160"/>
+            <a:ext cx="12191695" cy="73152"/>
           </a:xfrm>
           <a:prstGeom prst="rect">
             <a:avLst/>
@@ -1348,14 +1348,14 @@
         </p:nvSpPr>
         <p:spPr>
           <a:xfrm>
-            <a:off x="914400" y="1097280"/>
-            <a:ext cx="2560320" cy="365760"/>
+            <a:off x="914400" y="685800"/>
+            <a:ext cx="2560320" cy="329184"/>
           </a:xfrm>
           <a:prstGeom prst="roundRect">
             <a:avLst/>
           </a:prstGeom>
           <a:solidFill>
-            <a:srgbClr val="1A1608"/>
+            <a:srgbClr val="1A2337"/>
           </a:solidFill>
           <a:ln w="12700">
             <a:solidFill>
@@ -1373,8 +1373,8 @@
         </p:nvSpPr>
         <p:spPr>
           <a:xfrm>
-            <a:off x="914400" y="1097280"/>
-            <a:ext cx="2560320" cy="365760"/>
+            <a:off x="914400" y="685800"/>
+            <a:ext cx="2560320" cy="329184"/>
           </a:xfrm>
           <a:prstGeom prst="rect">
             <a:avLst/>
@@ -1390,7 +1390,7 @@
               <a:buNone/>
             </a:pPr>
             <a:r>
-              <a:rPr lang="en-US" sz="1000" b="1" dirty="0">
+              <a:rPr lang="en-US" sz="950" b="1" dirty="0">
                 <a:solidFill>
                   <a:srgbClr val="F59E0B"/>
                 </a:solidFill>
@@ -1400,7 +1400,7 @@
               </a:rPr>
               <a:t>EVALUACIÓN PARCIAL N° 2</a:t>
             </a:r>
-            <a:endParaRPr lang="en-US" sz="1000" dirty="0"/>
+            <a:endParaRPr lang="en-US" sz="950" dirty="0"/>
           </a:p>
         </p:txBody>
       </p:sp>
@@ -1412,8 +1412,8 @@
         </p:nvSpPr>
         <p:spPr>
           <a:xfrm>
-            <a:off x="914400" y="1645920"/>
-            <a:ext cx="10058400" cy="1463040"/>
+            <a:off x="914400" y="1188720"/>
+            <a:ext cx="10362895" cy="594360"/>
           </a:xfrm>
           <a:prstGeom prst="rect">
             <a:avLst/>
@@ -1426,13 +1426,10 @@
           <a:lstStyle/>
           <a:p>
             <a:pPr indent="0" marL="0">
-              <a:lnSpc>
-                <a:spcPct val="110000"/>
-              </a:lnSpc>
-              <a:buNone/>
-            </a:pPr>
-            <a:r>
-              <a:rPr lang="en-US" sz="3400" b="1" dirty="0">
+              <a:buNone/>
+            </a:pPr>
+            <a:r>
+              <a:rPr lang="en-US" sz="2400" b="1" dirty="0">
                 <a:solidFill>
                   <a:srgbClr val="FFFFFF"/>
                 </a:solidFill>
@@ -1440,29 +1437,9 @@
                 <a:ea typeface="Arial" pitchFamily="34" charset="-122"/>
                 <a:cs typeface="Arial" pitchFamily="34" charset="-120"/>
               </a:rPr>
-              <a:t>Gobernanza Transaccional</a:t>
-            </a:r>
-            <a:endParaRPr lang="en-US" sz="3400" dirty="0"/>
-          </a:p>
-          <a:p>
-            <a:pPr indent="0" marL="0">
-              <a:lnSpc>
-                <a:spcPct val="110000"/>
-              </a:lnSpc>
-              <a:buNone/>
-            </a:pPr>
-            <a:r>
-              <a:rPr lang="en-US" sz="3400" b="1" dirty="0">
-                <a:solidFill>
-                  <a:srgbClr val="FFFFFF"/>
-                </a:solidFill>
-                <a:latin typeface="Arial" pitchFamily="34" charset="0"/>
-                <a:ea typeface="Arial" pitchFamily="34" charset="-122"/>
-                <a:cs typeface="Arial" pitchFamily="34" charset="-120"/>
-              </a:rPr>
-              <a:t>y Automatización PL/SQL</a:t>
-            </a:r>
-            <a:endParaRPr lang="en-US" sz="3400" dirty="0"/>
+              <a:t>Gobernanza Transaccional y Automatización en PL/SQL</a:t>
+            </a:r>
+            <a:endParaRPr lang="en-US" sz="2400" dirty="0"/>
           </a:p>
         </p:txBody>
       </p:sp>
@@ -1474,8 +1451,8 @@
         </p:nvSpPr>
         <p:spPr>
           <a:xfrm>
-            <a:off x="914400" y="3291840"/>
-            <a:ext cx="9144000" cy="457200"/>
+            <a:off x="914400" y="1783080"/>
+            <a:ext cx="10362895" cy="320040"/>
           </a:xfrm>
           <a:prstGeom prst="rect">
             <a:avLst/>
@@ -1491,7 +1468,7 @@
               <a:buNone/>
             </a:pPr>
             <a:r>
-              <a:rPr lang="en-US" sz="1400" b="1" dirty="0">
+              <a:rPr lang="en-US" sz="1300" b="1" dirty="0">
                 <a:solidFill>
                   <a:srgbClr val="F59E0B"/>
                 </a:solidFill>
@@ -1499,32 +1476,111 @@
                 <a:ea typeface="Arial" pitchFamily="34" charset="-122"/>
                 <a:cs typeface="Arial" pitchFamily="34" charset="-120"/>
               </a:rPr>
-              <a:t>Caso Semestral: "Estilo Urbano" | E-Commerce &amp; Fulfillment</a:t>
-            </a:r>
-            <a:endParaRPr lang="en-US" sz="1400" dirty="0"/>
-          </a:p>
-        </p:txBody>
-      </p:sp>
-      <p:sp>
-        <p:nvSpPr>
-          <p:cNvPr id="7" name="Shape 5"/>
-          <p:cNvSpPr/>
-          <p:nvPr/>
-        </p:nvSpPr>
-        <p:spPr>
-          <a:xfrm>
-            <a:off x="914400" y="4023360"/>
-            <a:ext cx="10332720" cy="1920240"/>
+              <a:t>Caso de Análisis Semestral: "Estilo Urbano" (E-Commerce &amp; Digital Fulfillment)</a:t>
+            </a:r>
+            <a:endParaRPr lang="en-US" sz="1300" dirty="0"/>
+          </a:p>
+        </p:txBody>
+      </p:sp>
+      <p:sp>
+        <p:nvSpPr>
+          <p:cNvPr id="7" name="Text 5"/>
+          <p:cNvSpPr/>
+          <p:nvPr/>
+        </p:nvSpPr>
+        <p:spPr>
+          <a:xfrm>
+            <a:off x="914400" y="2148840"/>
+            <a:ext cx="10362895" cy="411480"/>
+          </a:xfrm>
+          <a:prstGeom prst="rect">
+            <a:avLst/>
+          </a:prstGeom>
+          <a:noFill/>
+          <a:ln/>
+        </p:spPr>
+        <p:txBody>
+          <a:bodyPr wrap="square" rtlCol="0" anchor="t"/>
+          <a:lstStyle/>
+          <a:p>
+            <a:pPr indent="0" marL="0">
+              <a:buNone/>
+            </a:pPr>
+            <a:r>
+              <a:rPr lang="en-US" sz="1000" dirty="0">
+                <a:solidFill>
+                  <a:srgbClr val="94A3B8"/>
+                </a:solidFill>
+                <a:latin typeface="Arial" pitchFamily="34" charset="0"/>
+                <a:ea typeface="Arial" pitchFamily="34" charset="-122"/>
+                <a:cs typeface="Arial" pitchFamily="34" charset="-120"/>
+              </a:rPr>
+              <a:t>Implementación de Procedimientos, Funciones, Packages con constructores públicos/privados</a:t>
+            </a:r>
+            <a:endParaRPr lang="en-US" sz="1000" dirty="0"/>
+          </a:p>
+          <a:p>
+            <a:pPr indent="0" marL="0">
+              <a:buNone/>
+            </a:pPr>
+            <a:r>
+              <a:rPr lang="en-US" sz="1000" dirty="0">
+                <a:solidFill>
+                  <a:srgbClr val="94A3B8"/>
+                </a:solidFill>
+                <a:latin typeface="Arial" pitchFamily="34" charset="0"/>
+                <a:ea typeface="Arial" pitchFamily="34" charset="-122"/>
+                <a:cs typeface="Arial" pitchFamily="34" charset="-120"/>
+              </a:rPr>
+              <a:t>y Triggers a nivel de fila y sentencia en Oracle Cloud Autonomous Database 19c/21c.</a:t>
+            </a:r>
+            <a:endParaRPr lang="en-US" sz="1000" dirty="0"/>
+          </a:p>
+        </p:txBody>
+      </p:sp>
+      <p:sp>
+        <p:nvSpPr>
+          <p:cNvPr id="8" name="Shape 6"/>
+          <p:cNvSpPr/>
+          <p:nvPr/>
+        </p:nvSpPr>
+        <p:spPr>
+          <a:xfrm>
+            <a:off x="914400" y="2697480"/>
+            <a:ext cx="10362895" cy="0"/>
+          </a:xfrm>
+          <a:prstGeom prst="line">
+            <a:avLst/>
+          </a:prstGeom>
+          <a:noFill/>
+          <a:ln w="12700">
+            <a:solidFill>
+              <a:srgbClr val="232E45"/>
+            </a:solidFill>
+            <a:prstDash val="solid"/>
+          </a:ln>
+        </p:spPr>
+      </p:sp>
+      <p:sp>
+        <p:nvSpPr>
+          <p:cNvPr id="9" name="Shape 7"/>
+          <p:cNvSpPr/>
+          <p:nvPr/>
+        </p:nvSpPr>
+        <p:spPr>
+          <a:xfrm>
+            <a:off x="914400" y="2971800"/>
+            <a:ext cx="4983480" cy="2971800"/>
           </a:xfrm>
           <a:prstGeom prst="roundRect">
             <a:avLst/>
           </a:prstGeom>
           <a:solidFill>
-            <a:srgbClr val="141418"/>
+            <a:srgbClr val="151C2C"/>
           </a:solidFill>
           <a:ln w="12700">
             <a:solidFill>
-              <a:srgbClr val="27272A"/>
+              <a:srgbClr val="232E45"/>
             </a:solidFill>
             <a:prstDash val="solid"/>
           </a:ln>
@@ -1532,14 +1588,14 @@
       </p:sp>
       <p:sp>
         <p:nvSpPr>
-          <p:cNvPr id="8" name="Text 6"/>
-          <p:cNvSpPr/>
-          <p:nvPr/>
-        </p:nvSpPr>
-        <p:spPr>
-          <a:xfrm>
-            <a:off x="1188720" y="4206240"/>
-            <a:ext cx="9784080" cy="1554480"/>
+          <p:cNvPr id="10" name="Text 8"/>
+          <p:cNvSpPr/>
+          <p:nvPr/>
+        </p:nvSpPr>
+        <p:spPr>
+          <a:xfrm>
+            <a:off x="1188720" y="3154680"/>
+            <a:ext cx="4434840" cy="274320"/>
           </a:xfrm>
           <a:prstGeom prst="rect">
             <a:avLst/>
@@ -1552,14 +1608,50 @@
           <a:lstStyle/>
           <a:p>
             <a:pPr indent="0" marL="0">
-              <a:lnSpc>
-                <a:spcPct val="120000"/>
-              </a:lnSpc>
               <a:buNone/>
             </a:pPr>
             <a:r>
               <a:rPr lang="en-US" sz="1100" b="1" dirty="0">
                 <a:solidFill>
+                  <a:srgbClr val="F59E0B"/>
+                </a:solidFill>
+                <a:latin typeface="Arial" pitchFamily="34" charset="0"/>
+                <a:ea typeface="Arial" pitchFamily="34" charset="-122"/>
+                <a:cs typeface="Arial" pitchFamily="34" charset="-120"/>
+              </a:rPr>
+              <a:t>INFORMACIÓN ACADÉMICA</a:t>
+            </a:r>
+            <a:endParaRPr lang="en-US" sz="1100" dirty="0"/>
+          </a:p>
+        </p:txBody>
+      </p:sp>
+      <p:sp>
+        <p:nvSpPr>
+          <p:cNvPr id="11" name="Text 9"/>
+          <p:cNvSpPr/>
+          <p:nvPr/>
+        </p:nvSpPr>
+        <p:spPr>
+          <a:xfrm>
+            <a:off x="1188720" y="3520440"/>
+            <a:ext cx="4434840" cy="2240280"/>
+          </a:xfrm>
+          <a:prstGeom prst="rect">
+            <a:avLst/>
+          </a:prstGeom>
+          <a:noFill/>
+          <a:ln/>
+        </p:spPr>
+        <p:txBody>
+          <a:bodyPr wrap="square" rtlCol="0" anchor="t"/>
+          <a:lstStyle/>
+          <a:p>
+            <a:pPr indent="0" marL="0">
+              <a:buNone/>
+            </a:pPr>
+            <a:r>
+              <a:rPr lang="en-US" sz="1000" b="1" dirty="0">
+                <a:solidFill>
                   <a:srgbClr val="FFFFFF"/>
                 </a:solidFill>
                 <a:latin typeface="Arial" pitchFamily="34" charset="0"/>
@@ -1569,15 +1661,12 @@
               <a:t>Institución: </a:t>
             </a:r>
             <a:pPr indent="0" marL="0">
-              <a:lnSpc>
-                <a:spcPct val="120000"/>
-              </a:lnSpc>
-              <a:buNone/>
-            </a:pPr>
-            <a:r>
-              <a:rPr lang="en-US" sz="1100" dirty="0">
-                <a:solidFill>
-                  <a:srgbClr val="9CA3AF"/>
+              <a:buNone/>
+            </a:pPr>
+            <a:r>
+              <a:rPr lang="en-US" sz="1000" dirty="0">
+                <a:solidFill>
+                  <a:srgbClr val="94A3B8"/>
                 </a:solidFill>
                 <a:latin typeface="Arial" pitchFamily="34" charset="0"/>
                 <a:ea typeface="Arial" pitchFamily="34" charset="-122"/>
@@ -1587,13 +1676,10 @@
 </a:t>
             </a:r>
             <a:pPr indent="0" marL="0">
-              <a:lnSpc>
-                <a:spcPct val="120000"/>
-              </a:lnSpc>
-              <a:buNone/>
-            </a:pPr>
-            <a:r>
-              <a:rPr lang="en-US" sz="1100" b="1" dirty="0">
+              <a:buNone/>
+            </a:pPr>
+            <a:r>
+              <a:rPr lang="en-US" sz="1000" b="1" dirty="0">
                 <a:solidFill>
                   <a:srgbClr val="FFFFFF"/>
                 </a:solidFill>
@@ -1604,15 +1690,12 @@
               <a:t>Asignatura: </a:t>
             </a:r>
             <a:pPr indent="0" marL="0">
-              <a:lnSpc>
-                <a:spcPct val="120000"/>
-              </a:lnSpc>
-              <a:buNone/>
-            </a:pPr>
-            <a:r>
-              <a:rPr lang="en-US" sz="1100" dirty="0">
-                <a:solidFill>
-                  <a:srgbClr val="9CA3AF"/>
+              <a:buNone/>
+            </a:pPr>
+            <a:r>
+              <a:rPr lang="en-US" sz="1000" dirty="0">
+                <a:solidFill>
+                  <a:srgbClr val="94A3B8"/>
                 </a:solidFill>
                 <a:latin typeface="Arial" pitchFamily="34" charset="0"/>
                 <a:ea typeface="Arial" pitchFamily="34" charset="-122"/>
@@ -1622,13 +1705,10 @@
 </a:t>
             </a:r>
             <a:pPr indent="0" marL="0">
-              <a:lnSpc>
-                <a:spcPct val="120000"/>
-              </a:lnSpc>
-              <a:buNone/>
-            </a:pPr>
-            <a:r>
-              <a:rPr lang="en-US" sz="1100" b="1" dirty="0">
+              <a:buNone/>
+            </a:pPr>
+            <a:r>
+              <a:rPr lang="en-US" sz="1000" b="1" dirty="0">
                 <a:solidFill>
                   <a:srgbClr val="FFFFFF"/>
                 </a:solidFill>
@@ -1639,15 +1719,12 @@
               <a:t>Docente: </a:t>
             </a:r>
             <a:pPr indent="0" marL="0">
-              <a:lnSpc>
-                <a:spcPct val="120000"/>
-              </a:lnSpc>
-              <a:buNone/>
-            </a:pPr>
-            <a:r>
-              <a:rPr lang="en-US" sz="1100" dirty="0">
-                <a:solidFill>
-                  <a:srgbClr val="9CA3AF"/>
+              <a:buNone/>
+            </a:pPr>
+            <a:r>
+              <a:rPr lang="en-US" sz="1000" dirty="0">
+                <a:solidFill>
+                  <a:srgbClr val="94A3B8"/>
                 </a:solidFill>
                 <a:latin typeface="Arial" pitchFamily="34" charset="0"/>
                 <a:ea typeface="Arial" pitchFamily="34" charset="-122"/>
@@ -1657,9 +1734,84 @@
 </a:t>
             </a:r>
             <a:pPr indent="0" marL="0">
-              <a:lnSpc>
-                <a:spcPct val="120000"/>
-              </a:lnSpc>
+              <a:buNone/>
+            </a:pPr>
+            <a:r>
+              <a:rPr lang="en-US" sz="1000" b="1" dirty="0">
+                <a:solidFill>
+                  <a:srgbClr val="FFFFFF"/>
+                </a:solidFill>
+                <a:latin typeface="Arial" pitchFamily="34" charset="0"/>
+                <a:ea typeface="Arial" pitchFamily="34" charset="-122"/>
+                <a:cs typeface="Arial" pitchFamily="34" charset="-120"/>
+              </a:rPr>
+              <a:t>Ponderación: </a:t>
+            </a:r>
+            <a:pPr indent="0" marL="0">
+              <a:buNone/>
+            </a:pPr>
+            <a:r>
+              <a:rPr lang="en-US" sz="1000" b="1" dirty="0">
+                <a:solidFill>
+                  <a:srgbClr val="10B981"/>
+                </a:solidFill>
+                <a:latin typeface="Arial" pitchFamily="34" charset="0"/>
+                <a:ea typeface="Arial" pitchFamily="34" charset="-122"/>
+                <a:cs typeface="Arial" pitchFamily="34" charset="-120"/>
+              </a:rPr>
+              <a:t>40% Asignatura (Encargo: 40% | Presentación: 60%)</a:t>
+            </a:r>
+            <a:endParaRPr lang="en-US" sz="1000" dirty="0"/>
+          </a:p>
+        </p:txBody>
+      </p:sp>
+      <p:sp>
+        <p:nvSpPr>
+          <p:cNvPr id="12" name="Shape 10"/>
+          <p:cNvSpPr/>
+          <p:nvPr/>
+        </p:nvSpPr>
+        <p:spPr>
+          <a:xfrm>
+            <a:off x="6291072" y="2971800"/>
+            <a:ext cx="4983480" cy="2971800"/>
+          </a:xfrm>
+          <a:prstGeom prst="roundRect">
+            <a:avLst/>
+          </a:prstGeom>
+          <a:solidFill>
+            <a:srgbClr val="151C2C"/>
+          </a:solidFill>
+          <a:ln w="12700">
+            <a:solidFill>
+              <a:srgbClr val="232E45"/>
+            </a:solidFill>
+            <a:prstDash val="solid"/>
+          </a:ln>
+        </p:spPr>
+      </p:sp>
+      <p:sp>
+        <p:nvSpPr>
+          <p:cNvPr id="13" name="Text 11"/>
+          <p:cNvSpPr/>
+          <p:nvPr/>
+        </p:nvSpPr>
+        <p:spPr>
+          <a:xfrm>
+            <a:off x="6565392" y="3154680"/>
+            <a:ext cx="4434840" cy="274320"/>
+          </a:xfrm>
+          <a:prstGeom prst="rect">
+            <a:avLst/>
+          </a:prstGeom>
+          <a:noFill/>
+          <a:ln/>
+        </p:spPr>
+        <p:txBody>
+          <a:bodyPr wrap="square" rtlCol="0" anchor="ctr"/>
+          <a:lstStyle/>
+          <a:p>
+            <a:pPr indent="0" marL="0">
               <a:buNone/>
             </a:pPr>
             <a:r>
@@ -1671,16 +1823,38 @@
                 <a:ea typeface="Arial" pitchFamily="34" charset="-122"/>
                 <a:cs typeface="Arial" pitchFamily="34" charset="-120"/>
               </a:rPr>
-              <a:t>Expositor / Integrantes: </a:t>
-            </a:r>
-            <a:pPr indent="0" marL="0">
-              <a:lnSpc>
-                <a:spcPct val="120000"/>
-              </a:lnSpc>
-              <a:buNone/>
-            </a:pPr>
-            <a:r>
-              <a:rPr lang="en-US" sz="1100" b="1" dirty="0">
+              <a:t>EQUIPO DE DESARROLLO Y MOTOR</a:t>
+            </a:r>
+            <a:endParaRPr lang="en-US" sz="1100" dirty="0"/>
+          </a:p>
+        </p:txBody>
+      </p:sp>
+      <p:sp>
+        <p:nvSpPr>
+          <p:cNvPr id="14" name="Text 12"/>
+          <p:cNvSpPr/>
+          <p:nvPr/>
+        </p:nvSpPr>
+        <p:spPr>
+          <a:xfrm>
+            <a:off x="6565392" y="3520440"/>
+            <a:ext cx="4434840" cy="2240280"/>
+          </a:xfrm>
+          <a:prstGeom prst="rect">
+            <a:avLst/>
+          </a:prstGeom>
+          <a:noFill/>
+          <a:ln/>
+        </p:spPr>
+        <p:txBody>
+          <a:bodyPr wrap="square" rtlCol="0" anchor="t"/>
+          <a:lstStyle/>
+          <a:p>
+            <a:pPr indent="0" marL="0">
+              <a:buNone/>
+            </a:pPr>
+            <a:r>
+              <a:rPr lang="en-US" sz="1000" b="1" dirty="0">
                 <a:solidFill>
                   <a:srgbClr val="FFFFFF"/>
                 </a:solidFill>
@@ -1688,9 +1862,149 @@
                 <a:ea typeface="Arial" pitchFamily="34" charset="-122"/>
                 <a:cs typeface="Arial" pitchFamily="34" charset="-120"/>
               </a:rPr>
-              <a:t>Eduardo Aránguiz, Luciano Zaninovic, Kevin Urbina</a:t>
-            </a:r>
-            <a:endParaRPr lang="en-US" sz="1100" dirty="0"/>
+              <a:t>Expositor: </a:t>
+            </a:r>
+            <a:pPr indent="0" marL="0">
+              <a:buNone/>
+            </a:pPr>
+            <a:r>
+              <a:rPr lang="en-US" sz="1000" b="1" dirty="0">
+                <a:solidFill>
+                  <a:srgbClr val="F59E0B"/>
+                </a:solidFill>
+                <a:latin typeface="Arial" pitchFamily="34" charset="0"/>
+                <a:ea typeface="Arial" pitchFamily="34" charset="-122"/>
+                <a:cs typeface="Arial" pitchFamily="34" charset="-120"/>
+              </a:rPr>
+              <a:t>Eduardo Aránguiz
+</a:t>
+            </a:r>
+            <a:pPr indent="0" marL="0">
+              <a:buNone/>
+            </a:pPr>
+            <a:r>
+              <a:rPr lang="en-US" sz="1000" b="1" dirty="0">
+                <a:solidFill>
+                  <a:srgbClr val="FFFFFF"/>
+                </a:solidFill>
+                <a:latin typeface="Arial" pitchFamily="34" charset="0"/>
+                <a:ea typeface="Arial" pitchFamily="34" charset="-122"/>
+                <a:cs typeface="Arial" pitchFamily="34" charset="-120"/>
+              </a:rPr>
+              <a:t>Integrantes: </a:t>
+            </a:r>
+            <a:pPr indent="0" marL="0">
+              <a:buNone/>
+            </a:pPr>
+            <a:r>
+              <a:rPr lang="en-US" sz="1000" dirty="0">
+                <a:solidFill>
+                  <a:srgbClr val="94A3B8"/>
+                </a:solidFill>
+                <a:latin typeface="Arial" pitchFamily="34" charset="0"/>
+                <a:ea typeface="Arial" pitchFamily="34" charset="-122"/>
+                <a:cs typeface="Arial" pitchFamily="34" charset="-120"/>
+              </a:rPr>
+              <a:t>Luciano Zaninovic, Kevin Urbina
+</a:t>
+            </a:r>
+            <a:pPr indent="0" marL="0">
+              <a:buNone/>
+            </a:pPr>
+            <a:r>
+              <a:rPr lang="en-US" sz="1000" b="1" dirty="0">
+                <a:solidFill>
+                  <a:srgbClr val="FFFFFF"/>
+                </a:solidFill>
+                <a:latin typeface="Arial" pitchFamily="34" charset="0"/>
+                <a:ea typeface="Arial" pitchFamily="34" charset="-122"/>
+                <a:cs typeface="Arial" pitchFamily="34" charset="-120"/>
+              </a:rPr>
+              <a:t>Base de Datos: </a:t>
+            </a:r>
+            <a:pPr indent="0" marL="0">
+              <a:buNone/>
+            </a:pPr>
+            <a:r>
+              <a:rPr lang="en-US" sz="1000" dirty="0">
+                <a:solidFill>
+                  <a:srgbClr val="94A3B8"/>
+                </a:solidFill>
+                <a:latin typeface="Arial" pitchFamily="34" charset="0"/>
+                <a:ea typeface="Arial" pitchFamily="34" charset="-122"/>
+                <a:cs typeface="Arial" pitchFamily="34" charset="-120"/>
+              </a:rPr>
+              <a:t>Oracle Autonomous Database Cloud (19c/21c)
+</a:t>
+            </a:r>
+            <a:pPr indent="0" marL="0">
+              <a:buNone/>
+            </a:pPr>
+            <a:r>
+              <a:rPr lang="en-US" sz="1000" b="1" dirty="0">
+                <a:solidFill>
+                  <a:srgbClr val="FFFFFF"/>
+                </a:solidFill>
+                <a:latin typeface="Arial" pitchFamily="34" charset="0"/>
+                <a:ea typeface="Arial" pitchFamily="34" charset="-122"/>
+                <a:cs typeface="Arial" pitchFamily="34" charset="-120"/>
+              </a:rPr>
+              <a:t>Región &amp; Esquema: </a:t>
+            </a:r>
+            <a:pPr indent="0" marL="0">
+              <a:buNone/>
+            </a:pPr>
+            <a:r>
+              <a:rPr lang="en-US" sz="1000" b="1" dirty="0">
+                <a:solidFill>
+                  <a:srgbClr val="38BDF8"/>
+                </a:solidFill>
+                <a:latin typeface="Arial" pitchFamily="34" charset="0"/>
+                <a:ea typeface="Arial" pitchFamily="34" charset="-122"/>
+                <a:cs typeface="Arial" pitchFamily="34" charset="-120"/>
+              </a:rPr>
+              <a:t>sa-santiago-1 / ESTILOURBANO</a:t>
+            </a:r>
+            <a:endParaRPr lang="en-US" sz="1000" dirty="0"/>
+          </a:p>
+        </p:txBody>
+      </p:sp>
+      <p:sp>
+        <p:nvSpPr>
+          <p:cNvPr id="15" name="Text 13"/>
+          <p:cNvSpPr/>
+          <p:nvPr/>
+        </p:nvSpPr>
+        <p:spPr>
+          <a:xfrm>
+            <a:off x="914400" y="6263640"/>
+            <a:ext cx="10362895" cy="274320"/>
+          </a:xfrm>
+          <a:prstGeom prst="rect">
+            <a:avLst/>
+          </a:prstGeom>
+          <a:noFill/>
+          <a:ln/>
+        </p:spPr>
+        <p:txBody>
+          <a:bodyPr wrap="square" rtlCol="0" anchor="ctr"/>
+          <a:lstStyle/>
+          <a:p>
+            <a:pPr indent="0" marL="0">
+              <a:buNone/>
+            </a:pPr>
+            <a:r>
+              <a:rPr lang="en-US" sz="900" dirty="0">
+                <a:solidFill>
+                  <a:srgbClr val="94A3B8"/>
+                </a:solidFill>
+                <a:latin typeface="Arial" pitchFamily="34" charset="0"/>
+                <a:ea typeface="Arial" pitchFamily="34" charset="-122"/>
+                <a:cs typeface="Arial" pitchFamily="34" charset="-120"/>
+              </a:rPr>
+              <a:t>Taller de Base de Datos (BDY1103) • Duoc UC • Sede Melipilla / Santiago • 2026</a:t>
+            </a:r>
+            <a:endParaRPr lang="en-US" sz="900" dirty="0"/>
           </a:p>
         </p:txBody>
       </p:sp>
@@ -1708,7 +2022,7 @@
     <p:bg>
       <p:bgPr>
         <a:solidFill>
-          <a:srgbClr val="0B0B0D"/>
+          <a:srgbClr val="0B0F19"/>
         </a:solidFill>
       </p:bgPr>
     </p:bg>
@@ -1735,7 +2049,7 @@
         <p:spPr>
           <a:xfrm>
             <a:off x="0" y="0"/>
-            <a:ext cx="9144000" cy="91440"/>
+            <a:ext cx="12191695" cy="73152"/>
           </a:xfrm>
           <a:prstGeom prst="rect">
             <a:avLst/>
@@ -1754,8 +2068,8 @@
         </p:nvSpPr>
         <p:spPr>
           <a:xfrm>
-            <a:off x="731520" y="457200"/>
-            <a:ext cx="7315200" cy="274320"/>
+            <a:off x="914400" y="411480"/>
+            <a:ext cx="8229600" cy="228600"/>
           </a:xfrm>
           <a:prstGeom prst="rect">
             <a:avLst/>
@@ -1771,7 +2085,7 @@
               <a:buNone/>
             </a:pPr>
             <a:r>
-              <a:rPr lang="en-US" sz="1000" b="1" spc="200" kern="0" dirty="0">
+              <a:rPr lang="en-US" sz="1000" b="1" spc="150" kern="0" dirty="0">
                 <a:solidFill>
                   <a:srgbClr val="F59E0B"/>
                 </a:solidFill>
@@ -1779,7 +2093,7 @@
                 <a:ea typeface="Arial" pitchFamily="34" charset="-122"/>
                 <a:cs typeface="Arial" pitchFamily="34" charset="-120"/>
               </a:rPr>
-              <a:t>1. CONTEXTO DE NEGOCIO</a:t>
+              <a:t>1. CONTEXTO EMPRESARIAL</a:t>
             </a:r>
             <a:endParaRPr lang="en-US" sz="1000" dirty="0"/>
           </a:p>
@@ -1793,8 +2107,8 @@
         </p:nvSpPr>
         <p:spPr>
           <a:xfrm>
-            <a:off x="731520" y="731520"/>
-            <a:ext cx="10515600" cy="548640"/>
+            <a:off x="914400" y="685800"/>
+            <a:ext cx="10362895" cy="411480"/>
           </a:xfrm>
           <a:prstGeom prst="rect">
             <a:avLst/>
@@ -1818,7 +2132,7 @@
                 <a:ea typeface="Arial" pitchFamily="34" charset="-122"/>
                 <a:cs typeface="Arial" pitchFamily="34" charset="-120"/>
               </a:rPr>
-              <a:t>Problema Operacional y Justificación de la Solución</a:t>
+              <a:t>Problema Operacional vs. Solución de Gobernanza en PL/SQL</a:t>
             </a:r>
             <a:endParaRPr lang="en-US" sz="2200" dirty="0"/>
           </a:p>
@@ -1826,14 +2140,37 @@
       </p:sp>
       <p:sp>
         <p:nvSpPr>
-          <p:cNvPr id="5" name="Text 3"/>
-          <p:cNvSpPr/>
-          <p:nvPr/>
-        </p:nvSpPr>
-        <p:spPr>
-          <a:xfrm>
-            <a:off x="731520" y="6400800"/>
-            <a:ext cx="7315200" cy="274320"/>
+          <p:cNvPr id="5" name="Shape 3"/>
+          <p:cNvSpPr/>
+          <p:nvPr/>
+        </p:nvSpPr>
+        <p:spPr>
+          <a:xfrm>
+            <a:off x="914400" y="1188720"/>
+            <a:ext cx="10362895" cy="0"/>
+          </a:xfrm>
+          <a:prstGeom prst="line">
+            <a:avLst/>
+          </a:prstGeom>
+          <a:noFill/>
+          <a:ln w="12700">
+            <a:solidFill>
+              <a:srgbClr val="232E45"/>
+            </a:solidFill>
+            <a:prstDash val="solid"/>
+          </a:ln>
+        </p:spPr>
+      </p:sp>
+      <p:sp>
+        <p:nvSpPr>
+          <p:cNvPr id="6" name="Text 4"/>
+          <p:cNvSpPr/>
+          <p:nvPr/>
+        </p:nvSpPr>
+        <p:spPr>
+          <a:xfrm>
+            <a:off x="914400" y="6263640"/>
+            <a:ext cx="6858000" cy="274320"/>
           </a:xfrm>
           <a:prstGeom prst="rect">
             <a:avLst/>
@@ -1851,13 +2188,13 @@
             <a:r>
               <a:rPr lang="en-US" sz="900" dirty="0">
                 <a:solidFill>
-                  <a:srgbClr val="9CA3AF"/>
-                </a:solidFill>
-                <a:latin typeface="Arial" pitchFamily="34" charset="0"/>
-                <a:ea typeface="Arial" pitchFamily="34" charset="-122"/>
-                <a:cs typeface="Arial" pitchFamily="34" charset="-120"/>
-              </a:rPr>
-              <a:t>Taller de Base de Datos (BDY1103) | Caso Estilo Urbano | Duoc UC</a:t>
+                  <a:srgbClr val="94A3B8"/>
+                </a:solidFill>
+                <a:latin typeface="Arial" pitchFamily="34" charset="0"/>
+                <a:ea typeface="Arial" pitchFamily="34" charset="-122"/>
+                <a:cs typeface="Arial" pitchFamily="34" charset="-120"/>
+              </a:rPr>
+              <a:t>Taller de Base de Datos (BDY1103) • Caso: Estilo Urbano • Duoc UC</a:t>
             </a:r>
             <a:endParaRPr lang="en-US" sz="900" dirty="0"/>
           </a:p>
@@ -1865,14 +2202,14 @@
       </p:sp>
       <p:sp>
         <p:nvSpPr>
-          <p:cNvPr id="6" name="Text 4"/>
-          <p:cNvSpPr/>
-          <p:nvPr/>
-        </p:nvSpPr>
-        <p:spPr>
-          <a:xfrm>
-            <a:off x="9144000" y="6400800"/>
-            <a:ext cx="2286000" cy="274320"/>
+          <p:cNvPr id="7" name="Text 5"/>
+          <p:cNvSpPr/>
+          <p:nvPr/>
+        </p:nvSpPr>
+        <p:spPr>
+          <a:xfrm>
+            <a:off x="8046720" y="6263640"/>
+            <a:ext cx="3230575" cy="274320"/>
           </a:xfrm>
           <a:prstGeom prst="rect">
             <a:avLst/>
@@ -1888,7 +2225,7 @@
               <a:buNone/>
             </a:pPr>
             <a:r>
-              <a:rPr lang="en-US" sz="900" dirty="0">
+              <a:rPr lang="en-US" sz="900" b="1" dirty="0">
                 <a:solidFill>
                   <a:srgbClr val="F59E0B"/>
                 </a:solidFill>
@@ -1896,7 +2233,7 @@
                 <a:ea typeface="Arial" pitchFamily="34" charset="-122"/>
                 <a:cs typeface="Arial" pitchFamily="34" charset="-120"/>
               </a:rPr>
-              <a:t>EP2 - 60% Ponderación</a:t>
+              <a:t>Evaluación Parcial N° 2 (60%)</a:t>
             </a:r>
             <a:endParaRPr lang="en-US" sz="900" dirty="0"/>
           </a:p>
@@ -1904,24 +2241,24 @@
       </p:sp>
       <p:sp>
         <p:nvSpPr>
-          <p:cNvPr id="7" name="Shape 5"/>
-          <p:cNvSpPr/>
-          <p:nvPr/>
-        </p:nvSpPr>
-        <p:spPr>
-          <a:xfrm>
-            <a:off x="731520" y="1463040"/>
-            <a:ext cx="5120640" cy="4572000"/>
+          <p:cNvPr id="8" name="Shape 6"/>
+          <p:cNvSpPr/>
+          <p:nvPr/>
+        </p:nvSpPr>
+        <p:spPr>
+          <a:xfrm>
+            <a:off x="914400" y="1417320"/>
+            <a:ext cx="4983480" cy="4526280"/>
           </a:xfrm>
           <a:prstGeom prst="roundRect">
             <a:avLst/>
           </a:prstGeom>
           <a:solidFill>
-            <a:srgbClr val="141418"/>
+            <a:srgbClr val="151C2C"/>
           </a:solidFill>
           <a:ln w="19050">
             <a:solidFill>
-              <a:srgbClr val="7F1D1D"/>
+              <a:srgbClr val="4B1D24"/>
             </a:solidFill>
             <a:prstDash val="solid"/>
           </a:ln>
@@ -1929,14 +2266,14 @@
       </p:sp>
       <p:sp>
         <p:nvSpPr>
-          <p:cNvPr id="8" name="Text 6"/>
-          <p:cNvSpPr/>
-          <p:nvPr/>
-        </p:nvSpPr>
-        <p:spPr>
-          <a:xfrm>
-            <a:off x="1005840" y="1737360"/>
-            <a:ext cx="4572000" cy="365760"/>
+          <p:cNvPr id="9" name="Text 7"/>
+          <p:cNvSpPr/>
+          <p:nvPr/>
+        </p:nvSpPr>
+        <p:spPr>
+          <a:xfrm>
+            <a:off x="1188720" y="1645920"/>
+            <a:ext cx="4434840" cy="274320"/>
           </a:xfrm>
           <a:prstGeom prst="rect">
             <a:avLst/>
@@ -1952,7 +2289,7 @@
               <a:buNone/>
             </a:pPr>
             <a:r>
-              <a:rPr lang="en-US" sz="1300" b="1" dirty="0">
+              <a:rPr lang="en-US" sz="1100" b="1" dirty="0">
                 <a:solidFill>
                   <a:srgbClr val="EF4444"/>
                 </a:solidFill>
@@ -1960,22 +2297,22 @@
                 <a:ea typeface="Arial" pitchFamily="34" charset="-122"/>
                 <a:cs typeface="Arial" pitchFamily="34" charset="-120"/>
               </a:rPr>
-              <a:t>EL PROBLEMA EN "ESTILO URBANO"</a:t>
-            </a:r>
-            <a:endParaRPr lang="en-US" sz="1300" dirty="0"/>
-          </a:p>
-        </p:txBody>
-      </p:sp>
-      <p:sp>
-        <p:nvSpPr>
-          <p:cNvPr id="9" name="Text 7"/>
-          <p:cNvSpPr/>
-          <p:nvPr/>
-        </p:nvSpPr>
-        <p:spPr>
-          <a:xfrm>
-            <a:off x="1005840" y="2194560"/>
-            <a:ext cx="4572000" cy="3657600"/>
+              <a:t>VULNERABILIDADES DEL MODELO PREVIO</a:t>
+            </a:r>
+            <a:endParaRPr lang="en-US" sz="1100" dirty="0"/>
+          </a:p>
+        </p:txBody>
+      </p:sp>
+      <p:sp>
+        <p:nvSpPr>
+          <p:cNvPr id="10" name="Text 8"/>
+          <p:cNvSpPr/>
+          <p:nvPr/>
+        </p:nvSpPr>
+        <p:spPr>
+          <a:xfrm>
+            <a:off x="1188720" y="1965960"/>
+            <a:ext cx="4434840" cy="3794760"/>
           </a:xfrm>
           <a:prstGeom prst="rect">
             <a:avLst/>
@@ -1984,14 +2321,14 @@
           <a:ln/>
         </p:spPr>
         <p:txBody>
-          <a:bodyPr wrap="square" rtlCol="0" anchor="ctr"/>
-          <a:lstStyle/>
-          <a:p>
-            <a:pPr indent="0" marL="0">
-              <a:buNone/>
-            </a:pPr>
-            <a:r>
-              <a:rPr lang="en-US" sz="1100" b="1" dirty="0">
+          <a:bodyPr wrap="square" rtlCol="0" anchor="t"/>
+          <a:lstStyle/>
+          <a:p>
+            <a:pPr indent="0" marL="0">
+              <a:buNone/>
+            </a:pPr>
+            <a:r>
+              <a:rPr lang="en-US" sz="950" b="1" dirty="0">
                 <a:solidFill>
                   <a:srgbClr val="FFFFFF"/>
                 </a:solidFill>
@@ -1999,29 +2336,29 @@
                 <a:ea typeface="Arial" pitchFamily="34" charset="-122"/>
                 <a:cs typeface="Arial" pitchFamily="34" charset="-120"/>
               </a:rPr>
-              <a:t>• Operación Histórica Descentralizada:
+              <a:t>• Operación Manual sin Control Transaccional:
 </a:t>
             </a:r>
             <a:pPr indent="0" marL="0">
               <a:buNone/>
             </a:pPr>
             <a:r>
-              <a:rPr lang="en-US" sz="1100" dirty="0">
-                <a:solidFill>
-                  <a:srgbClr val="9CA3AF"/>
-                </a:solidFill>
-                <a:latin typeface="Arial" pitchFamily="34" charset="0"/>
-                <a:ea typeface="Arial" pitchFamily="34" charset="-122"/>
-                <a:cs typeface="Arial" pitchFamily="34" charset="-120"/>
-              </a:rPr>
-              <a:t>  Ventas por Instagram y WhatsApp sin validaciones atómicas.
+              <a:rPr lang="en-US" sz="950" dirty="0">
+                <a:solidFill>
+                  <a:srgbClr val="94A3B8"/>
+                </a:solidFill>
+                <a:latin typeface="Arial" pitchFamily="34" charset="0"/>
+                <a:ea typeface="Arial" pitchFamily="34" charset="-122"/>
+                <a:cs typeface="Arial" pitchFamily="34" charset="-120"/>
+              </a:rPr>
+              <a:t>  Ventas gestionadas por chat o planillas sin atomicidad, exponiendo la tienda a sobreventa y descuadre de inventario.
 </a:t>
             </a:r>
             <a:pPr indent="0" marL="0">
               <a:buNone/>
             </a:pPr>
             <a:r>
-              <a:rPr lang="en-US" sz="1100" b="1" dirty="0">
+              <a:rPr lang="en-US" sz="950" b="1" dirty="0">
                 <a:solidFill>
                   <a:srgbClr val="FFFFFF"/>
                 </a:solidFill>
@@ -2029,29 +2366,29 @@
                 <a:ea typeface="Arial" pitchFamily="34" charset="-122"/>
                 <a:cs typeface="Arial" pitchFamily="34" charset="-120"/>
               </a:rPr>
-              <a:t>• Riesgo Crítico en Remuneraciones:
+              <a:t>• Falta Crítica de Auditoría Salarial:
 </a:t>
             </a:r>
             <a:pPr indent="0" marL="0">
               <a:buNone/>
             </a:pPr>
             <a:r>
-              <a:rPr lang="en-US" sz="1100" dirty="0">
-                <a:solidFill>
-                  <a:srgbClr val="9CA3AF"/>
-                </a:solidFill>
-                <a:latin typeface="Arial" pitchFamily="34" charset="0"/>
-                <a:ea typeface="Arial" pitchFamily="34" charset="-122"/>
-                <a:cs typeface="Arial" pitchFamily="34" charset="-120"/>
-              </a:rPr>
-              <a:t>  Modificaciones manuales de sueldos sin auditoría de quién, cuándo o cuánto se alteró.
+              <a:rPr lang="en-US" sz="950" dirty="0">
+                <a:solidFill>
+                  <a:srgbClr val="94A3B8"/>
+                </a:solidFill>
+                <a:latin typeface="Arial" pitchFamily="34" charset="0"/>
+                <a:ea typeface="Arial" pitchFamily="34" charset="-122"/>
+                <a:cs typeface="Arial" pitchFamily="34" charset="-120"/>
+              </a:rPr>
+              <a:t>  Modificaciones de sueldos sin registro histórico de valores previos (:OLD), impidiendo rastrear aumentos no autorizados.
 </a:t>
             </a:r>
             <a:pPr indent="0" marL="0">
               <a:buNone/>
             </a:pPr>
             <a:r>
-              <a:rPr lang="en-US" sz="1100" b="1" dirty="0">
+              <a:rPr lang="en-US" sz="950" b="1" dirty="0">
                 <a:solidFill>
                   <a:srgbClr val="FFFFFF"/>
                 </a:solidFill>
@@ -2066,22 +2403,22 @@
               <a:buNone/>
             </a:pPr>
             <a:r>
-              <a:rPr lang="en-US" sz="1100" dirty="0">
-                <a:solidFill>
-                  <a:srgbClr val="9CA3AF"/>
-                </a:solidFill>
-                <a:latin typeface="Arial" pitchFamily="34" charset="0"/>
-                <a:ea typeface="Arial" pitchFamily="34" charset="-122"/>
-                <a:cs typeface="Arial" pitchFamily="34" charset="-120"/>
-              </a:rPr>
-              <a:t>  Incapacidad de validar si la nómina de salarios excede los ingresos de la tienda.
+              <a:rPr lang="en-US" sz="950" dirty="0">
+                <a:solidFill>
+                  <a:srgbClr val="94A3B8"/>
+                </a:solidFill>
+                <a:latin typeface="Arial" pitchFamily="34" charset="0"/>
+                <a:ea typeface="Arial" pitchFamily="34" charset="-122"/>
+                <a:cs typeface="Arial" pitchFamily="34" charset="-120"/>
+              </a:rPr>
+              <a:t>  Incapacidad de validar si la nómina salarial total supera las ventas y liquidez real de la empresa.
 </a:t>
             </a:r>
             <a:pPr indent="0" marL="0">
               <a:buNone/>
             </a:pPr>
             <a:r>
-              <a:rPr lang="en-US" sz="1100" b="1" dirty="0">
+              <a:rPr lang="en-US" sz="950" b="1" dirty="0">
                 <a:solidFill>
                   <a:srgbClr val="FFFFFF"/>
                 </a:solidFill>
@@ -2089,47 +2426,47 @@
                 <a:ea typeface="Arial" pitchFamily="34" charset="-122"/>
                 <a:cs typeface="Arial" pitchFamily="34" charset="-120"/>
               </a:rPr>
-              <a:t>• Quiebres en Trazabilidad de Pedidos:
+              <a:t>• Pérdida de Trazabilidad en Fulfillment:
 </a:t>
             </a:r>
             <a:pPr indent="0" marL="0">
               <a:buNone/>
             </a:pPr>
             <a:r>
-              <a:rPr lang="en-US" sz="1100" dirty="0">
-                <a:solidFill>
-                  <a:srgbClr val="9CA3AF"/>
-                </a:solidFill>
-                <a:latin typeface="Arial" pitchFamily="34" charset="0"/>
-                <a:ea typeface="Arial" pitchFamily="34" charset="-122"/>
-                <a:cs typeface="Arial" pitchFamily="34" charset="-120"/>
-              </a:rPr>
-              <a:t>  Pérdida de visibilidad del estado de preparación en bodega.</a:t>
-            </a:r>
-            <a:endParaRPr lang="en-US" sz="1100" dirty="0"/>
-          </a:p>
-        </p:txBody>
-      </p:sp>
-      <p:sp>
-        <p:nvSpPr>
-          <p:cNvPr id="10" name="Shape 8"/>
-          <p:cNvSpPr/>
-          <p:nvPr/>
-        </p:nvSpPr>
-        <p:spPr>
-          <a:xfrm>
-            <a:off x="6217920" y="1463040"/>
-            <a:ext cx="5120640" cy="4572000"/>
+              <a:rPr lang="en-US" sz="950" dirty="0">
+                <a:solidFill>
+                  <a:srgbClr val="94A3B8"/>
+                </a:solidFill>
+                <a:latin typeface="Arial" pitchFamily="34" charset="0"/>
+                <a:ea typeface="Arial" pitchFamily="34" charset="-122"/>
+                <a:cs typeface="Arial" pitchFamily="34" charset="-120"/>
+              </a:rPr>
+              <a:t>  Clientes y operadores sin visibilidad del estado real de empaque y despacho de pedidos.</a:t>
+            </a:r>
+            <a:endParaRPr lang="en-US" sz="950" dirty="0"/>
+          </a:p>
+        </p:txBody>
+      </p:sp>
+      <p:sp>
+        <p:nvSpPr>
+          <p:cNvPr id="11" name="Shape 9"/>
+          <p:cNvSpPr/>
+          <p:nvPr/>
+        </p:nvSpPr>
+        <p:spPr>
+          <a:xfrm>
+            <a:off x="6291072" y="1417320"/>
+            <a:ext cx="4983480" cy="4526280"/>
           </a:xfrm>
           <a:prstGeom prst="roundRect">
             <a:avLst/>
           </a:prstGeom>
           <a:solidFill>
-            <a:srgbClr val="141418"/>
+            <a:srgbClr val="151C2C"/>
           </a:solidFill>
           <a:ln w="19050">
             <a:solidFill>
-              <a:srgbClr val="065F46"/>
+              <a:srgbClr val="0E4429"/>
             </a:solidFill>
             <a:prstDash val="solid"/>
           </a:ln>
@@ -2137,14 +2474,14 @@
       </p:sp>
       <p:sp>
         <p:nvSpPr>
-          <p:cNvPr id="11" name="Text 9"/>
-          <p:cNvSpPr/>
-          <p:nvPr/>
-        </p:nvSpPr>
-        <p:spPr>
-          <a:xfrm>
-            <a:off x="6492240" y="1737360"/>
-            <a:ext cx="4572000" cy="365760"/>
+          <p:cNvPr id="12" name="Text 10"/>
+          <p:cNvSpPr/>
+          <p:nvPr/>
+        </p:nvSpPr>
+        <p:spPr>
+          <a:xfrm>
+            <a:off x="6565392" y="1645920"/>
+            <a:ext cx="4434840" cy="274320"/>
           </a:xfrm>
           <a:prstGeom prst="rect">
             <a:avLst/>
@@ -2160,7 +2497,7 @@
               <a:buNone/>
             </a:pPr>
             <a:r>
-              <a:rPr lang="en-US" sz="1300" b="1" dirty="0">
+              <a:rPr lang="en-US" sz="1100" b="1" dirty="0">
                 <a:solidFill>
                   <a:srgbClr val="10B981"/>
                 </a:solidFill>
@@ -2168,22 +2505,22 @@
                 <a:ea typeface="Arial" pitchFamily="34" charset="-122"/>
                 <a:cs typeface="Arial" pitchFamily="34" charset="-120"/>
               </a:rPr>
-              <a:t>LA SOLUCIÓN EN ORACLE DATABASE (EP2)</a:t>
-            </a:r>
-            <a:endParaRPr lang="en-US" sz="1300" dirty="0"/>
-          </a:p>
-        </p:txBody>
-      </p:sp>
-      <p:sp>
-        <p:nvSpPr>
-          <p:cNvPr id="12" name="Text 10"/>
-          <p:cNvSpPr/>
-          <p:nvPr/>
-        </p:nvSpPr>
-        <p:spPr>
-          <a:xfrm>
-            <a:off x="6492240" y="2194560"/>
-            <a:ext cx="4572000" cy="3657600"/>
+              <a:t>SOLUCIÓN ARQUITECTURAL EN ORACLE DATABASE</a:t>
+            </a:r>
+            <a:endParaRPr lang="en-US" sz="1100" dirty="0"/>
+          </a:p>
+        </p:txBody>
+      </p:sp>
+      <p:sp>
+        <p:nvSpPr>
+          <p:cNvPr id="13" name="Text 11"/>
+          <p:cNvSpPr/>
+          <p:nvPr/>
+        </p:nvSpPr>
+        <p:spPr>
+          <a:xfrm>
+            <a:off x="6565392" y="1965960"/>
+            <a:ext cx="4434840" cy="3794760"/>
           </a:xfrm>
           <a:prstGeom prst="rect">
             <a:avLst/>
@@ -2192,14 +2529,14 @@
           <a:ln/>
         </p:spPr>
         <p:txBody>
-          <a:bodyPr wrap="square" rtlCol="0" anchor="ctr"/>
-          <a:lstStyle/>
-          <a:p>
-            <a:pPr indent="0" marL="0">
-              <a:buNone/>
-            </a:pPr>
-            <a:r>
-              <a:rPr lang="en-US" sz="1100" b="1" dirty="0">
+          <a:bodyPr wrap="square" rtlCol="0" anchor="t"/>
+          <a:lstStyle/>
+          <a:p>
+            <a:pPr indent="0" marL="0">
+              <a:buNone/>
+            </a:pPr>
+            <a:r>
+              <a:rPr lang="en-US" sz="950" b="1" dirty="0">
                 <a:solidFill>
                   <a:srgbClr val="FFFFFF"/>
                 </a:solidFill>
@@ -2207,29 +2544,29 @@
                 <a:ea typeface="Arial" pitchFamily="34" charset="-122"/>
                 <a:cs typeface="Arial" pitchFamily="34" charset="-120"/>
               </a:rPr>
-              <a:t>• Inteligencia en el Motor de Base de Datos:
+              <a:t>• Lógica Centralizada en el Motor de Datos:
 </a:t>
             </a:r>
             <a:pPr indent="0" marL="0">
               <a:buNone/>
             </a:pPr>
             <a:r>
-              <a:rPr lang="en-US" sz="1100" dirty="0">
-                <a:solidFill>
-                  <a:srgbClr val="9CA3AF"/>
-                </a:solidFill>
-                <a:latin typeface="Arial" pitchFamily="34" charset="0"/>
-                <a:ea typeface="Arial" pitchFamily="34" charset="-122"/>
-                <a:cs typeface="Arial" pitchFamily="34" charset="-120"/>
-              </a:rPr>
-              <a:t>  La lógica de negocio no reside en el cliente; Oracle ejecuta y gobierna las reglas.
+              <a:rPr lang="en-US" sz="950" dirty="0">
+                <a:solidFill>
+                  <a:srgbClr val="94A3B8"/>
+                </a:solidFill>
+                <a:latin typeface="Arial" pitchFamily="34" charset="0"/>
+                <a:ea typeface="Arial" pitchFamily="34" charset="-122"/>
+                <a:cs typeface="Arial" pitchFamily="34" charset="-120"/>
+              </a:rPr>
+              <a:t>  Las validaciones y cálculos operan directamente en Oracle Cloud, reduciendo tráfico de red y eliminando riesgos en el cliente.
 </a:t>
             </a:r>
             <a:pPr indent="0" marL="0">
               <a:buNone/>
             </a:pPr>
             <a:r>
-              <a:rPr lang="en-US" sz="1100" b="1" dirty="0">
+              <a:rPr lang="en-US" sz="950" b="1" dirty="0">
                 <a:solidFill>
                   <a:srgbClr val="FFFFFF"/>
                 </a:solidFill>
@@ -2237,29 +2574,29 @@
                 <a:ea typeface="Arial" pitchFamily="34" charset="-122"/>
                 <a:cs typeface="Arial" pitchFamily="34" charset="-120"/>
               </a:rPr>
-              <a:t>• Triggers de Auditoría Irreversibles:
+              <a:t>• Disparadores de Auditoría Irreversibles:
 </a:t>
             </a:r>
             <a:pPr indent="0" marL="0">
               <a:buNone/>
             </a:pPr>
             <a:r>
-              <a:rPr lang="en-US" sz="1100" dirty="0">
-                <a:solidFill>
-                  <a:srgbClr val="9CA3AF"/>
-                </a:solidFill>
-                <a:latin typeface="Arial" pitchFamily="34" charset="0"/>
-                <a:ea typeface="Arial" pitchFamily="34" charset="-122"/>
-                <a:cs typeface="Arial" pitchFamily="34" charset="-120"/>
-              </a:rPr>
-              <a:t>  Captura automática con :OLD y :NEW de cada peso modificado en la nómina.
+              <a:rPr lang="en-US" sz="950" dirty="0">
+                <a:solidFill>
+                  <a:srgbClr val="94A3B8"/>
+                </a:solidFill>
+                <a:latin typeface="Arial" pitchFamily="34" charset="0"/>
+                <a:ea typeface="Arial" pitchFamily="34" charset="-122"/>
+                <a:cs typeface="Arial" pitchFamily="34" charset="-120"/>
+              </a:rPr>
+              <a:t>  Triggers a nivel de fila capturan :OLD y :NEW en AUDITORIA_SUELDO_EMPLEADO con marca de tiempo, usuario y delta.
 </a:t>
             </a:r>
             <a:pPr indent="0" marL="0">
               <a:buNone/>
             </a:pPr>
             <a:r>
-              <a:rPr lang="en-US" sz="1100" b="1" dirty="0">
+              <a:rPr lang="en-US" sz="950" b="1" dirty="0">
                 <a:solidFill>
                   <a:srgbClr val="FFFFFF"/>
                 </a:solidFill>
@@ -2267,29 +2604,29 @@
                 <a:ea typeface="Arial" pitchFamily="34" charset="-122"/>
                 <a:cs typeface="Arial" pitchFamily="34" charset="-120"/>
               </a:rPr>
-              <a:t>• Regla de Solvencia a Nivel de Sentencia:
+              <a:t>• Blindaje Financiero a Nivel de Sentencia:
 </a:t>
             </a:r>
             <a:pPr indent="0" marL="0">
               <a:buNone/>
             </a:pPr>
             <a:r>
-              <a:rPr lang="en-US" sz="1100" dirty="0">
-                <a:solidFill>
-                  <a:srgbClr val="9CA3AF"/>
-                </a:solidFill>
-                <a:latin typeface="Arial" pitchFamily="34" charset="0"/>
-                <a:ea typeface="Arial" pitchFamily="34" charset="-122"/>
-                <a:cs typeface="Arial" pitchFamily="34" charset="-120"/>
-              </a:rPr>
-              <a:t>  Bloqueo automático (ORA-20003) si la nómina supera las ventas consolidadas.
+              <a:rPr lang="en-US" sz="950" dirty="0">
+                <a:solidFill>
+                  <a:srgbClr val="94A3B8"/>
+                </a:solidFill>
+                <a:latin typeface="Arial" pitchFamily="34" charset="0"/>
+                <a:ea typeface="Arial" pitchFamily="34" charset="-122"/>
+                <a:cs typeface="Arial" pitchFamily="34" charset="-120"/>
+              </a:rPr>
+              <a:t>  Trigger global que compara SUM(sueldos) vs SUM(ventas). Si nómina &gt; ventas, cancela la transacción con ORA-20003.
 </a:t>
             </a:r>
             <a:pPr indent="0" marL="0">
               <a:buNone/>
             </a:pPr>
             <a:r>
-              <a:rPr lang="en-US" sz="1100" b="1" dirty="0">
+              <a:rPr lang="en-US" sz="950" b="1" dirty="0">
                 <a:solidFill>
                   <a:srgbClr val="FFFFFF"/>
                 </a:solidFill>
@@ -2297,24 +2634,24 @@
                 <a:ea typeface="Arial" pitchFamily="34" charset="-122"/>
                 <a:cs typeface="Arial" pitchFamily="34" charset="-120"/>
               </a:rPr>
-              <a:t>• Modularidad mediante Packages PL/SQL:
+              <a:t>• Encapsulamiento con Packages Modulares:
 </a:t>
             </a:r>
             <a:pPr indent="0" marL="0">
               <a:buNone/>
             </a:pPr>
             <a:r>
-              <a:rPr lang="en-US" sz="1100" dirty="0">
-                <a:solidFill>
-                  <a:srgbClr val="9CA3AF"/>
-                </a:solidFill>
-                <a:latin typeface="Arial" pitchFamily="34" charset="0"/>
-                <a:ea typeface="Arial" pitchFamily="34" charset="-122"/>
-                <a:cs typeface="Arial" pitchFamily="34" charset="-120"/>
-              </a:rPr>
-              <a:t>  Encapsulamiento estricto con constructores públicos y privados.</a:t>
-            </a:r>
-            <a:endParaRPr lang="en-US" sz="1100" dirty="0"/>
+              <a:rPr lang="en-US" sz="950" dirty="0">
+                <a:solidFill>
+                  <a:srgbClr val="94A3B8"/>
+                </a:solidFill>
+                <a:latin typeface="Arial" pitchFamily="34" charset="0"/>
+                <a:ea typeface="Arial" pitchFamily="34" charset="-122"/>
+                <a:cs typeface="Arial" pitchFamily="34" charset="-120"/>
+              </a:rPr>
+              <a:t>  Estructura de SPEC y BODY con constructores privados que impiden operaciones a usuarios no autorizados.</a:t>
+            </a:r>
+            <a:endParaRPr lang="en-US" sz="950" dirty="0"/>
           </a:p>
         </p:txBody>
       </p:sp>
@@ -2332,7 +2669,7 @@
     <p:bg>
       <p:bgPr>
         <a:solidFill>
-          <a:srgbClr val="0B0B0D"/>
+          <a:srgbClr val="0B0F19"/>
         </a:solidFill>
       </p:bgPr>
     </p:bg>
@@ -2359,7 +2696,7 @@
         <p:spPr>
           <a:xfrm>
             <a:off x="0" y="0"/>
-            <a:ext cx="9144000" cy="91440"/>
+            <a:ext cx="12191695" cy="73152"/>
           </a:xfrm>
           <a:prstGeom prst="rect">
             <a:avLst/>
@@ -2378,8 +2715,8 @@
         </p:nvSpPr>
         <p:spPr>
           <a:xfrm>
-            <a:off x="731520" y="457200"/>
-            <a:ext cx="7315200" cy="274320"/>
+            <a:off x="914400" y="411480"/>
+            <a:ext cx="8229600" cy="228600"/>
           </a:xfrm>
           <a:prstGeom prst="rect">
             <a:avLst/>
@@ -2395,7 +2732,7 @@
               <a:buNone/>
             </a:pPr>
             <a:r>
-              <a:rPr lang="en-US" sz="1000" b="1" spc="200" kern="0" dirty="0">
+              <a:rPr lang="en-US" sz="1000" b="1" spc="150" kern="0" dirty="0">
                 <a:solidFill>
                   <a:srgbClr val="F59E0B"/>
                 </a:solidFill>
@@ -2417,8 +2754,8 @@
         </p:nvSpPr>
         <p:spPr>
           <a:xfrm>
-            <a:off x="731520" y="731520"/>
-            <a:ext cx="10515600" cy="548640"/>
+            <a:off x="914400" y="685800"/>
+            <a:ext cx="10362895" cy="411480"/>
           </a:xfrm>
           <a:prstGeom prst="rect">
             <a:avLst/>
@@ -2442,7 +2779,7 @@
                 <a:ea typeface="Arial" pitchFamily="34" charset="-122"/>
                 <a:cs typeface="Arial" pitchFamily="34" charset="-120"/>
               </a:rPr>
-              <a:t>Procedimientos y Funciones: Procesamiento Masivo y Reutilización</a:t>
+              <a:t>Procedimientos y Funciones: Procesamiento Masivo y Modularidad</a:t>
             </a:r>
             <a:endParaRPr lang="en-US" sz="2200" dirty="0"/>
           </a:p>
@@ -2450,14 +2787,37 @@
       </p:sp>
       <p:sp>
         <p:nvSpPr>
-          <p:cNvPr id="5" name="Text 3"/>
-          <p:cNvSpPr/>
-          <p:nvPr/>
-        </p:nvSpPr>
-        <p:spPr>
-          <a:xfrm>
-            <a:off x="731520" y="6400800"/>
-            <a:ext cx="7315200" cy="274320"/>
+          <p:cNvPr id="5" name="Shape 3"/>
+          <p:cNvSpPr/>
+          <p:nvPr/>
+        </p:nvSpPr>
+        <p:spPr>
+          <a:xfrm>
+            <a:off x="914400" y="1188720"/>
+            <a:ext cx="10362895" cy="0"/>
+          </a:xfrm>
+          <a:prstGeom prst="line">
+            <a:avLst/>
+          </a:prstGeom>
+          <a:noFill/>
+          <a:ln w="12700">
+            <a:solidFill>
+              <a:srgbClr val="232E45"/>
+            </a:solidFill>
+            <a:prstDash val="solid"/>
+          </a:ln>
+        </p:spPr>
+      </p:sp>
+      <p:sp>
+        <p:nvSpPr>
+          <p:cNvPr id="6" name="Text 4"/>
+          <p:cNvSpPr/>
+          <p:nvPr/>
+        </p:nvSpPr>
+        <p:spPr>
+          <a:xfrm>
+            <a:off x="914400" y="6263640"/>
+            <a:ext cx="6858000" cy="274320"/>
           </a:xfrm>
           <a:prstGeom prst="rect">
             <a:avLst/>
@@ -2475,13 +2835,13 @@
             <a:r>
               <a:rPr lang="en-US" sz="900" dirty="0">
                 <a:solidFill>
-                  <a:srgbClr val="9CA3AF"/>
-                </a:solidFill>
-                <a:latin typeface="Arial" pitchFamily="34" charset="0"/>
-                <a:ea typeface="Arial" pitchFamily="34" charset="-122"/>
-                <a:cs typeface="Arial" pitchFamily="34" charset="-120"/>
-              </a:rPr>
-              <a:t>Taller de Base de Datos (BDY1103) | Caso Estilo Urbano | Duoc UC</a:t>
+                  <a:srgbClr val="94A3B8"/>
+                </a:solidFill>
+                <a:latin typeface="Arial" pitchFamily="34" charset="0"/>
+                <a:ea typeface="Arial" pitchFamily="34" charset="-122"/>
+                <a:cs typeface="Arial" pitchFamily="34" charset="-120"/>
+              </a:rPr>
+              <a:t>Taller de Base de Datos (BDY1103) • Caso: Estilo Urbano • Duoc UC</a:t>
             </a:r>
             <a:endParaRPr lang="en-US" sz="900" dirty="0"/>
           </a:p>
@@ -2489,14 +2849,14 @@
       </p:sp>
       <p:sp>
         <p:nvSpPr>
-          <p:cNvPr id="6" name="Text 4"/>
-          <p:cNvSpPr/>
-          <p:nvPr/>
-        </p:nvSpPr>
-        <p:spPr>
-          <a:xfrm>
-            <a:off x="9144000" y="6400800"/>
-            <a:ext cx="2286000" cy="274320"/>
+          <p:cNvPr id="7" name="Text 5"/>
+          <p:cNvSpPr/>
+          <p:nvPr/>
+        </p:nvSpPr>
+        <p:spPr>
+          <a:xfrm>
+            <a:off x="8046720" y="6263640"/>
+            <a:ext cx="3230575" cy="274320"/>
           </a:xfrm>
           <a:prstGeom prst="rect">
             <a:avLst/>
@@ -2512,7 +2872,7 @@
               <a:buNone/>
             </a:pPr>
             <a:r>
-              <a:rPr lang="en-US" sz="900" dirty="0">
+              <a:rPr lang="en-US" sz="900" b="1" dirty="0">
                 <a:solidFill>
                   <a:srgbClr val="F59E0B"/>
                 </a:solidFill>
@@ -2520,7 +2880,7 @@
                 <a:ea typeface="Arial" pitchFamily="34" charset="-122"/>
                 <a:cs typeface="Arial" pitchFamily="34" charset="-120"/>
               </a:rPr>
-              <a:t>EP2 - 60% Ponderación</a:t>
+              <a:t>Evaluación Parcial N° 2 (60%)</a:t>
             </a:r>
             <a:endParaRPr lang="en-US" sz="900" dirty="0"/>
           </a:p>
@@ -2528,24 +2888,24 @@
       </p:sp>
       <p:sp>
         <p:nvSpPr>
-          <p:cNvPr id="7" name="Shape 5"/>
-          <p:cNvSpPr/>
-          <p:nvPr/>
-        </p:nvSpPr>
-        <p:spPr>
-          <a:xfrm>
-            <a:off x="731520" y="1463040"/>
-            <a:ext cx="5120640" cy="2103120"/>
+          <p:cNvPr id="8" name="Shape 6"/>
+          <p:cNvSpPr/>
+          <p:nvPr/>
+        </p:nvSpPr>
+        <p:spPr>
+          <a:xfrm>
+            <a:off x="914400" y="1417320"/>
+            <a:ext cx="4983480" cy="2148840"/>
           </a:xfrm>
           <a:prstGeom prst="roundRect">
             <a:avLst/>
           </a:prstGeom>
           <a:solidFill>
-            <a:srgbClr val="141418"/>
+            <a:srgbClr val="151C2C"/>
           </a:solidFill>
           <a:ln w="12700">
             <a:solidFill>
-              <a:srgbClr val="27272A"/>
+              <a:srgbClr val="232E45"/>
             </a:solidFill>
             <a:prstDash val="solid"/>
           </a:ln>
@@ -2553,14 +2913,14 @@
       </p:sp>
       <p:sp>
         <p:nvSpPr>
-          <p:cNvPr id="8" name="Text 6"/>
-          <p:cNvSpPr/>
-          <p:nvPr/>
-        </p:nvSpPr>
-        <p:spPr>
-          <a:xfrm>
-            <a:off x="914400" y="1600200"/>
-            <a:ext cx="4754880" cy="228600"/>
+          <p:cNvPr id="9" name="Text 7"/>
+          <p:cNvSpPr/>
+          <p:nvPr/>
+        </p:nvSpPr>
+        <p:spPr>
+          <a:xfrm>
+            <a:off x="1143000" y="1554480"/>
+            <a:ext cx="4526280" cy="228600"/>
           </a:xfrm>
           <a:prstGeom prst="rect">
             <a:avLst/>
@@ -2576,7 +2936,7 @@
               <a:buNone/>
             </a:pPr>
             <a:r>
-              <a:rPr lang="en-US" sz="900" b="1" dirty="0">
+              <a:rPr lang="en-US" sz="850" b="1" dirty="0">
                 <a:solidFill>
                   <a:srgbClr val="F59E0B"/>
                 </a:solidFill>
@@ -2586,20 +2946,20 @@
               </a:rPr>
               <a:t>PROCEDIMIENTO SIN PARÁMETROS</a:t>
             </a:r>
-            <a:endParaRPr lang="en-US" sz="900" dirty="0"/>
-          </a:p>
-        </p:txBody>
-      </p:sp>
-      <p:sp>
-        <p:nvSpPr>
-          <p:cNvPr id="9" name="Text 7"/>
-          <p:cNvSpPr/>
-          <p:nvPr/>
-        </p:nvSpPr>
-        <p:spPr>
-          <a:xfrm>
-            <a:off x="914400" y="1828800"/>
-            <a:ext cx="4754880" cy="320040"/>
+            <a:endParaRPr lang="en-US" sz="850" dirty="0"/>
+          </a:p>
+        </p:txBody>
+      </p:sp>
+      <p:sp>
+        <p:nvSpPr>
+          <p:cNvPr id="10" name="Text 8"/>
+          <p:cNvSpPr/>
+          <p:nvPr/>
+        </p:nvSpPr>
+        <p:spPr>
+          <a:xfrm>
+            <a:off x="1143000" y="1783080"/>
+            <a:ext cx="4526280" cy="292608"/>
           </a:xfrm>
           <a:prstGeom prst="rect">
             <a:avLst/>
@@ -2615,7 +2975,7 @@
               <a:buNone/>
             </a:pPr>
             <a:r>
-              <a:rPr lang="en-US" sz="1300" b="1" dirty="0">
+              <a:rPr lang="en-US" sz="1050" b="1" dirty="0">
                 <a:solidFill>
                   <a:srgbClr val="FFFFFF"/>
                 </a:solidFill>
@@ -2625,20 +2985,20 @@
               </a:rPr>
               <a:t>sp_reajuste_masivo_sueldos</a:t>
             </a:r>
-            <a:endParaRPr lang="en-US" sz="1300" dirty="0"/>
-          </a:p>
-        </p:txBody>
-      </p:sp>
-      <p:sp>
-        <p:nvSpPr>
-          <p:cNvPr id="10" name="Text 8"/>
-          <p:cNvSpPr/>
-          <p:nvPr/>
-        </p:nvSpPr>
-        <p:spPr>
-          <a:xfrm>
-            <a:off x="914400" y="2194560"/>
-            <a:ext cx="4754880" cy="731520"/>
+            <a:endParaRPr lang="en-US" sz="1050" dirty="0"/>
+          </a:p>
+        </p:txBody>
+      </p:sp>
+      <p:sp>
+        <p:nvSpPr>
+          <p:cNvPr id="11" name="Text 9"/>
+          <p:cNvSpPr/>
+          <p:nvPr/>
+        </p:nvSpPr>
+        <p:spPr>
+          <a:xfrm>
+            <a:off x="1143000" y="2103120"/>
+            <a:ext cx="4526280" cy="731520"/>
           </a:xfrm>
           <a:prstGeom prst="rect">
             <a:avLst/>
@@ -2647,57 +3007,62 @@
           <a:ln/>
         </p:spPr>
         <p:txBody>
-          <a:bodyPr wrap="square" rtlCol="0" anchor="ctr"/>
-          <a:lstStyle/>
-          <a:p>
-            <a:pPr indent="0" marL="0">
-              <a:buNone/>
-            </a:pPr>
-            <a:r>
-              <a:rPr lang="en-US" sz="1000" dirty="0">
-                <a:solidFill>
-                  <a:srgbClr val="9CA3AF"/>
-                </a:solidFill>
-                <a:latin typeface="Arial" pitchFamily="34" charset="0"/>
-                <a:ea typeface="Arial" pitchFamily="34" charset="-122"/>
-                <a:cs typeface="Arial" pitchFamily="34" charset="-120"/>
-              </a:rPr>
-              <a:t>Aplica de forma masiva un reajuste inflacionario del 4.5% sobre la totalidad de operadores activos en una sola transacción DML segura.</a:t>
-            </a:r>
-            <a:endParaRPr lang="en-US" sz="1000" dirty="0"/>
-          </a:p>
-        </p:txBody>
-      </p:sp>
-      <p:sp>
-        <p:nvSpPr>
-          <p:cNvPr id="11" name="Shape 9"/>
-          <p:cNvSpPr/>
-          <p:nvPr/>
-        </p:nvSpPr>
-        <p:spPr>
-          <a:xfrm>
-            <a:off x="914400" y="2971800"/>
-            <a:ext cx="4754880" cy="411480"/>
+          <a:bodyPr wrap="square" rtlCol="0" anchor="t"/>
+          <a:lstStyle/>
+          <a:p>
+            <a:pPr indent="0" marL="0">
+              <a:buNone/>
+            </a:pPr>
+            <a:r>
+              <a:rPr lang="en-US" sz="950" dirty="0">
+                <a:solidFill>
+                  <a:srgbClr val="94A3B8"/>
+                </a:solidFill>
+                <a:latin typeface="Arial" pitchFamily="34" charset="0"/>
+                <a:ea typeface="Arial" pitchFamily="34" charset="-122"/>
+                <a:cs typeface="Arial" pitchFamily="34" charset="-120"/>
+              </a:rPr>
+              <a:t>Aplica un reajuste inflacionario del 4.5% a todos los operadores activos de bodega y ventas en una sola transacción atómica.</a:t>
+            </a:r>
+            <a:endParaRPr lang="en-US" sz="950" dirty="0"/>
+          </a:p>
+        </p:txBody>
+      </p:sp>
+      <p:sp>
+        <p:nvSpPr>
+          <p:cNvPr id="12" name="Shape 10"/>
+          <p:cNvSpPr/>
+          <p:nvPr/>
+        </p:nvSpPr>
+        <p:spPr>
+          <a:xfrm>
+            <a:off x="1143000" y="2898648"/>
+            <a:ext cx="4526280" cy="438912"/>
           </a:xfrm>
           <a:prstGeom prst="roundRect">
             <a:avLst/>
           </a:prstGeom>
           <a:solidFill>
-            <a:srgbClr val="000000"/>
+            <a:srgbClr val="080B12"/>
           </a:solidFill>
-          <a:ln/>
-        </p:spPr>
-      </p:sp>
-      <p:sp>
-        <p:nvSpPr>
-          <p:cNvPr id="12" name="Text 10"/>
-          <p:cNvSpPr/>
-          <p:nvPr/>
-        </p:nvSpPr>
-        <p:spPr>
-          <a:xfrm>
-            <a:off x="1005840" y="2999232"/>
-            <a:ext cx="4572000" cy="365760"/>
+          <a:ln w="6350">
+            <a:solidFill>
+              <a:srgbClr val="232E45"/>
+            </a:solidFill>
+            <a:prstDash val="solid"/>
+          </a:ln>
+        </p:spPr>
+      </p:sp>
+      <p:sp>
+        <p:nvSpPr>
+          <p:cNvPr id="13" name="Text 11"/>
+          <p:cNvSpPr/>
+          <p:nvPr/>
+        </p:nvSpPr>
+        <p:spPr>
+          <a:xfrm>
+            <a:off x="1234440" y="2926080"/>
+            <a:ext cx="4343400" cy="384048"/>
           </a:xfrm>
           <a:prstGeom prst="rect">
             <a:avLst/>
@@ -2729,24 +3094,24 @@
       </p:sp>
       <p:sp>
         <p:nvSpPr>
-          <p:cNvPr id="13" name="Shape 11"/>
-          <p:cNvSpPr/>
-          <p:nvPr/>
-        </p:nvSpPr>
-        <p:spPr>
-          <a:xfrm>
-            <a:off x="6217920" y="1463040"/>
-            <a:ext cx="5120640" cy="2103120"/>
+          <p:cNvPr id="14" name="Shape 12"/>
+          <p:cNvSpPr/>
+          <p:nvPr/>
+        </p:nvSpPr>
+        <p:spPr>
+          <a:xfrm>
+            <a:off x="6291072" y="1417320"/>
+            <a:ext cx="4983480" cy="2148840"/>
           </a:xfrm>
           <a:prstGeom prst="roundRect">
             <a:avLst/>
           </a:prstGeom>
           <a:solidFill>
-            <a:srgbClr val="141418"/>
+            <a:srgbClr val="151C2C"/>
           </a:solidFill>
           <a:ln w="12700">
             <a:solidFill>
-              <a:srgbClr val="27272A"/>
+              <a:srgbClr val="232E45"/>
             </a:solidFill>
             <a:prstDash val="solid"/>
           </a:ln>
@@ -2754,14 +3119,14 @@
       </p:sp>
       <p:sp>
         <p:nvSpPr>
-          <p:cNvPr id="14" name="Text 12"/>
-          <p:cNvSpPr/>
-          <p:nvPr/>
-        </p:nvSpPr>
-        <p:spPr>
-          <a:xfrm>
-            <a:off x="6400800" y="1600200"/>
-            <a:ext cx="4754880" cy="228600"/>
+          <p:cNvPr id="15" name="Text 13"/>
+          <p:cNvSpPr/>
+          <p:nvPr/>
+        </p:nvSpPr>
+        <p:spPr>
+          <a:xfrm>
+            <a:off x="6519672" y="1554480"/>
+            <a:ext cx="4526280" cy="228600"/>
           </a:xfrm>
           <a:prstGeom prst="rect">
             <a:avLst/>
@@ -2777,7 +3142,7 @@
               <a:buNone/>
             </a:pPr>
             <a:r>
-              <a:rPr lang="en-US" sz="900" b="1" dirty="0">
+              <a:rPr lang="en-US" sz="850" b="1" dirty="0">
                 <a:solidFill>
                   <a:srgbClr val="F59E0B"/>
                 </a:solidFill>
@@ -2787,20 +3152,20 @@
               </a:rPr>
               <a:t>PROCEDIMIENTO CON PARÁMETROS</a:t>
             </a:r>
-            <a:endParaRPr lang="en-US" sz="900" dirty="0"/>
-          </a:p>
-        </p:txBody>
-      </p:sp>
-      <p:sp>
-        <p:nvSpPr>
-          <p:cNvPr id="15" name="Text 13"/>
-          <p:cNvSpPr/>
-          <p:nvPr/>
-        </p:nvSpPr>
-        <p:spPr>
-          <a:xfrm>
-            <a:off x="6400800" y="1828800"/>
-            <a:ext cx="4754880" cy="320040"/>
+            <a:endParaRPr lang="en-US" sz="850" dirty="0"/>
+          </a:p>
+        </p:txBody>
+      </p:sp>
+      <p:sp>
+        <p:nvSpPr>
+          <p:cNvPr id="16" name="Text 14"/>
+          <p:cNvSpPr/>
+          <p:nvPr/>
+        </p:nvSpPr>
+        <p:spPr>
+          <a:xfrm>
+            <a:off x="6519672" y="1783080"/>
+            <a:ext cx="4526280" cy="292608"/>
           </a:xfrm>
           <a:prstGeom prst="rect">
             <a:avLst/>
@@ -2816,7 +3181,7 @@
               <a:buNone/>
             </a:pPr>
             <a:r>
-              <a:rPr lang="en-US" sz="1300" b="1" dirty="0">
+              <a:rPr lang="en-US" sz="1050" b="1" dirty="0">
                 <a:solidFill>
                   <a:srgbClr val="FFFFFF"/>
                 </a:solidFill>
@@ -2824,22 +3189,22 @@
                 <a:ea typeface="Courier New" pitchFamily="34" charset="-122"/>
                 <a:cs typeface="Courier New" pitchFamily="34" charset="-120"/>
               </a:rPr>
-              <a:t>sp_actualizar_sueldo_empleado</a:t>
-            </a:r>
-            <a:endParaRPr lang="en-US" sz="1300" dirty="0"/>
-          </a:p>
-        </p:txBody>
-      </p:sp>
-      <p:sp>
-        <p:nvSpPr>
-          <p:cNvPr id="16" name="Text 14"/>
-          <p:cNvSpPr/>
-          <p:nvPr/>
-        </p:nvSpPr>
-        <p:spPr>
-          <a:xfrm>
-            <a:off x="6400800" y="2194560"/>
-            <a:ext cx="4754880" cy="731520"/>
+              <a:t>sp_actualizar_sueldo_empleado(p_id, p_sueldo)</a:t>
+            </a:r>
+            <a:endParaRPr lang="en-US" sz="1050" dirty="0"/>
+          </a:p>
+        </p:txBody>
+      </p:sp>
+      <p:sp>
+        <p:nvSpPr>
+          <p:cNvPr id="17" name="Text 15"/>
+          <p:cNvSpPr/>
+          <p:nvPr/>
+        </p:nvSpPr>
+        <p:spPr>
+          <a:xfrm>
+            <a:off x="6519672" y="2103120"/>
+            <a:ext cx="4526280" cy="731520"/>
           </a:xfrm>
           <a:prstGeom prst="rect">
             <a:avLst/>
@@ -2848,57 +3213,62 @@
           <a:ln/>
         </p:spPr>
         <p:txBody>
-          <a:bodyPr wrap="square" rtlCol="0" anchor="ctr"/>
-          <a:lstStyle/>
-          <a:p>
-            <a:pPr indent="0" marL="0">
-              <a:buNone/>
-            </a:pPr>
-            <a:r>
-              <a:rPr lang="en-US" sz="1000" dirty="0">
-                <a:solidFill>
-                  <a:srgbClr val="9CA3AF"/>
-                </a:solidFill>
-                <a:latin typeface="Arial" pitchFamily="34" charset="0"/>
-                <a:ea typeface="Arial" pitchFamily="34" charset="-122"/>
-                <a:cs typeface="Arial" pitchFamily="34" charset="-120"/>
-              </a:rPr>
-              <a:t>Actualiza de forma atómica el sueldo de un trabajador específico (p_id_usuario, p_nuevo_sueldo), validando que sea un operador activo.</a:t>
-            </a:r>
-            <a:endParaRPr lang="en-US" sz="1000" dirty="0"/>
-          </a:p>
-        </p:txBody>
-      </p:sp>
-      <p:sp>
-        <p:nvSpPr>
-          <p:cNvPr id="17" name="Shape 15"/>
-          <p:cNvSpPr/>
-          <p:nvPr/>
-        </p:nvSpPr>
-        <p:spPr>
-          <a:xfrm>
-            <a:off x="6400800" y="2971800"/>
-            <a:ext cx="4754880" cy="411480"/>
+          <a:bodyPr wrap="square" rtlCol="0" anchor="t"/>
+          <a:lstStyle/>
+          <a:p>
+            <a:pPr indent="0" marL="0">
+              <a:buNone/>
+            </a:pPr>
+            <a:r>
+              <a:rPr lang="en-US" sz="950" dirty="0">
+                <a:solidFill>
+                  <a:srgbClr val="94A3B8"/>
+                </a:solidFill>
+                <a:latin typeface="Arial" pitchFamily="34" charset="0"/>
+                <a:ea typeface="Arial" pitchFamily="34" charset="-122"/>
+                <a:cs typeface="Arial" pitchFamily="34" charset="-120"/>
+              </a:rPr>
+              <a:t>Actualiza el sueldo individual garantizando previamente que el usuario sea un trabajador activo mediante validación interna.</a:t>
+            </a:r>
+            <a:endParaRPr lang="en-US" sz="950" dirty="0"/>
+          </a:p>
+        </p:txBody>
+      </p:sp>
+      <p:sp>
+        <p:nvSpPr>
+          <p:cNvPr id="18" name="Shape 16"/>
+          <p:cNvSpPr/>
+          <p:nvPr/>
+        </p:nvSpPr>
+        <p:spPr>
+          <a:xfrm>
+            <a:off x="6519672" y="2898648"/>
+            <a:ext cx="4526280" cy="438912"/>
           </a:xfrm>
           <a:prstGeom prst="roundRect">
             <a:avLst/>
           </a:prstGeom>
           <a:solidFill>
-            <a:srgbClr val="000000"/>
+            <a:srgbClr val="080B12"/>
           </a:solidFill>
-          <a:ln/>
-        </p:spPr>
-      </p:sp>
-      <p:sp>
-        <p:nvSpPr>
-          <p:cNvPr id="18" name="Text 16"/>
-          <p:cNvSpPr/>
-          <p:nvPr/>
-        </p:nvSpPr>
-        <p:spPr>
-          <a:xfrm>
-            <a:off x="6492240" y="2999232"/>
-            <a:ext cx="4572000" cy="365760"/>
+          <a:ln w="6350">
+            <a:solidFill>
+              <a:srgbClr val="232E45"/>
+            </a:solidFill>
+            <a:prstDash val="solid"/>
+          </a:ln>
+        </p:spPr>
+      </p:sp>
+      <p:sp>
+        <p:nvSpPr>
+          <p:cNvPr id="19" name="Text 17"/>
+          <p:cNvSpPr/>
+          <p:nvPr/>
+        </p:nvSpPr>
+        <p:spPr>
+          <a:xfrm>
+            <a:off x="6611112" y="2926080"/>
+            <a:ext cx="4343400" cy="384048"/>
           </a:xfrm>
           <a:prstGeom prst="rect">
             <a:avLst/>
@@ -2930,24 +3300,24 @@
       </p:sp>
       <p:sp>
         <p:nvSpPr>
-          <p:cNvPr id="19" name="Shape 17"/>
-          <p:cNvSpPr/>
-          <p:nvPr/>
-        </p:nvSpPr>
-        <p:spPr>
-          <a:xfrm>
-            <a:off x="731520" y="3840480"/>
-            <a:ext cx="5120640" cy="2103120"/>
+          <p:cNvPr id="20" name="Shape 18"/>
+          <p:cNvSpPr/>
+          <p:nvPr/>
+        </p:nvSpPr>
+        <p:spPr>
+          <a:xfrm>
+            <a:off x="914400" y="3749040"/>
+            <a:ext cx="4983480" cy="2148840"/>
           </a:xfrm>
           <a:prstGeom prst="roundRect">
             <a:avLst/>
           </a:prstGeom>
           <a:solidFill>
-            <a:srgbClr val="141418"/>
+            <a:srgbClr val="151C2C"/>
           </a:solidFill>
           <a:ln w="12700">
             <a:solidFill>
-              <a:srgbClr val="27272A"/>
+              <a:srgbClr val="232E45"/>
             </a:solidFill>
             <a:prstDash val="solid"/>
           </a:ln>
@@ -2955,14 +3325,14 @@
       </p:sp>
       <p:sp>
         <p:nvSpPr>
-          <p:cNvPr id="20" name="Text 18"/>
-          <p:cNvSpPr/>
-          <p:nvPr/>
-        </p:nvSpPr>
-        <p:spPr>
-          <a:xfrm>
-            <a:off x="914400" y="3977640"/>
-            <a:ext cx="4754880" cy="228600"/>
+          <p:cNvPr id="21" name="Text 19"/>
+          <p:cNvSpPr/>
+          <p:nvPr/>
+        </p:nvSpPr>
+        <p:spPr>
+          <a:xfrm>
+            <a:off x="1143000" y="3886200"/>
+            <a:ext cx="4526280" cy="228600"/>
           </a:xfrm>
           <a:prstGeom prst="rect">
             <a:avLst/>
@@ -2978,7 +3348,7 @@
               <a:buNone/>
             </a:pPr>
             <a:r>
-              <a:rPr lang="en-US" sz="900" b="1" dirty="0">
+              <a:rPr lang="en-US" sz="850" b="1" dirty="0">
                 <a:solidFill>
                   <a:srgbClr val="10B981"/>
                 </a:solidFill>
@@ -2988,20 +3358,20 @@
               </a:rPr>
               <a:t>FUNCIÓN CON PARÁMETROS</a:t>
             </a:r>
-            <a:endParaRPr lang="en-US" sz="900" dirty="0"/>
-          </a:p>
-        </p:txBody>
-      </p:sp>
-      <p:sp>
-        <p:nvSpPr>
-          <p:cNvPr id="21" name="Text 19"/>
-          <p:cNvSpPr/>
-          <p:nvPr/>
-        </p:nvSpPr>
-        <p:spPr>
-          <a:xfrm>
-            <a:off x="914400" y="4206240"/>
-            <a:ext cx="4754880" cy="320040"/>
+            <a:endParaRPr lang="en-US" sz="850" dirty="0"/>
+          </a:p>
+        </p:txBody>
+      </p:sp>
+      <p:sp>
+        <p:nvSpPr>
+          <p:cNvPr id="22" name="Text 20"/>
+          <p:cNvSpPr/>
+          <p:nvPr/>
+        </p:nvSpPr>
+        <p:spPr>
+          <a:xfrm>
+            <a:off x="1143000" y="4114800"/>
+            <a:ext cx="4526280" cy="292608"/>
           </a:xfrm>
           <a:prstGeom prst="rect">
             <a:avLst/>
@@ -3017,7 +3387,7 @@
               <a:buNone/>
             </a:pPr>
             <a:r>
-              <a:rPr lang="en-US" sz="1300" b="1" dirty="0">
+              <a:rPr lang="en-US" sz="1050" b="1" dirty="0">
                 <a:solidFill>
                   <a:srgbClr val="FFFFFF"/>
                 </a:solidFill>
@@ -3025,22 +3395,22 @@
                 <a:ea typeface="Courier New" pitchFamily="34" charset="-122"/>
                 <a:cs typeface="Courier New" pitchFamily="34" charset="-120"/>
               </a:rPr>
-              <a:t>fn_calcular_bono</a:t>
-            </a:r>
-            <a:endParaRPr lang="en-US" sz="1300" dirty="0"/>
-          </a:p>
-        </p:txBody>
-      </p:sp>
-      <p:sp>
-        <p:nvSpPr>
-          <p:cNvPr id="22" name="Text 20"/>
-          <p:cNvSpPr/>
-          <p:nvPr/>
-        </p:nvSpPr>
-        <p:spPr>
-          <a:xfrm>
-            <a:off x="914400" y="4572000"/>
-            <a:ext cx="4754880" cy="731520"/>
+              <a:t>fn_calcular_bono(p_id, p_pct_meta)</a:t>
+            </a:r>
+            <a:endParaRPr lang="en-US" sz="1050" dirty="0"/>
+          </a:p>
+        </p:txBody>
+      </p:sp>
+      <p:sp>
+        <p:nvSpPr>
+          <p:cNvPr id="23" name="Text 21"/>
+          <p:cNvSpPr/>
+          <p:nvPr/>
+        </p:nvSpPr>
+        <p:spPr>
+          <a:xfrm>
+            <a:off x="1143000" y="4434840"/>
+            <a:ext cx="4526280" cy="731520"/>
           </a:xfrm>
           <a:prstGeom prst="rect">
             <a:avLst/>
@@ -3049,57 +3419,62 @@
           <a:ln/>
         </p:spPr>
         <p:txBody>
-          <a:bodyPr wrap="square" rtlCol="0" anchor="ctr"/>
-          <a:lstStyle/>
-          <a:p>
-            <a:pPr indent="0" marL="0">
-              <a:buNone/>
-            </a:pPr>
-            <a:r>
-              <a:rPr lang="en-US" sz="1000" dirty="0">
-                <a:solidFill>
-                  <a:srgbClr val="9CA3AF"/>
-                </a:solidFill>
-                <a:latin typeface="Arial" pitchFamily="34" charset="0"/>
-                <a:ea typeface="Arial" pitchFamily="34" charset="-122"/>
-                <a:cs typeface="Arial" pitchFamily="34" charset="-120"/>
-              </a:rPr>
-              <a:t>Calcula determinísticamente el bono mensual por porcentaje de meta comercial lograda (0%, 3%, 7% o 12%). Retorna NUMBER.</a:t>
-            </a:r>
-            <a:endParaRPr lang="en-US" sz="1000" dirty="0"/>
-          </a:p>
-        </p:txBody>
-      </p:sp>
-      <p:sp>
-        <p:nvSpPr>
-          <p:cNvPr id="23" name="Shape 21"/>
-          <p:cNvSpPr/>
-          <p:nvPr/>
-        </p:nvSpPr>
-        <p:spPr>
-          <a:xfrm>
-            <a:off x="914400" y="5349240"/>
-            <a:ext cx="4754880" cy="411480"/>
+          <a:bodyPr wrap="square" rtlCol="0" anchor="t"/>
+          <a:lstStyle/>
+          <a:p>
+            <a:pPr indent="0" marL="0">
+              <a:buNone/>
+            </a:pPr>
+            <a:r>
+              <a:rPr lang="en-US" sz="950" dirty="0">
+                <a:solidFill>
+                  <a:srgbClr val="94A3B8"/>
+                </a:solidFill>
+                <a:latin typeface="Arial" pitchFamily="34" charset="0"/>
+                <a:ea typeface="Arial" pitchFamily="34" charset="-122"/>
+                <a:cs typeface="Arial" pitchFamily="34" charset="-120"/>
+              </a:rPr>
+              <a:t>Computa y retorna determinísticamente el bono según cumplimiento comercial: 12% (&gt;=120%), 7% (&gt;=100%), 3% (&gt;=80%) o $0.</a:t>
+            </a:r>
+            <a:endParaRPr lang="en-US" sz="950" dirty="0"/>
+          </a:p>
+        </p:txBody>
+      </p:sp>
+      <p:sp>
+        <p:nvSpPr>
+          <p:cNvPr id="24" name="Shape 22"/>
+          <p:cNvSpPr/>
+          <p:nvPr/>
+        </p:nvSpPr>
+        <p:spPr>
+          <a:xfrm>
+            <a:off x="1143000" y="5230368"/>
+            <a:ext cx="4526280" cy="438912"/>
           </a:xfrm>
           <a:prstGeom prst="roundRect">
             <a:avLst/>
           </a:prstGeom>
           <a:solidFill>
-            <a:srgbClr val="000000"/>
+            <a:srgbClr val="080B12"/>
           </a:solidFill>
-          <a:ln/>
-        </p:spPr>
-      </p:sp>
-      <p:sp>
-        <p:nvSpPr>
-          <p:cNvPr id="24" name="Text 22"/>
-          <p:cNvSpPr/>
-          <p:nvPr/>
-        </p:nvSpPr>
-        <p:spPr>
-          <a:xfrm>
-            <a:off x="1005840" y="5376672"/>
-            <a:ext cx="4572000" cy="365760"/>
+          <a:ln w="6350">
+            <a:solidFill>
+              <a:srgbClr val="232E45"/>
+            </a:solidFill>
+            <a:prstDash val="solid"/>
+          </a:ln>
+        </p:spPr>
+      </p:sp>
+      <p:sp>
+        <p:nvSpPr>
+          <p:cNvPr id="25" name="Text 23"/>
+          <p:cNvSpPr/>
+          <p:nvPr/>
+        </p:nvSpPr>
+        <p:spPr>
+          <a:xfrm>
+            <a:off x="1234440" y="5257800"/>
+            <a:ext cx="4343400" cy="384048"/>
           </a:xfrm>
           <a:prstGeom prst="rect">
             <a:avLst/>
@@ -3131,24 +3506,24 @@
       </p:sp>
       <p:sp>
         <p:nvSpPr>
-          <p:cNvPr id="25" name="Shape 23"/>
-          <p:cNvSpPr/>
-          <p:nvPr/>
-        </p:nvSpPr>
-        <p:spPr>
-          <a:xfrm>
-            <a:off x="6217920" y="3840480"/>
-            <a:ext cx="5120640" cy="2103120"/>
+          <p:cNvPr id="26" name="Shape 24"/>
+          <p:cNvSpPr/>
+          <p:nvPr/>
+        </p:nvSpPr>
+        <p:spPr>
+          <a:xfrm>
+            <a:off x="6291072" y="3749040"/>
+            <a:ext cx="4983480" cy="2148840"/>
           </a:xfrm>
           <a:prstGeom prst="roundRect">
             <a:avLst/>
           </a:prstGeom>
           <a:solidFill>
-            <a:srgbClr val="141418"/>
+            <a:srgbClr val="151C2C"/>
           </a:solidFill>
           <a:ln w="12700">
             <a:solidFill>
-              <a:srgbClr val="27272A"/>
+              <a:srgbClr val="232E45"/>
             </a:solidFill>
             <a:prstDash val="solid"/>
           </a:ln>
@@ -3156,14 +3531,14 @@
       </p:sp>
       <p:sp>
         <p:nvSpPr>
-          <p:cNvPr id="26" name="Text 24"/>
-          <p:cNvSpPr/>
-          <p:nvPr/>
-        </p:nvSpPr>
-        <p:spPr>
-          <a:xfrm>
-            <a:off x="6400800" y="3977640"/>
-            <a:ext cx="4754880" cy="228600"/>
+          <p:cNvPr id="27" name="Text 25"/>
+          <p:cNvSpPr/>
+          <p:nvPr/>
+        </p:nvSpPr>
+        <p:spPr>
+          <a:xfrm>
+            <a:off x="6519672" y="3886200"/>
+            <a:ext cx="4526280" cy="228600"/>
           </a:xfrm>
           <a:prstGeom prst="rect">
             <a:avLst/>
@@ -3179,7 +3554,7 @@
               <a:buNone/>
             </a:pPr>
             <a:r>
-              <a:rPr lang="en-US" sz="900" b="1" dirty="0">
+              <a:rPr lang="en-US" sz="850" b="1" dirty="0">
                 <a:solidFill>
                   <a:srgbClr val="10B981"/>
                 </a:solidFill>
@@ -3189,20 +3564,20 @@
               </a:rPr>
               <a:t>FUNCIÓN SIN PARÁMETROS</a:t>
             </a:r>
-            <a:endParaRPr lang="en-US" sz="900" dirty="0"/>
-          </a:p>
-        </p:txBody>
-      </p:sp>
-      <p:sp>
-        <p:nvSpPr>
-          <p:cNvPr id="27" name="Text 25"/>
-          <p:cNvSpPr/>
-          <p:nvPr/>
-        </p:nvSpPr>
-        <p:spPr>
-          <a:xfrm>
-            <a:off x="6400800" y="4206240"/>
-            <a:ext cx="4754880" cy="320040"/>
+            <a:endParaRPr lang="en-US" sz="850" dirty="0"/>
+          </a:p>
+        </p:txBody>
+      </p:sp>
+      <p:sp>
+        <p:nvSpPr>
+          <p:cNvPr id="28" name="Text 26"/>
+          <p:cNvSpPr/>
+          <p:nvPr/>
+        </p:nvSpPr>
+        <p:spPr>
+          <a:xfrm>
+            <a:off x="6519672" y="4114800"/>
+            <a:ext cx="4526280" cy="292608"/>
           </a:xfrm>
           <a:prstGeom prst="rect">
             <a:avLst/>
@@ -3218,7 +3593,7 @@
               <a:buNone/>
             </a:pPr>
             <a:r>
-              <a:rPr lang="en-US" sz="1300" b="1" dirty="0">
+              <a:rPr lang="en-US" sz="1050" b="1" dirty="0">
                 <a:solidFill>
                   <a:srgbClr val="FFFFFF"/>
                 </a:solidFill>
@@ -3228,20 +3603,20 @@
               </a:rPr>
               <a:t>fn_promedio_sueldo_trabajadores</a:t>
             </a:r>
-            <a:endParaRPr lang="en-US" sz="1300" dirty="0"/>
-          </a:p>
-        </p:txBody>
-      </p:sp>
-      <p:sp>
-        <p:nvSpPr>
-          <p:cNvPr id="28" name="Text 26"/>
-          <p:cNvSpPr/>
-          <p:nvPr/>
-        </p:nvSpPr>
-        <p:spPr>
-          <a:xfrm>
-            <a:off x="6400800" y="4572000"/>
-            <a:ext cx="4754880" cy="731520"/>
+            <a:endParaRPr lang="en-US" sz="1050" dirty="0"/>
+          </a:p>
+        </p:txBody>
+      </p:sp>
+      <p:sp>
+        <p:nvSpPr>
+          <p:cNvPr id="29" name="Text 27"/>
+          <p:cNvSpPr/>
+          <p:nvPr/>
+        </p:nvSpPr>
+        <p:spPr>
+          <a:xfrm>
+            <a:off x="6519672" y="4434840"/>
+            <a:ext cx="4526280" cy="731520"/>
           </a:xfrm>
           <a:prstGeom prst="rect">
             <a:avLst/>
@@ -3250,57 +3625,62 @@
           <a:ln/>
         </p:spPr>
         <p:txBody>
-          <a:bodyPr wrap="square" rtlCol="0" anchor="ctr"/>
-          <a:lstStyle/>
-          <a:p>
-            <a:pPr indent="0" marL="0">
-              <a:buNone/>
-            </a:pPr>
-            <a:r>
-              <a:rPr lang="en-US" sz="1000" dirty="0">
-                <a:solidFill>
-                  <a:srgbClr val="9CA3AF"/>
-                </a:solidFill>
-                <a:latin typeface="Arial" pitchFamily="34" charset="0"/>
-                <a:ea typeface="Arial" pitchFamily="34" charset="-122"/>
-                <a:cs typeface="Arial" pitchFamily="34" charset="-120"/>
-              </a:rPr>
-              <a:t>Computa el sueldo promedio de la dotación activa de operadores de bodega y fulfillment. Usable dentro de cualquier consulta SQL.</a:t>
-            </a:r>
-            <a:endParaRPr lang="en-US" sz="1000" dirty="0"/>
-          </a:p>
-        </p:txBody>
-      </p:sp>
-      <p:sp>
-        <p:nvSpPr>
-          <p:cNvPr id="29" name="Shape 27"/>
-          <p:cNvSpPr/>
-          <p:nvPr/>
-        </p:nvSpPr>
-        <p:spPr>
-          <a:xfrm>
-            <a:off x="6400800" y="5349240"/>
-            <a:ext cx="4754880" cy="411480"/>
+          <a:bodyPr wrap="square" rtlCol="0" anchor="t"/>
+          <a:lstStyle/>
+          <a:p>
+            <a:pPr indent="0" marL="0">
+              <a:buNone/>
+            </a:pPr>
+            <a:r>
+              <a:rPr lang="en-US" sz="950" dirty="0">
+                <a:solidFill>
+                  <a:srgbClr val="94A3B8"/>
+                </a:solidFill>
+                <a:latin typeface="Arial" pitchFamily="34" charset="0"/>
+                <a:ea typeface="Arial" pitchFamily="34" charset="-122"/>
+                <a:cs typeface="Arial" pitchFamily="34" charset="-120"/>
+              </a:rPr>
+              <a:t>Calcula el sueldo promedio de la dotación operativa activa. Puede ser invocada directamente en sentencias SQL o reportes.</a:t>
+            </a:r>
+            <a:endParaRPr lang="en-US" sz="950" dirty="0"/>
+          </a:p>
+        </p:txBody>
+      </p:sp>
+      <p:sp>
+        <p:nvSpPr>
+          <p:cNvPr id="30" name="Shape 28"/>
+          <p:cNvSpPr/>
+          <p:nvPr/>
+        </p:nvSpPr>
+        <p:spPr>
+          <a:xfrm>
+            <a:off x="6519672" y="5230368"/>
+            <a:ext cx="4526280" cy="438912"/>
           </a:xfrm>
           <a:prstGeom prst="roundRect">
             <a:avLst/>
           </a:prstGeom>
           <a:solidFill>
-            <a:srgbClr val="000000"/>
+            <a:srgbClr val="080B12"/>
           </a:solidFill>
-          <a:ln/>
-        </p:spPr>
-      </p:sp>
-      <p:sp>
-        <p:nvSpPr>
-          <p:cNvPr id="30" name="Text 28"/>
-          <p:cNvSpPr/>
-          <p:nvPr/>
-        </p:nvSpPr>
-        <p:spPr>
-          <a:xfrm>
-            <a:off x="6492240" y="5376672"/>
-            <a:ext cx="4572000" cy="365760"/>
+          <a:ln w="6350">
+            <a:solidFill>
+              <a:srgbClr val="232E45"/>
+            </a:solidFill>
+            <a:prstDash val="solid"/>
+          </a:ln>
+        </p:spPr>
+      </p:sp>
+      <p:sp>
+        <p:nvSpPr>
+          <p:cNvPr id="31" name="Text 29"/>
+          <p:cNvSpPr/>
+          <p:nvPr/>
+        </p:nvSpPr>
+        <p:spPr>
+          <a:xfrm>
+            <a:off x="6611112" y="5257800"/>
+            <a:ext cx="4343400" cy="384048"/>
           </a:xfrm>
           <a:prstGeom prst="rect">
             <a:avLst/>
@@ -3344,7 +3724,7 @@
     <p:bg>
       <p:bgPr>
         <a:solidFill>
-          <a:srgbClr val="0B0B0D"/>
+          <a:srgbClr val="0B0F19"/>
         </a:solidFill>
       </p:bgPr>
     </p:bg>
@@ -3371,7 +3751,7 @@
         <p:spPr>
           <a:xfrm>
             <a:off x="0" y="0"/>
-            <a:ext cx="9144000" cy="91440"/>
+            <a:ext cx="12191695" cy="73152"/>
           </a:xfrm>
           <a:prstGeom prst="rect">
             <a:avLst/>
@@ -3390,8 +3770,8 @@
         </p:nvSpPr>
         <p:spPr>
           <a:xfrm>
-            <a:off x="731520" y="457200"/>
-            <a:ext cx="7315200" cy="274320"/>
+            <a:off x="914400" y="411480"/>
+            <a:ext cx="8229600" cy="228600"/>
           </a:xfrm>
           <a:prstGeom prst="rect">
             <a:avLst/>
@@ -3407,7 +3787,7 @@
               <a:buNone/>
             </a:pPr>
             <a:r>
-              <a:rPr lang="en-US" sz="1000" b="1" spc="200" kern="0" dirty="0">
+              <a:rPr lang="en-US" sz="1000" b="1" spc="150" kern="0" dirty="0">
                 <a:solidFill>
                   <a:srgbClr val="F59E0B"/>
                 </a:solidFill>
@@ -3429,8 +3809,8 @@
         </p:nvSpPr>
         <p:spPr>
           <a:xfrm>
-            <a:off x="731520" y="731520"/>
-            <a:ext cx="10515600" cy="548640"/>
+            <a:off x="914400" y="685800"/>
+            <a:ext cx="10362895" cy="411480"/>
           </a:xfrm>
           <a:prstGeom prst="rect">
             <a:avLst/>
@@ -3462,14 +3842,37 @@
       </p:sp>
       <p:sp>
         <p:nvSpPr>
-          <p:cNvPr id="5" name="Text 3"/>
-          <p:cNvSpPr/>
-          <p:nvPr/>
-        </p:nvSpPr>
-        <p:spPr>
-          <a:xfrm>
-            <a:off x="731520" y="6400800"/>
-            <a:ext cx="7315200" cy="274320"/>
+          <p:cNvPr id="5" name="Shape 3"/>
+          <p:cNvSpPr/>
+          <p:nvPr/>
+        </p:nvSpPr>
+        <p:spPr>
+          <a:xfrm>
+            <a:off x="914400" y="1188720"/>
+            <a:ext cx="10362895" cy="0"/>
+          </a:xfrm>
+          <a:prstGeom prst="line">
+            <a:avLst/>
+          </a:prstGeom>
+          <a:noFill/>
+          <a:ln w="12700">
+            <a:solidFill>
+              <a:srgbClr val="232E45"/>
+            </a:solidFill>
+            <a:prstDash val="solid"/>
+          </a:ln>
+        </p:spPr>
+      </p:sp>
+      <p:sp>
+        <p:nvSpPr>
+          <p:cNvPr id="6" name="Text 4"/>
+          <p:cNvSpPr/>
+          <p:nvPr/>
+        </p:nvSpPr>
+        <p:spPr>
+          <a:xfrm>
+            <a:off x="914400" y="6263640"/>
+            <a:ext cx="6858000" cy="274320"/>
           </a:xfrm>
           <a:prstGeom prst="rect">
             <a:avLst/>
@@ -3487,13 +3890,13 @@
             <a:r>
               <a:rPr lang="en-US" sz="900" dirty="0">
                 <a:solidFill>
-                  <a:srgbClr val="9CA3AF"/>
-                </a:solidFill>
-                <a:latin typeface="Arial" pitchFamily="34" charset="0"/>
-                <a:ea typeface="Arial" pitchFamily="34" charset="-122"/>
-                <a:cs typeface="Arial" pitchFamily="34" charset="-120"/>
-              </a:rPr>
-              <a:t>Taller de Base de Datos (BDY1103) | Caso Estilo Urbano | Duoc UC</a:t>
+                  <a:srgbClr val="94A3B8"/>
+                </a:solidFill>
+                <a:latin typeface="Arial" pitchFamily="34" charset="0"/>
+                <a:ea typeface="Arial" pitchFamily="34" charset="-122"/>
+                <a:cs typeface="Arial" pitchFamily="34" charset="-120"/>
+              </a:rPr>
+              <a:t>Taller de Base de Datos (BDY1103) • Caso: Estilo Urbano • Duoc UC</a:t>
             </a:r>
             <a:endParaRPr lang="en-US" sz="900" dirty="0"/>
           </a:p>
@@ -3501,14 +3904,14 @@
       </p:sp>
       <p:sp>
         <p:nvSpPr>
-          <p:cNvPr id="6" name="Text 4"/>
-          <p:cNvSpPr/>
-          <p:nvPr/>
-        </p:nvSpPr>
-        <p:spPr>
-          <a:xfrm>
-            <a:off x="9144000" y="6400800"/>
-            <a:ext cx="2286000" cy="274320"/>
+          <p:cNvPr id="7" name="Text 5"/>
+          <p:cNvSpPr/>
+          <p:nvPr/>
+        </p:nvSpPr>
+        <p:spPr>
+          <a:xfrm>
+            <a:off x="8046720" y="6263640"/>
+            <a:ext cx="3230575" cy="274320"/>
           </a:xfrm>
           <a:prstGeom prst="rect">
             <a:avLst/>
@@ -3524,7 +3927,7 @@
               <a:buNone/>
             </a:pPr>
             <a:r>
-              <a:rPr lang="en-US" sz="900" dirty="0">
+              <a:rPr lang="en-US" sz="900" b="1" dirty="0">
                 <a:solidFill>
                   <a:srgbClr val="F59E0B"/>
                 </a:solidFill>
@@ -3532,7 +3935,7 @@
                 <a:ea typeface="Arial" pitchFamily="34" charset="-122"/>
                 <a:cs typeface="Arial" pitchFamily="34" charset="-120"/>
               </a:rPr>
-              <a:t>EP2 - 60% Ponderación</a:t>
+              <a:t>Evaluación Parcial N° 2 (60%)</a:t>
             </a:r>
             <a:endParaRPr lang="en-US" sz="900" dirty="0"/>
           </a:p>
@@ -3540,22 +3943,22 @@
       </p:sp>
       <p:sp>
         <p:nvSpPr>
-          <p:cNvPr id="7" name="Shape 5"/>
-          <p:cNvSpPr/>
-          <p:nvPr/>
-        </p:nvSpPr>
-        <p:spPr>
-          <a:xfrm>
-            <a:off x="731520" y="1463040"/>
-            <a:ext cx="5120640" cy="4572000"/>
+          <p:cNvPr id="8" name="Shape 6"/>
+          <p:cNvSpPr/>
+          <p:nvPr/>
+        </p:nvSpPr>
+        <p:spPr>
+          <a:xfrm>
+            <a:off x="914400" y="1417320"/>
+            <a:ext cx="4983480" cy="4526280"/>
           </a:xfrm>
           <a:prstGeom prst="roundRect">
             <a:avLst/>
           </a:prstGeom>
           <a:solidFill>
-            <a:srgbClr val="141418"/>
+            <a:srgbClr val="151C2C"/>
           </a:solidFill>
-          <a:ln w="12700">
+          <a:ln w="19050">
             <a:solidFill>
               <a:srgbClr val="F59E0B"/>
             </a:solidFill>
@@ -3565,14 +3968,14 @@
       </p:sp>
       <p:sp>
         <p:nvSpPr>
-          <p:cNvPr id="8" name="Text 6"/>
-          <p:cNvSpPr/>
-          <p:nvPr/>
-        </p:nvSpPr>
-        <p:spPr>
-          <a:xfrm>
-            <a:off x="1005840" y="1737360"/>
-            <a:ext cx="4572000" cy="274320"/>
+          <p:cNvPr id="9" name="Text 7"/>
+          <p:cNvSpPr/>
+          <p:nvPr/>
+        </p:nvSpPr>
+        <p:spPr>
+          <a:xfrm>
+            <a:off x="1188720" y="1600200"/>
+            <a:ext cx="4434840" cy="274320"/>
           </a:xfrm>
           <a:prstGeom prst="rect">
             <a:avLst/>
@@ -3596,7 +3999,7 @@
                 <a:ea typeface="Arial" pitchFamily="34" charset="-122"/>
                 <a:cs typeface="Arial" pitchFamily="34" charset="-120"/>
               </a:rPr>
-              <a:t>ESPECIFICACIÓN PÚBLICA (PACKAGE SPEC)</a:t>
+              <a:t>ESPECIFICACIÓN PÚBLICA (SPEC)</a:t>
             </a:r>
             <a:endParaRPr lang="en-US" sz="1100" dirty="0"/>
           </a:p>
@@ -3604,14 +4007,14 @@
       </p:sp>
       <p:sp>
         <p:nvSpPr>
-          <p:cNvPr id="9" name="Text 7"/>
-          <p:cNvSpPr/>
-          <p:nvPr/>
-        </p:nvSpPr>
-        <p:spPr>
-          <a:xfrm>
-            <a:off x="1005840" y="2011680"/>
-            <a:ext cx="4572000" cy="274320"/>
+          <p:cNvPr id="10" name="Text 8"/>
+          <p:cNvSpPr/>
+          <p:nvPr/>
+        </p:nvSpPr>
+        <p:spPr>
+          <a:xfrm>
+            <a:off x="1188720" y="1874520"/>
+            <a:ext cx="4434840" cy="228600"/>
           </a:xfrm>
           <a:prstGeom prst="rect">
             <a:avLst/>
@@ -3627,50 +4030,55 @@
               <a:buNone/>
             </a:pPr>
             <a:r>
-              <a:rPr lang="en-US" sz="950" dirty="0">
-                <a:solidFill>
-                  <a:srgbClr val="9CA3AF"/>
-                </a:solidFill>
-                <a:latin typeface="Arial" pitchFamily="34" charset="0"/>
-                <a:ea typeface="Arial" pitchFamily="34" charset="-122"/>
-                <a:cs typeface="Arial" pitchFamily="34" charset="-120"/>
-              </a:rPr>
-              <a:t>Interfaz accesible por aplicaciones externas y usuarios:</a:t>
-            </a:r>
-            <a:endParaRPr lang="en-US" sz="950" dirty="0"/>
-          </a:p>
-        </p:txBody>
-      </p:sp>
-      <p:sp>
-        <p:nvSpPr>
-          <p:cNvPr id="10" name="Shape 8"/>
-          <p:cNvSpPr/>
-          <p:nvPr/>
-        </p:nvSpPr>
-        <p:spPr>
-          <a:xfrm>
-            <a:off x="1005840" y="2377440"/>
-            <a:ext cx="4572000" cy="3383280"/>
+              <a:rPr lang="en-US" sz="900" dirty="0">
+                <a:solidFill>
+                  <a:srgbClr val="94A3B8"/>
+                </a:solidFill>
+                <a:latin typeface="Arial" pitchFamily="34" charset="0"/>
+                <a:ea typeface="Arial" pitchFamily="34" charset="-122"/>
+                <a:cs typeface="Arial" pitchFamily="34" charset="-120"/>
+              </a:rPr>
+              <a:t>Interfaz accesible por aplicaciones externas y endpoints ORDS:</a:t>
+            </a:r>
+            <a:endParaRPr lang="en-US" sz="900" dirty="0"/>
+          </a:p>
+        </p:txBody>
+      </p:sp>
+      <p:sp>
+        <p:nvSpPr>
+          <p:cNvPr id="11" name="Shape 9"/>
+          <p:cNvSpPr/>
+          <p:nvPr/>
+        </p:nvSpPr>
+        <p:spPr>
+          <a:xfrm>
+            <a:off x="1188720" y="2148840"/>
+            <a:ext cx="4434840" cy="3566160"/>
           </a:xfrm>
           <a:prstGeom prst="roundRect">
             <a:avLst/>
           </a:prstGeom>
           <a:solidFill>
-            <a:srgbClr val="000000"/>
+            <a:srgbClr val="080B12"/>
           </a:solidFill>
-          <a:ln/>
-        </p:spPr>
-      </p:sp>
-      <p:sp>
-        <p:nvSpPr>
-          <p:cNvPr id="11" name="Text 9"/>
-          <p:cNvSpPr/>
-          <p:nvPr/>
-        </p:nvSpPr>
-        <p:spPr>
-          <a:xfrm>
-            <a:off x="1143000" y="2468880"/>
-            <a:ext cx="4297680" cy="3200400"/>
+          <a:ln w="6350">
+            <a:solidFill>
+              <a:srgbClr val="232E45"/>
+            </a:solidFill>
+            <a:prstDash val="solid"/>
+          </a:ln>
+        </p:spPr>
+      </p:sp>
+      <p:sp>
+        <p:nvSpPr>
+          <p:cNvPr id="12" name="Text 10"/>
+          <p:cNvSpPr/>
+          <p:nvPr/>
+        </p:nvSpPr>
+        <p:spPr>
+          <a:xfrm>
+            <a:off x="1325880" y="2240280"/>
+            <a:ext cx="4160520" cy="3383280"/>
           </a:xfrm>
           <a:prstGeom prst="rect">
             <a:avLst/>
@@ -3679,7 +4087,7 @@
           <a:ln/>
         </p:spPr>
         <p:txBody>
-          <a:bodyPr wrap="square" rtlCol="0" anchor="ctr"/>
+          <a:bodyPr wrap="square" rtlCol="0" anchor="t"/>
           <a:lstStyle/>
           <a:p>
             <a:pPr indent="0" marL="0">
@@ -3703,14 +4111,13 @@
             <a:r>
               <a:rPr lang="en-US" sz="850" dirty="0">
                 <a:solidFill>
-                  <a:srgbClr val="9CA3AF"/>
+                  <a:srgbClr val="94A3B8"/>
                 </a:solidFill>
                 <a:latin typeface="Courier New" pitchFamily="34" charset="0"/>
                 <a:ea typeface="Courier New" pitchFamily="34" charset="-122"/>
                 <a:cs typeface="Courier New" pitchFamily="34" charset="-120"/>
               </a:rPr>
-              <a:t>  -- Constante pública
-  c_version CONSTANT VARCHAR2(10);
+              <a:t>  c_version CONSTANT VARCHAR2(10) := '2.0-EP2';
 </a:t>
             </a:r>
             <a:pPr indent="0" marL="0">
@@ -3719,13 +4126,13 @@
             <a:r>
               <a:rPr lang="en-US" sz="850" dirty="0">
                 <a:solidFill>
-                  <a:srgbClr val="9CA3AF"/>
+                  <a:srgbClr val="94A3B8"/>
                 </a:solidFill>
                 <a:latin typeface="Courier New" pitchFamily="34" charset="0"/>
                 <a:ea typeface="Courier New" pitchFamily="34" charset="-122"/>
                 <a:cs typeface="Courier New" pitchFamily="34" charset="-120"/>
               </a:rPr>
-              <a:t>  -- Métodos Públicos Expuestos
+              <a:t>  -- Subprogramas Públicos:
 </a:t>
             </a:r>
             <a:pPr indent="0" marL="0">
@@ -3740,7 +4147,10 @@
                 <a:ea typeface="Courier New" pitchFamily="34" charset="-122"/>
                 <a:cs typeface="Courier New" pitchFamily="34" charset="-120"/>
               </a:rPr>
-              <a:t>  FUNCTION fn_calcular_bono(...) RETURN NUMBER;
+              <a:t>  FUNCTION fn_calcular_bono(
+    p_id_trabajador NUMBER,
+    p_pct_meta NUMBER
+  ) RETURN NUMBER;
 </a:t>
             </a:r>
             <a:pPr indent="0" marL="0">
@@ -3755,7 +4165,8 @@
                 <a:ea typeface="Courier New" pitchFamily="34" charset="-122"/>
                 <a:cs typeface="Courier New" pitchFamily="34" charset="-120"/>
               </a:rPr>
-              <a:t>  FUNCTION fn_promedio_sueldo_trabajadores RETURN NUMBER;
+              <a:t>  FUNCTION fn_promedio_sueldo_trabajadores
+    RETURN NUMBER;
 </a:t>
             </a:r>
             <a:pPr indent="0" marL="0">
@@ -3770,7 +4181,10 @@
                 <a:ea typeface="Courier New" pitchFamily="34" charset="-122"/>
                 <a:cs typeface="Courier New" pitchFamily="34" charset="-120"/>
               </a:rPr>
-              <a:t>  FUNCTION fn_obtener_margen_financiero RETURN VARCHAR2;
+              <a:t>  PROCEDURE sp_actualizar_sueldo_empleado(
+    p_id_usuario   NUMBER,
+    p_nuevo_sueldo NUMBER
+  );
 </a:t>
             </a:r>
             <a:pPr indent="0" marL="0">
@@ -3785,51 +4199,21 @@
                 <a:ea typeface="Courier New" pitchFamily="34" charset="-122"/>
                 <a:cs typeface="Courier New" pitchFamily="34" charset="-120"/>
               </a:rPr>
-              <a:t>  PROCEDURE sp_actualizar_sueldo_empleado(...);
+              <a:t>  PROCEDURE sp_reajuste_masivo_sueldos;
 </a:t>
             </a:r>
             <a:pPr indent="0" marL="0">
               <a:buNone/>
             </a:pPr>
             <a:r>
-              <a:rPr lang="en-US" sz="850" dirty="0">
-                <a:solidFill>
-                  <a:srgbClr val="FFFFFF"/>
+              <a:rPr lang="en-US" sz="850" b="1" dirty="0">
+                <a:solidFill>
+                  <a:srgbClr val="F59E0B"/>
                 </a:solidFill>
                 <a:latin typeface="Courier New" pitchFamily="34" charset="0"/>
                 <a:ea typeface="Courier New" pitchFamily="34" charset="-122"/>
                 <a:cs typeface="Courier New" pitchFamily="34" charset="-120"/>
               </a:rPr>
-              <a:t>  PROCEDURE sp_cambiar_estado_pedido(...);
-</a:t>
-            </a:r>
-            <a:pPr indent="0" marL="0">
-              <a:buNone/>
-            </a:pPr>
-            <a:r>
-              <a:rPr lang="en-US" sz="850" dirty="0">
-                <a:solidFill>
-                  <a:srgbClr val="FFFFFF"/>
-                </a:solidFill>
-                <a:latin typeface="Courier New" pitchFamily="34" charset="0"/>
-                <a:ea typeface="Courier New" pitchFamily="34" charset="-122"/>
-                <a:cs typeface="Courier New" pitchFamily="34" charset="-120"/>
-              </a:rPr>
-              <a:t>  PROCEDURE sp_reajuste_masivo_sueldos;
-</a:t>
-            </a:r>
-            <a:pPr indent="0" marL="0">
-              <a:buNone/>
-            </a:pPr>
-            <a:r>
-              <a:rPr lang="en-US" sz="850" b="1" dirty="0">
-                <a:solidFill>
-                  <a:srgbClr val="F59E0B"/>
-                </a:solidFill>
-                <a:latin typeface="Courier New" pitchFamily="34" charset="0"/>
-                <a:ea typeface="Courier New" pitchFamily="34" charset="-122"/>
-                <a:cs typeface="Courier New" pitchFamily="34" charset="-120"/>
-              </a:rPr>
               <a:t>END PKG_ESTILO_URBANO;</a:t>
             </a:r>
             <a:endParaRPr lang="en-US" sz="850" dirty="0"/>
@@ -3838,22 +4222,22 @@
       </p:sp>
       <p:sp>
         <p:nvSpPr>
-          <p:cNvPr id="12" name="Shape 10"/>
-          <p:cNvSpPr/>
-          <p:nvPr/>
-        </p:nvSpPr>
-        <p:spPr>
-          <a:xfrm>
-            <a:off x="6217920" y="1463040"/>
-            <a:ext cx="5120640" cy="4572000"/>
+          <p:cNvPr id="13" name="Shape 11"/>
+          <p:cNvSpPr/>
+          <p:nvPr/>
+        </p:nvSpPr>
+        <p:spPr>
+          <a:xfrm>
+            <a:off x="6291072" y="1417320"/>
+            <a:ext cx="4983480" cy="4526280"/>
           </a:xfrm>
           <a:prstGeom prst="roundRect">
             <a:avLst/>
           </a:prstGeom>
           <a:solidFill>
-            <a:srgbClr val="141418"/>
+            <a:srgbClr val="151C2C"/>
           </a:solidFill>
-          <a:ln w="12700">
+          <a:ln w="19050">
             <a:solidFill>
               <a:srgbClr val="10B981"/>
             </a:solidFill>
@@ -3863,14 +4247,14 @@
       </p:sp>
       <p:sp>
         <p:nvSpPr>
-          <p:cNvPr id="13" name="Text 11"/>
-          <p:cNvSpPr/>
-          <p:nvPr/>
-        </p:nvSpPr>
-        <p:spPr>
-          <a:xfrm>
-            <a:off x="6492240" y="1737360"/>
-            <a:ext cx="4572000" cy="274320"/>
+          <p:cNvPr id="14" name="Text 12"/>
+          <p:cNvSpPr/>
+          <p:nvPr/>
+        </p:nvSpPr>
+        <p:spPr>
+          <a:xfrm>
+            <a:off x="6565392" y="1600200"/>
+            <a:ext cx="4434840" cy="274320"/>
           </a:xfrm>
           <a:prstGeom prst="rect">
             <a:avLst/>
@@ -3894,7 +4278,7 @@
                 <a:ea typeface="Arial" pitchFamily="34" charset="-122"/>
                 <a:cs typeface="Arial" pitchFamily="34" charset="-120"/>
               </a:rPr>
-              <a:t>CUERPO PRIVADO (PACKAGE BODY)</a:t>
+              <a:t>CUERPO PRIVADO (BODY)</a:t>
             </a:r>
             <a:endParaRPr lang="en-US" sz="1100" dirty="0"/>
           </a:p>
@@ -3902,14 +4286,14 @@
       </p:sp>
       <p:sp>
         <p:nvSpPr>
-          <p:cNvPr id="14" name="Text 12"/>
-          <p:cNvSpPr/>
-          <p:nvPr/>
-        </p:nvSpPr>
-        <p:spPr>
-          <a:xfrm>
-            <a:off x="6492240" y="2011680"/>
-            <a:ext cx="4572000" cy="274320"/>
+          <p:cNvPr id="15" name="Text 13"/>
+          <p:cNvSpPr/>
+          <p:nvPr/>
+        </p:nvSpPr>
+        <p:spPr>
+          <a:xfrm>
+            <a:off x="6565392" y="1874520"/>
+            <a:ext cx="4434840" cy="228600"/>
           </a:xfrm>
           <a:prstGeom prst="rect">
             <a:avLst/>
@@ -3925,50 +4309,55 @@
               <a:buNone/>
             </a:pPr>
             <a:r>
-              <a:rPr lang="en-US" sz="950" dirty="0">
-                <a:solidFill>
-                  <a:srgbClr val="9CA3AF"/>
-                </a:solidFill>
-                <a:latin typeface="Arial" pitchFamily="34" charset="0"/>
-                <a:ea typeface="Arial" pitchFamily="34" charset="-122"/>
-                <a:cs typeface="Arial" pitchFamily="34" charset="-120"/>
-              </a:rPr>
-              <a:t>Encapsulamiento estricto: lógica oculta al exterior:</a:t>
-            </a:r>
-            <a:endParaRPr lang="en-US" sz="950" dirty="0"/>
-          </a:p>
-        </p:txBody>
-      </p:sp>
-      <p:sp>
-        <p:nvSpPr>
-          <p:cNvPr id="15" name="Shape 13"/>
-          <p:cNvSpPr/>
-          <p:nvPr/>
-        </p:nvSpPr>
-        <p:spPr>
-          <a:xfrm>
-            <a:off x="6492240" y="2377440"/>
-            <a:ext cx="4572000" cy="3383280"/>
+              <a:rPr lang="en-US" sz="900" dirty="0">
+                <a:solidFill>
+                  <a:srgbClr val="94A3B8"/>
+                </a:solidFill>
+                <a:latin typeface="Arial" pitchFamily="34" charset="0"/>
+                <a:ea typeface="Arial" pitchFamily="34" charset="-122"/>
+                <a:cs typeface="Arial" pitchFamily="34" charset="-120"/>
+              </a:rPr>
+              <a:t>Constructores privados encapsulados (ocultos al exterior):</a:t>
+            </a:r>
+            <a:endParaRPr lang="en-US" sz="900" dirty="0"/>
+          </a:p>
+        </p:txBody>
+      </p:sp>
+      <p:sp>
+        <p:nvSpPr>
+          <p:cNvPr id="16" name="Shape 14"/>
+          <p:cNvSpPr/>
+          <p:nvPr/>
+        </p:nvSpPr>
+        <p:spPr>
+          <a:xfrm>
+            <a:off x="6565392" y="2148840"/>
+            <a:ext cx="4434840" cy="3566160"/>
           </a:xfrm>
           <a:prstGeom prst="roundRect">
             <a:avLst/>
           </a:prstGeom>
           <a:solidFill>
-            <a:srgbClr val="000000"/>
+            <a:srgbClr val="080B12"/>
           </a:solidFill>
-          <a:ln/>
-        </p:spPr>
-      </p:sp>
-      <p:sp>
-        <p:nvSpPr>
-          <p:cNvPr id="16" name="Text 14"/>
-          <p:cNvSpPr/>
-          <p:nvPr/>
-        </p:nvSpPr>
-        <p:spPr>
-          <a:xfrm>
-            <a:off x="6629400" y="2468880"/>
-            <a:ext cx="4297680" cy="3200400"/>
+          <a:ln w="6350">
+            <a:solidFill>
+              <a:srgbClr val="232E45"/>
+            </a:solidFill>
+            <a:prstDash val="solid"/>
+          </a:ln>
+        </p:spPr>
+      </p:sp>
+      <p:sp>
+        <p:nvSpPr>
+          <p:cNvPr id="17" name="Text 15"/>
+          <p:cNvSpPr/>
+          <p:nvPr/>
+        </p:nvSpPr>
+        <p:spPr>
+          <a:xfrm>
+            <a:off x="6702552" y="2240280"/>
+            <a:ext cx="4160520" cy="3383280"/>
           </a:xfrm>
           <a:prstGeom prst="rect">
             <a:avLst/>
@@ -3977,7 +4366,7 @@
           <a:ln/>
         </p:spPr>
         <p:txBody>
-          <a:bodyPr wrap="square" rtlCol="0" anchor="ctr"/>
+          <a:bodyPr wrap="square" rtlCol="0" anchor="t"/>
           <a:lstStyle/>
           <a:p>
             <a:pPr indent="0" marL="0">
@@ -4007,7 +4396,7 @@
                 <a:ea typeface="Courier New" pitchFamily="34" charset="-122"/>
                 <a:cs typeface="Courier New" pitchFamily="34" charset="-120"/>
               </a:rPr>
-              <a:t>  -- CONSTRUCTOR / FUNCIÓN PRIVADA
+              <a:t>  -- CONSTRUCTOR PRIVADO (Oculto al exterior)
 </a:t>
             </a:r>
             <a:pPr indent="0" marL="0">
@@ -4016,15 +4405,22 @@
             <a:r>
               <a:rPr lang="en-US" sz="850" dirty="0">
                 <a:solidFill>
-                  <a:srgbClr val="FFFFFF"/>
+                  <a:srgbClr val="94A3B8"/>
                 </a:solidFill>
                 <a:latin typeface="Courier New" pitchFamily="34" charset="0"/>
                 <a:ea typeface="Courier New" pitchFamily="34" charset="-122"/>
                 <a:cs typeface="Courier New" pitchFamily="34" charset="-120"/>
               </a:rPr>
               <a:t>  FUNCTION fn_es_trabajador_valido(
-    p_id NUMBER
+    p_id_usuario NUMBER
   ) RETURN BOOLEAN IS
+    v_count NUMBER;
+  BEGIN
+    SELECT COUNT(*) INTO v_count
+    FROM USUARIO WHERE id_usuario = p_id_usuario
+      AND id_rol = 2 AND estado = 'A';
+    RETURN (v_count &gt; 0);
+  END fn_es_trabajador_valido;
 </a:t>
             </a:r>
             <a:pPr indent="0" marL="0">
@@ -4033,47 +4429,14 @@
             <a:r>
               <a:rPr lang="en-US" sz="850" dirty="0">
                 <a:solidFill>
-                  <a:srgbClr val="9CA3AF"/>
+                  <a:srgbClr val="94A3B8"/>
                 </a:solidFill>
                 <a:latin typeface="Courier New" pitchFamily="34" charset="0"/>
                 <a:ea typeface="Courier New" pitchFamily="34" charset="-122"/>
                 <a:cs typeface="Courier New" pitchFamily="34" charset="-120"/>
               </a:rPr>
-              <a:t>  BEGIN
-    -- Valida que sea rol = 2 y estado = "A"
-    SELECT COUNT(*) INTO v_existe FROM ...;
-    RETURN (v_existe &gt; 0);
-  END fn_es_trabajador_valido;
-</a:t>
-            </a:r>
-            <a:pPr indent="0" marL="0">
-              <a:buNone/>
-            </a:pPr>
-            <a:r>
-              <a:rPr lang="en-US" sz="850" dirty="0">
-                <a:solidFill>
-                  <a:srgbClr val="9CA3AF"/>
-                </a:solidFill>
-                <a:latin typeface="Courier New" pitchFamily="34" charset="0"/>
-                <a:ea typeface="Courier New" pitchFamily="34" charset="-122"/>
-                <a:cs typeface="Courier New" pitchFamily="34" charset="-120"/>
-              </a:rPr>
-              <a:t>  -- Implementación de métodos públicos...
-</a:t>
-            </a:r>
-            <a:pPr indent="0" marL="0">
-              <a:buNone/>
-            </a:pPr>
-            <a:r>
-              <a:rPr lang="en-US" sz="850" dirty="0">
-                <a:solidFill>
-                  <a:srgbClr val="9CA3AF"/>
-                </a:solidFill>
-                <a:latin typeface="Courier New" pitchFamily="34" charset="0"/>
-                <a:ea typeface="Courier New" pitchFamily="34" charset="-122"/>
-                <a:cs typeface="Courier New" pitchFamily="34" charset="-120"/>
-              </a:rPr>
-              <a:t>  -- Invocan internamente al constructor privado.
+              <a:t>  -- Los métodos públicos usan fn_es_trabajador_valido
+  -- para blindar cualquier modificación.
 </a:t>
             </a:r>
             <a:pPr indent="0" marL="0">
@@ -4108,7 +4471,7 @@
     <p:bg>
       <p:bgPr>
         <a:solidFill>
-          <a:srgbClr val="0B0B0D"/>
+          <a:srgbClr val="0B0F19"/>
         </a:solidFill>
       </p:bgPr>
     </p:bg>
@@ -4135,7 +4498,7 @@
         <p:spPr>
           <a:xfrm>
             <a:off x="0" y="0"/>
-            <a:ext cx="9144000" cy="91440"/>
+            <a:ext cx="12191695" cy="73152"/>
           </a:xfrm>
           <a:prstGeom prst="rect">
             <a:avLst/>
@@ -4154,8 +4517,8 @@
         </p:nvSpPr>
         <p:spPr>
           <a:xfrm>
-            <a:off x="731520" y="457200"/>
-            <a:ext cx="7315200" cy="274320"/>
+            <a:off x="914400" y="411480"/>
+            <a:ext cx="8229600" cy="228600"/>
           </a:xfrm>
           <a:prstGeom prst="rect">
             <a:avLst/>
@@ -4171,7 +4534,7 @@
               <a:buNone/>
             </a:pPr>
             <a:r>
-              <a:rPr lang="en-US" sz="1000" b="1" spc="200" kern="0" dirty="0">
+              <a:rPr lang="en-US" sz="1000" b="1" spc="150" kern="0" dirty="0">
                 <a:solidFill>
                   <a:srgbClr val="F59E0B"/>
                 </a:solidFill>
@@ -4179,7 +4542,7 @@
                 <a:ea typeface="Arial" pitchFamily="34" charset="-122"/>
                 <a:cs typeface="Arial" pitchFamily="34" charset="-120"/>
               </a:rPr>
-              <a:t>4. DISPARADORES PL/SQL</a:t>
+              <a:t>4. DISPARADORES DE BASE DE DATOS</a:t>
             </a:r>
             <a:endParaRPr lang="en-US" sz="1000" dirty="0"/>
           </a:p>
@@ -4193,8 +4556,8 @@
         </p:nvSpPr>
         <p:spPr>
           <a:xfrm>
-            <a:off x="731520" y="731520"/>
-            <a:ext cx="10515600" cy="548640"/>
+            <a:off x="914400" y="685800"/>
+            <a:ext cx="10362895" cy="411480"/>
           </a:xfrm>
           <a:prstGeom prst="rect">
             <a:avLst/>
@@ -4218,7 +4581,7 @@
                 <a:ea typeface="Arial" pitchFamily="34" charset="-122"/>
                 <a:cs typeface="Arial" pitchFamily="34" charset="-120"/>
               </a:rPr>
-              <a:t>Triggers a Nivel de Fila y Sentencia: Auditoría y Reglas de Negocio</a:t>
+              <a:t>Triggers a Nivel de Fila y Sentencia: Integridad, Auditoría y Solvencia</a:t>
             </a:r>
             <a:endParaRPr lang="en-US" sz="2200" dirty="0"/>
           </a:p>
@@ -4226,14 +4589,37 @@
       </p:sp>
       <p:sp>
         <p:nvSpPr>
-          <p:cNvPr id="5" name="Text 3"/>
-          <p:cNvSpPr/>
-          <p:nvPr/>
-        </p:nvSpPr>
-        <p:spPr>
-          <a:xfrm>
-            <a:off x="731520" y="6400800"/>
-            <a:ext cx="7315200" cy="274320"/>
+          <p:cNvPr id="5" name="Shape 3"/>
+          <p:cNvSpPr/>
+          <p:nvPr/>
+        </p:nvSpPr>
+        <p:spPr>
+          <a:xfrm>
+            <a:off x="914400" y="1188720"/>
+            <a:ext cx="10362895" cy="0"/>
+          </a:xfrm>
+          <a:prstGeom prst="line">
+            <a:avLst/>
+          </a:prstGeom>
+          <a:noFill/>
+          <a:ln w="12700">
+            <a:solidFill>
+              <a:srgbClr val="232E45"/>
+            </a:solidFill>
+            <a:prstDash val="solid"/>
+          </a:ln>
+        </p:spPr>
+      </p:sp>
+      <p:sp>
+        <p:nvSpPr>
+          <p:cNvPr id="6" name="Text 4"/>
+          <p:cNvSpPr/>
+          <p:nvPr/>
+        </p:nvSpPr>
+        <p:spPr>
+          <a:xfrm>
+            <a:off x="914400" y="6263640"/>
+            <a:ext cx="6858000" cy="274320"/>
           </a:xfrm>
           <a:prstGeom prst="rect">
             <a:avLst/>
@@ -4251,13 +4637,13 @@
             <a:r>
               <a:rPr lang="en-US" sz="900" dirty="0">
                 <a:solidFill>
-                  <a:srgbClr val="9CA3AF"/>
-                </a:solidFill>
-                <a:latin typeface="Arial" pitchFamily="34" charset="0"/>
-                <a:ea typeface="Arial" pitchFamily="34" charset="-122"/>
-                <a:cs typeface="Arial" pitchFamily="34" charset="-120"/>
-              </a:rPr>
-              <a:t>Taller de Base de Datos (BDY1103) | Caso Estilo Urbano | Duoc UC</a:t>
+                  <a:srgbClr val="94A3B8"/>
+                </a:solidFill>
+                <a:latin typeface="Arial" pitchFamily="34" charset="0"/>
+                <a:ea typeface="Arial" pitchFamily="34" charset="-122"/>
+                <a:cs typeface="Arial" pitchFamily="34" charset="-120"/>
+              </a:rPr>
+              <a:t>Taller de Base de Datos (BDY1103) • Caso: Estilo Urbano • Duoc UC</a:t>
             </a:r>
             <a:endParaRPr lang="en-US" sz="900" dirty="0"/>
           </a:p>
@@ -4265,14 +4651,14 @@
       </p:sp>
       <p:sp>
         <p:nvSpPr>
-          <p:cNvPr id="6" name="Text 4"/>
-          <p:cNvSpPr/>
-          <p:nvPr/>
-        </p:nvSpPr>
-        <p:spPr>
-          <a:xfrm>
-            <a:off x="9144000" y="6400800"/>
-            <a:ext cx="2286000" cy="274320"/>
+          <p:cNvPr id="7" name="Text 5"/>
+          <p:cNvSpPr/>
+          <p:nvPr/>
+        </p:nvSpPr>
+        <p:spPr>
+          <a:xfrm>
+            <a:off x="8046720" y="6263640"/>
+            <a:ext cx="3230575" cy="274320"/>
           </a:xfrm>
           <a:prstGeom prst="rect">
             <a:avLst/>
@@ -4288,7 +4674,7 @@
               <a:buNone/>
             </a:pPr>
             <a:r>
-              <a:rPr lang="en-US" sz="900" dirty="0">
+              <a:rPr lang="en-US" sz="900" b="1" dirty="0">
                 <a:solidFill>
                   <a:srgbClr val="F59E0B"/>
                 </a:solidFill>
@@ -4296,7 +4682,7 @@
                 <a:ea typeface="Arial" pitchFamily="34" charset="-122"/>
                 <a:cs typeface="Arial" pitchFamily="34" charset="-120"/>
               </a:rPr>
-              <a:t>EP2 - 60% Ponderación</a:t>
+              <a:t>Evaluación Parcial N° 2 (60%)</a:t>
             </a:r>
             <a:endParaRPr lang="en-US" sz="900" dirty="0"/>
           </a:p>
@@ -4304,24 +4690,24 @@
       </p:sp>
       <p:sp>
         <p:nvSpPr>
-          <p:cNvPr id="7" name="Shape 5"/>
-          <p:cNvSpPr/>
-          <p:nvPr/>
-        </p:nvSpPr>
-        <p:spPr>
-          <a:xfrm>
-            <a:off x="731520" y="1463040"/>
-            <a:ext cx="3291840" cy="4572000"/>
+          <p:cNvPr id="8" name="Shape 6"/>
+          <p:cNvSpPr/>
+          <p:nvPr/>
+        </p:nvSpPr>
+        <p:spPr>
+          <a:xfrm>
+            <a:off x="914400" y="1417320"/>
+            <a:ext cx="3337560" cy="4526280"/>
           </a:xfrm>
           <a:prstGeom prst="roundRect">
             <a:avLst/>
           </a:prstGeom>
           <a:solidFill>
-            <a:srgbClr val="141418"/>
+            <a:srgbClr val="151C2C"/>
           </a:solidFill>
           <a:ln w="12700">
             <a:solidFill>
-              <a:srgbClr val="DC2626"/>
+              <a:srgbClr val="232E45"/>
             </a:solidFill>
             <a:prstDash val="solid"/>
           </a:ln>
@@ -4329,14 +4715,14 @@
       </p:sp>
       <p:sp>
         <p:nvSpPr>
-          <p:cNvPr id="8" name="Text 6"/>
-          <p:cNvSpPr/>
-          <p:nvPr/>
-        </p:nvSpPr>
-        <p:spPr>
-          <a:xfrm>
-            <a:off x="914400" y="1691640"/>
-            <a:ext cx="2926080" cy="274320"/>
+          <p:cNvPr id="9" name="Text 7"/>
+          <p:cNvSpPr/>
+          <p:nvPr/>
+        </p:nvSpPr>
+        <p:spPr>
+          <a:xfrm>
+            <a:off x="1097280" y="1554480"/>
+            <a:ext cx="2971800" cy="228600"/>
           </a:xfrm>
           <a:prstGeom prst="rect">
             <a:avLst/>
@@ -4352,7 +4738,7 @@
               <a:buNone/>
             </a:pPr>
             <a:r>
-              <a:rPr lang="en-US" sz="1000" b="1" dirty="0">
+              <a:rPr lang="en-US" sz="850" b="1" dirty="0">
                 <a:solidFill>
                   <a:srgbClr val="EF4444"/>
                 </a:solidFill>
@@ -4362,20 +4748,20 @@
               </a:rPr>
               <a:t>FILA: BEFORE</a:t>
             </a:r>
-            <a:endParaRPr lang="en-US" sz="1000" dirty="0"/>
-          </a:p>
-        </p:txBody>
-      </p:sp>
-      <p:sp>
-        <p:nvSpPr>
-          <p:cNvPr id="9" name="Text 7"/>
-          <p:cNvSpPr/>
-          <p:nvPr/>
-        </p:nvSpPr>
-        <p:spPr>
-          <a:xfrm>
-            <a:off x="914400" y="1965960"/>
-            <a:ext cx="2926080" cy="365760"/>
+            <a:endParaRPr lang="en-US" sz="850" dirty="0"/>
+          </a:p>
+        </p:txBody>
+      </p:sp>
+      <p:sp>
+        <p:nvSpPr>
+          <p:cNvPr id="10" name="Text 8"/>
+          <p:cNvSpPr/>
+          <p:nvPr/>
+        </p:nvSpPr>
+        <p:spPr>
+          <a:xfrm>
+            <a:off x="1097280" y="1783080"/>
+            <a:ext cx="2971800" cy="320040"/>
           </a:xfrm>
           <a:prstGeom prst="rect">
             <a:avLst/>
@@ -4391,7 +4777,7 @@
               <a:buNone/>
             </a:pPr>
             <a:r>
-              <a:rPr lang="en-US" sz="1100" b="1" dirty="0">
+              <a:rPr lang="en-US" sz="950" b="1" dirty="0">
                 <a:solidFill>
                   <a:srgbClr val="FFFFFF"/>
                 </a:solidFill>
@@ -4401,20 +4787,20 @@
               </a:rPr>
               <a:t>trg_valida_sueldo_empleado</a:t>
             </a:r>
-            <a:endParaRPr lang="en-US" sz="1100" dirty="0"/>
-          </a:p>
-        </p:txBody>
-      </p:sp>
-      <p:sp>
-        <p:nvSpPr>
-          <p:cNvPr id="10" name="Text 8"/>
-          <p:cNvSpPr/>
-          <p:nvPr/>
-        </p:nvSpPr>
-        <p:spPr>
-          <a:xfrm>
-            <a:off x="914400" y="2423160"/>
-            <a:ext cx="2926080" cy="3474720"/>
+            <a:endParaRPr lang="en-US" sz="950" dirty="0"/>
+          </a:p>
+        </p:txBody>
+      </p:sp>
+      <p:sp>
+        <p:nvSpPr>
+          <p:cNvPr id="11" name="Text 9"/>
+          <p:cNvSpPr/>
+          <p:nvPr/>
+        </p:nvSpPr>
+        <p:spPr>
+          <a:xfrm>
+            <a:off x="1097280" y="2148840"/>
+            <a:ext cx="2971800" cy="1920240"/>
           </a:xfrm>
           <a:prstGeom prst="rect">
             <a:avLst/>
@@ -4423,14 +4809,14 @@
           <a:ln/>
         </p:spPr>
         <p:txBody>
-          <a:bodyPr wrap="square" rtlCol="0" anchor="ctr"/>
-          <a:lstStyle/>
-          <a:p>
-            <a:pPr indent="0" marL="0">
-              <a:buNone/>
-            </a:pPr>
-            <a:r>
-              <a:rPr lang="en-US" sz="1000" b="1" dirty="0">
+          <a:bodyPr wrap="square" rtlCol="0" anchor="t"/>
+          <a:lstStyle/>
+          <a:p>
+            <a:pPr indent="0" marL="0">
+              <a:buNone/>
+            </a:pPr>
+            <a:r>
+              <a:rPr lang="en-US" sz="850" b="1" dirty="0">
                 <a:solidFill>
                   <a:srgbClr val="FFFFFF"/>
                 </a:solidFill>
@@ -4438,15 +4824,15 @@
                 <a:ea typeface="Arial" pitchFamily="34" charset="-122"/>
                 <a:cs typeface="Arial" pitchFamily="34" charset="-120"/>
               </a:rPr>
-              <a:t>• Momento: </a:t>
-            </a:r>
-            <a:pPr indent="0" marL="0">
-              <a:buNone/>
-            </a:pPr>
-            <a:r>
-              <a:rPr lang="en-US" sz="1000" dirty="0">
-                <a:solidFill>
-                  <a:srgbClr val="9CA3AF"/>
+              <a:t>Momento: </a:t>
+            </a:r>
+            <a:pPr indent="0" marL="0">
+              <a:buNone/>
+            </a:pPr>
+            <a:r>
+              <a:rPr lang="en-US" sz="850" dirty="0">
+                <a:solidFill>
+                  <a:srgbClr val="94A3B8"/>
                 </a:solidFill>
                 <a:latin typeface="Arial" pitchFamily="34" charset="0"/>
                 <a:ea typeface="Arial" pitchFamily="34" charset="-122"/>
@@ -4459,7 +4845,7 @@
               <a:buNone/>
             </a:pPr>
             <a:r>
-              <a:rPr lang="en-US" sz="1000" b="1" dirty="0">
+              <a:rPr lang="en-US" sz="850" b="1" dirty="0">
                 <a:solidFill>
                   <a:srgbClr val="FFFFFF"/>
                 </a:solidFill>
@@ -4467,28 +4853,28 @@
                 <a:ea typeface="Arial" pitchFamily="34" charset="-122"/>
                 <a:cs typeface="Arial" pitchFamily="34" charset="-120"/>
               </a:rPr>
-              <a:t>• Tabla: </a:t>
-            </a:r>
-            <a:pPr indent="0" marL="0">
-              <a:buNone/>
-            </a:pPr>
-            <a:r>
-              <a:rPr lang="en-US" sz="1000" dirty="0">
-                <a:solidFill>
-                  <a:srgbClr val="9CA3AF"/>
-                </a:solidFill>
-                <a:latin typeface="Arial" pitchFamily="34" charset="0"/>
-                <a:ea typeface="Arial" pitchFamily="34" charset="-122"/>
-                <a:cs typeface="Arial" pitchFamily="34" charset="-120"/>
-              </a:rPr>
-              <a:t>USUARIO
+              <a:t>Tabla Afectada: </a:t>
+            </a:r>
+            <a:pPr indent="0" marL="0">
+              <a:buNone/>
+            </a:pPr>
+            <a:r>
+              <a:rPr lang="en-US" sz="850" dirty="0">
+                <a:solidFill>
+                  <a:srgbClr val="94A3B8"/>
+                </a:solidFill>
+                <a:latin typeface="Arial" pitchFamily="34" charset="0"/>
+                <a:ea typeface="Arial" pitchFamily="34" charset="-122"/>
+                <a:cs typeface="Arial" pitchFamily="34" charset="-120"/>
+              </a:rPr>
+              <a:t>USUARIO (sueldo_base)
 </a:t>
             </a:r>
             <a:pPr indent="0" marL="0">
               <a:buNone/>
             </a:pPr>
             <a:r>
-              <a:rPr lang="en-US" sz="1000" b="1" dirty="0">
+              <a:rPr lang="en-US" sz="850" b="1" dirty="0">
                 <a:solidFill>
                   <a:srgbClr val="F59E0B"/>
                 </a:solidFill>
@@ -4496,92 +4882,176 @@
                 <a:ea typeface="Arial" pitchFamily="34" charset="-122"/>
                 <a:cs typeface="Arial" pitchFamily="34" charset="-120"/>
               </a:rPr>
-              <a:t>• Propósito de Negocio:
+              <a:t>Regla: </a:t>
+            </a:r>
+            <a:pPr indent="0" marL="0">
+              <a:buNone/>
+            </a:pPr>
+            <a:r>
+              <a:rPr lang="en-US" sz="850" b="1" dirty="0">
+                <a:solidFill>
+                  <a:srgbClr val="FFFFFF"/>
+                </a:solidFill>
+                <a:latin typeface="Arial" pitchFamily="34" charset="0"/>
+                <a:ea typeface="Arial" pitchFamily="34" charset="-122"/>
+                <a:cs typeface="Arial" pitchFamily="34" charset="-120"/>
+              </a:rPr>
+              <a:t>Sueldo Mínimo Legal ($500.000)
 </a:t>
             </a:r>
             <a:pPr indent="0" marL="0">
               <a:buNone/>
             </a:pPr>
             <a:r>
-              <a:rPr lang="en-US" sz="1000" dirty="0">
-                <a:solidFill>
-                  <a:srgbClr val="9CA3AF"/>
-                </a:solidFill>
-                <a:latin typeface="Arial" pitchFamily="34" charset="0"/>
-                <a:ea typeface="Arial" pitchFamily="34" charset="-122"/>
-                <a:cs typeface="Arial" pitchFamily="34" charset="-120"/>
-              </a:rPr>
-              <a:t>  Valida que el sueldo no sea inferior al mínimo legal ($500.000).
-</a:t>
-            </a:r>
-            <a:pPr indent="0" marL="0">
-              <a:buNone/>
-            </a:pPr>
-            <a:r>
-              <a:rPr lang="en-US" sz="1000" b="1" dirty="0">
+              <a:rPr lang="en-US" sz="850" dirty="0">
+                <a:solidFill>
+                  <a:srgbClr val="94A3B8"/>
+                </a:solidFill>
+                <a:latin typeface="Arial" pitchFamily="34" charset="0"/>
+                <a:ea typeface="Arial" pitchFamily="34" charset="-122"/>
+                <a:cs typeface="Arial" pitchFamily="34" charset="-120"/>
+              </a:rPr>
+              <a:t>Verifica preventivamente que ningún operador gane menos del sueldo mínimo legal. Cancela con ORA-20001.</a:t>
+            </a:r>
+            <a:endParaRPr lang="en-US" sz="850" dirty="0"/>
+          </a:p>
+        </p:txBody>
+      </p:sp>
+      <p:sp>
+        <p:nvSpPr>
+          <p:cNvPr id="12" name="Shape 10"/>
+          <p:cNvSpPr/>
+          <p:nvPr/>
+        </p:nvSpPr>
+        <p:spPr>
+          <a:xfrm>
+            <a:off x="1097280" y="4114800"/>
+            <a:ext cx="2971800" cy="1600200"/>
+          </a:xfrm>
+          <a:prstGeom prst="roundRect">
+            <a:avLst/>
+          </a:prstGeom>
+          <a:solidFill>
+            <a:srgbClr val="080B12"/>
+          </a:solidFill>
+          <a:ln w="6350">
+            <a:solidFill>
+              <a:srgbClr val="232E45"/>
+            </a:solidFill>
+            <a:prstDash val="solid"/>
+          </a:ln>
+        </p:spPr>
+      </p:sp>
+      <p:sp>
+        <p:nvSpPr>
+          <p:cNvPr id="13" name="Text 11"/>
+          <p:cNvSpPr/>
+          <p:nvPr/>
+        </p:nvSpPr>
+        <p:spPr>
+          <a:xfrm>
+            <a:off x="1188720" y="4206240"/>
+            <a:ext cx="2788920" cy="1417320"/>
+          </a:xfrm>
+          <a:prstGeom prst="rect">
+            <a:avLst/>
+          </a:prstGeom>
+          <a:noFill/>
+          <a:ln/>
+        </p:spPr>
+        <p:txBody>
+          <a:bodyPr wrap="square" rtlCol="0" anchor="t"/>
+          <a:lstStyle/>
+          <a:p>
+            <a:pPr indent="0" marL="0">
+              <a:buNone/>
+            </a:pPr>
+            <a:r>
+              <a:rPr lang="en-US" sz="750" dirty="0">
                 <a:solidFill>
                   <a:srgbClr val="F59E0B"/>
                 </a:solidFill>
-                <a:latin typeface="Arial" pitchFamily="34" charset="0"/>
-                <a:ea typeface="Arial" pitchFamily="34" charset="-122"/>
-                <a:cs typeface="Arial" pitchFamily="34" charset="-120"/>
-              </a:rPr>
-              <a:t>• Mecanismo:
-</a:t>
-            </a:r>
-            <a:pPr indent="0" marL="0">
-              <a:buNone/>
-            </a:pPr>
-            <a:r>
-              <a:rPr lang="en-US" sz="1000" dirty="0">
-                <a:solidFill>
-                  <a:srgbClr val="9CA3AF"/>
-                </a:solidFill>
-                <a:latin typeface="Arial" pitchFamily="34" charset="0"/>
-                <a:ea typeface="Arial" pitchFamily="34" charset="-122"/>
-                <a:cs typeface="Arial" pitchFamily="34" charset="-120"/>
-              </a:rPr>
-              <a:t>  Frena la transacción antes de tocar el bloque de datos arrojando:
-</a:t>
-            </a:r>
-            <a:pPr indent="0" marL="0">
-              <a:buNone/>
-            </a:pPr>
-            <a:r>
-              <a:rPr lang="en-US" sz="1000" b="1" dirty="0">
-                <a:solidFill>
-                  <a:srgbClr val="EF4444"/>
-                </a:solidFill>
-                <a:latin typeface="Arial" pitchFamily="34" charset="0"/>
-                <a:ea typeface="Arial" pitchFamily="34" charset="-122"/>
-                <a:cs typeface="Arial" pitchFamily="34" charset="-120"/>
-              </a:rPr>
-              <a:t>  RAISE_APPLICATION_ERROR(-20001)</a:t>
-            </a:r>
-            <a:endParaRPr lang="en-US" sz="1000" dirty="0"/>
-          </a:p>
-        </p:txBody>
-      </p:sp>
-      <p:sp>
-        <p:nvSpPr>
-          <p:cNvPr id="11" name="Shape 9"/>
-          <p:cNvSpPr/>
-          <p:nvPr/>
-        </p:nvSpPr>
-        <p:spPr>
-          <a:xfrm>
-            <a:off x="4389120" y="1463040"/>
-            <a:ext cx="3291840" cy="4572000"/>
+                <a:latin typeface="Courier New" pitchFamily="34" charset="0"/>
+                <a:ea typeface="Courier New" pitchFamily="34" charset="-122"/>
+                <a:cs typeface="Courier New" pitchFamily="34" charset="-120"/>
+              </a:rPr>
+              <a:t>IF :NEW.sueldo_base &lt; 500000 THEN</a:t>
+            </a:r>
+            <a:endParaRPr lang="en-US" sz="750" dirty="0"/>
+          </a:p>
+          <a:p>
+            <a:pPr indent="0" marL="0">
+              <a:buNone/>
+            </a:pPr>
+            <a:r>
+              <a:rPr lang="en-US" sz="750" dirty="0">
+                <a:solidFill>
+                  <a:srgbClr val="F59E0B"/>
+                </a:solidFill>
+                <a:latin typeface="Courier New" pitchFamily="34" charset="0"/>
+                <a:ea typeface="Courier New" pitchFamily="34" charset="-122"/>
+                <a:cs typeface="Courier New" pitchFamily="34" charset="-120"/>
+              </a:rPr>
+              <a:t>  RAISE_APPLICATION_ERROR(-20001,</a:t>
+            </a:r>
+            <a:endParaRPr lang="en-US" sz="750" dirty="0"/>
+          </a:p>
+          <a:p>
+            <a:pPr indent="0" marL="0">
+              <a:buNone/>
+            </a:pPr>
+            <a:r>
+              <a:rPr lang="en-US" sz="750" dirty="0">
+                <a:solidFill>
+                  <a:srgbClr val="F59E0B"/>
+                </a:solidFill>
+                <a:latin typeface="Courier New" pitchFamily="34" charset="0"/>
+                <a:ea typeface="Courier New" pitchFamily="34" charset="-122"/>
+                <a:cs typeface="Courier New" pitchFamily="34" charset="-120"/>
+              </a:rPr>
+              <a:t>    'Sueldo bajo el mínimo legal');</a:t>
+            </a:r>
+            <a:endParaRPr lang="en-US" sz="750" dirty="0"/>
+          </a:p>
+          <a:p>
+            <a:pPr indent="0" marL="0">
+              <a:buNone/>
+            </a:pPr>
+            <a:r>
+              <a:rPr lang="en-US" sz="750" dirty="0">
+                <a:solidFill>
+                  <a:srgbClr val="F59E0B"/>
+                </a:solidFill>
+                <a:latin typeface="Courier New" pitchFamily="34" charset="0"/>
+                <a:ea typeface="Courier New" pitchFamily="34" charset="-122"/>
+                <a:cs typeface="Courier New" pitchFamily="34" charset="-120"/>
+              </a:rPr>
+              <a:t>END IF;</a:t>
+            </a:r>
+            <a:endParaRPr lang="en-US" sz="750" dirty="0"/>
+          </a:p>
+        </p:txBody>
+      </p:sp>
+      <p:sp>
+        <p:nvSpPr>
+          <p:cNvPr id="14" name="Shape 12"/>
+          <p:cNvSpPr/>
+          <p:nvPr/>
+        </p:nvSpPr>
+        <p:spPr>
+          <a:xfrm>
+            <a:off x="4425696" y="1417320"/>
+            <a:ext cx="3337560" cy="4526280"/>
           </a:xfrm>
           <a:prstGeom prst="roundRect">
             <a:avLst/>
           </a:prstGeom>
           <a:solidFill>
-            <a:srgbClr val="141418"/>
+            <a:srgbClr val="151C2C"/>
           </a:solidFill>
           <a:ln w="12700">
             <a:solidFill>
-              <a:srgbClr val="F59E0B"/>
+              <a:srgbClr val="232E45"/>
             </a:solidFill>
             <a:prstDash val="solid"/>
           </a:ln>
@@ -4589,14 +5059,14 @@
       </p:sp>
       <p:sp>
         <p:nvSpPr>
-          <p:cNvPr id="12" name="Text 10"/>
-          <p:cNvSpPr/>
-          <p:nvPr/>
-        </p:nvSpPr>
-        <p:spPr>
-          <a:xfrm>
-            <a:off x="4572000" y="1691640"/>
-            <a:ext cx="2926080" cy="274320"/>
+          <p:cNvPr id="15" name="Text 13"/>
+          <p:cNvSpPr/>
+          <p:nvPr/>
+        </p:nvSpPr>
+        <p:spPr>
+          <a:xfrm>
+            <a:off x="4608576" y="1554480"/>
+            <a:ext cx="2971800" cy="228600"/>
           </a:xfrm>
           <a:prstGeom prst="rect">
             <a:avLst/>
@@ -4612,7 +5082,7 @@
               <a:buNone/>
             </a:pPr>
             <a:r>
-              <a:rPr lang="en-US" sz="1000" b="1" dirty="0">
+              <a:rPr lang="en-US" sz="850" b="1" dirty="0">
                 <a:solidFill>
                   <a:srgbClr val="F59E0B"/>
                 </a:solidFill>
@@ -4622,20 +5092,20 @@
               </a:rPr>
               <a:t>FILA: AFTER (:OLD / :NEW)</a:t>
             </a:r>
-            <a:endParaRPr lang="en-US" sz="1000" dirty="0"/>
-          </a:p>
-        </p:txBody>
-      </p:sp>
-      <p:sp>
-        <p:nvSpPr>
-          <p:cNvPr id="13" name="Text 11"/>
-          <p:cNvSpPr/>
-          <p:nvPr/>
-        </p:nvSpPr>
-        <p:spPr>
-          <a:xfrm>
-            <a:off x="4572000" y="1965960"/>
-            <a:ext cx="2926080" cy="365760"/>
+            <a:endParaRPr lang="en-US" sz="850" dirty="0"/>
+          </a:p>
+        </p:txBody>
+      </p:sp>
+      <p:sp>
+        <p:nvSpPr>
+          <p:cNvPr id="16" name="Text 14"/>
+          <p:cNvSpPr/>
+          <p:nvPr/>
+        </p:nvSpPr>
+        <p:spPr>
+          <a:xfrm>
+            <a:off x="4608576" y="1783080"/>
+            <a:ext cx="2971800" cy="320040"/>
           </a:xfrm>
           <a:prstGeom prst="rect">
             <a:avLst/>
@@ -4651,7 +5121,7 @@
               <a:buNone/>
             </a:pPr>
             <a:r>
-              <a:rPr lang="en-US" sz="1100" b="1" dirty="0">
+              <a:rPr lang="en-US" sz="950" b="1" dirty="0">
                 <a:solidFill>
                   <a:srgbClr val="FFFFFF"/>
                 </a:solidFill>
@@ -4661,20 +5131,20 @@
               </a:rPr>
               <a:t>trg_audit_sueldo_cambios</a:t>
             </a:r>
-            <a:endParaRPr lang="en-US" sz="1100" dirty="0"/>
-          </a:p>
-        </p:txBody>
-      </p:sp>
-      <p:sp>
-        <p:nvSpPr>
-          <p:cNvPr id="14" name="Text 12"/>
-          <p:cNvSpPr/>
-          <p:nvPr/>
-        </p:nvSpPr>
-        <p:spPr>
-          <a:xfrm>
-            <a:off x="4572000" y="2423160"/>
-            <a:ext cx="2926080" cy="3474720"/>
+            <a:endParaRPr lang="en-US" sz="950" dirty="0"/>
+          </a:p>
+        </p:txBody>
+      </p:sp>
+      <p:sp>
+        <p:nvSpPr>
+          <p:cNvPr id="17" name="Text 15"/>
+          <p:cNvSpPr/>
+          <p:nvPr/>
+        </p:nvSpPr>
+        <p:spPr>
+          <a:xfrm>
+            <a:off x="4608576" y="2148840"/>
+            <a:ext cx="2971800" cy="1920240"/>
           </a:xfrm>
           <a:prstGeom prst="rect">
             <a:avLst/>
@@ -4683,14 +5153,14 @@
           <a:ln/>
         </p:spPr>
         <p:txBody>
-          <a:bodyPr wrap="square" rtlCol="0" anchor="ctr"/>
-          <a:lstStyle/>
-          <a:p>
-            <a:pPr indent="0" marL="0">
-              <a:buNone/>
-            </a:pPr>
-            <a:r>
-              <a:rPr lang="en-US" sz="1000" b="1" dirty="0">
+          <a:bodyPr wrap="square" rtlCol="0" anchor="t"/>
+          <a:lstStyle/>
+          <a:p>
+            <a:pPr indent="0" marL="0">
+              <a:buNone/>
+            </a:pPr>
+            <a:r>
+              <a:rPr lang="en-US" sz="850" b="1" dirty="0">
                 <a:solidFill>
                   <a:srgbClr val="FFFFFF"/>
                 </a:solidFill>
@@ -4698,15 +5168,15 @@
                 <a:ea typeface="Arial" pitchFamily="34" charset="-122"/>
                 <a:cs typeface="Arial" pitchFamily="34" charset="-120"/>
               </a:rPr>
-              <a:t>• Momento: </a:t>
-            </a:r>
-            <a:pPr indent="0" marL="0">
-              <a:buNone/>
-            </a:pPr>
-            <a:r>
-              <a:rPr lang="en-US" sz="1000" dirty="0">
-                <a:solidFill>
-                  <a:srgbClr val="9CA3AF"/>
+              <a:t>Momento: </a:t>
+            </a:r>
+            <a:pPr indent="0" marL="0">
+              <a:buNone/>
+            </a:pPr>
+            <a:r>
+              <a:rPr lang="en-US" sz="850" dirty="0">
+                <a:solidFill>
+                  <a:srgbClr val="94A3B8"/>
                 </a:solidFill>
                 <a:latin typeface="Arial" pitchFamily="34" charset="0"/>
                 <a:ea typeface="Arial" pitchFamily="34" charset="-122"/>
@@ -4719,7 +5189,7 @@
               <a:buNone/>
             </a:pPr>
             <a:r>
-              <a:rPr lang="en-US" sz="1000" b="1" dirty="0">
+              <a:rPr lang="en-US" sz="850" b="1" dirty="0">
                 <a:solidFill>
                   <a:srgbClr val="FFFFFF"/>
                 </a:solidFill>
@@ -4727,15 +5197,15 @@
                 <a:ea typeface="Arial" pitchFamily="34" charset="-122"/>
                 <a:cs typeface="Arial" pitchFamily="34" charset="-120"/>
               </a:rPr>
-              <a:t>• Tabla: </a:t>
-            </a:r>
-            <a:pPr indent="0" marL="0">
-              <a:buNone/>
-            </a:pPr>
-            <a:r>
-              <a:rPr lang="en-US" sz="1000" dirty="0">
-                <a:solidFill>
-                  <a:srgbClr val="9CA3AF"/>
+              <a:t>Tabla Afectada: </a:t>
+            </a:r>
+            <a:pPr indent="0" marL="0">
+              <a:buNone/>
+            </a:pPr>
+            <a:r>
+              <a:rPr lang="en-US" sz="850" dirty="0">
+                <a:solidFill>
+                  <a:srgbClr val="94A3B8"/>
                 </a:solidFill>
                 <a:latin typeface="Arial" pitchFamily="34" charset="0"/>
                 <a:ea typeface="Arial" pitchFamily="34" charset="-122"/>
@@ -4748,7 +5218,7 @@
               <a:buNone/>
             </a:pPr>
             <a:r>
-              <a:rPr lang="en-US" sz="1000" b="1" dirty="0">
+              <a:rPr lang="en-US" sz="850" b="1" dirty="0">
                 <a:solidFill>
                   <a:srgbClr val="F59E0B"/>
                 </a:solidFill>
@@ -4756,107 +5226,193 @@
                 <a:ea typeface="Arial" pitchFamily="34" charset="-122"/>
                 <a:cs typeface="Arial" pitchFamily="34" charset="-120"/>
               </a:rPr>
-              <a:t>• Propósito de Negocio:
+              <a:t>Regla: </a:t>
+            </a:r>
+            <a:pPr indent="0" marL="0">
+              <a:buNone/>
+            </a:pPr>
+            <a:r>
+              <a:rPr lang="en-US" sz="850" b="1" dirty="0">
+                <a:solidFill>
+                  <a:srgbClr val="FFFFFF"/>
+                </a:solidFill>
+                <a:latin typeface="Arial" pitchFamily="34" charset="0"/>
+                <a:ea typeface="Arial" pitchFamily="34" charset="-122"/>
+                <a:cs typeface="Arial" pitchFamily="34" charset="-120"/>
+              </a:rPr>
+              <a:t>Auditoría Transaccional Estricta
 </a:t>
             </a:r>
             <a:pPr indent="0" marL="0">
               <a:buNone/>
             </a:pPr>
             <a:r>
-              <a:rPr lang="en-US" sz="1000" dirty="0">
-                <a:solidFill>
-                  <a:srgbClr val="9CA3AF"/>
-                </a:solidFill>
-                <a:latin typeface="Arial" pitchFamily="34" charset="0"/>
-                <a:ea typeface="Arial" pitchFamily="34" charset="-122"/>
-                <a:cs typeface="Arial" pitchFamily="34" charset="-120"/>
-              </a:rPr>
-              <a:t>  Auditoría transaccional estricta.
-</a:t>
-            </a:r>
-            <a:pPr indent="0" marL="0">
-              <a:buNone/>
-            </a:pPr>
-            <a:r>
-              <a:rPr lang="en-US" sz="1000" b="1" dirty="0">
+              <a:rPr lang="en-US" sz="850" dirty="0">
+                <a:solidFill>
+                  <a:srgbClr val="94A3B8"/>
+                </a:solidFill>
+                <a:latin typeface="Arial" pitchFamily="34" charset="0"/>
+                <a:ea typeface="Arial" pitchFamily="34" charset="-122"/>
+                <a:cs typeface="Arial" pitchFamily="34" charset="-120"/>
+              </a:rPr>
+              <a:t>Captura el sueldo previo (:OLD) y nuevo (:NEW). Registra delta, usuario responsable y fecha exacta en auditoría.</a:t>
+            </a:r>
+            <a:endParaRPr lang="en-US" sz="850" dirty="0"/>
+          </a:p>
+        </p:txBody>
+      </p:sp>
+      <p:sp>
+        <p:nvSpPr>
+          <p:cNvPr id="18" name="Shape 16"/>
+          <p:cNvSpPr/>
+          <p:nvPr/>
+        </p:nvSpPr>
+        <p:spPr>
+          <a:xfrm>
+            <a:off x="4608576" y="4114800"/>
+            <a:ext cx="2971800" cy="1600200"/>
+          </a:xfrm>
+          <a:prstGeom prst="roundRect">
+            <a:avLst/>
+          </a:prstGeom>
+          <a:solidFill>
+            <a:srgbClr val="080B12"/>
+          </a:solidFill>
+          <a:ln w="6350">
+            <a:solidFill>
+              <a:srgbClr val="232E45"/>
+            </a:solidFill>
+            <a:prstDash val="solid"/>
+          </a:ln>
+        </p:spPr>
+      </p:sp>
+      <p:sp>
+        <p:nvSpPr>
+          <p:cNvPr id="19" name="Text 17"/>
+          <p:cNvSpPr/>
+          <p:nvPr/>
+        </p:nvSpPr>
+        <p:spPr>
+          <a:xfrm>
+            <a:off x="4700016" y="4206240"/>
+            <a:ext cx="2788920" cy="1417320"/>
+          </a:xfrm>
+          <a:prstGeom prst="rect">
+            <a:avLst/>
+          </a:prstGeom>
+          <a:noFill/>
+          <a:ln/>
+        </p:spPr>
+        <p:txBody>
+          <a:bodyPr wrap="square" rtlCol="0" anchor="t"/>
+          <a:lstStyle/>
+          <a:p>
+            <a:pPr indent="0" marL="0">
+              <a:buNone/>
+            </a:pPr>
+            <a:r>
+              <a:rPr lang="en-US" sz="750" dirty="0">
                 <a:solidFill>
                   <a:srgbClr val="F59E0B"/>
                 </a:solidFill>
-                <a:latin typeface="Arial" pitchFamily="34" charset="0"/>
-                <a:ea typeface="Arial" pitchFamily="34" charset="-122"/>
-                <a:cs typeface="Arial" pitchFamily="34" charset="-120"/>
-              </a:rPr>
-              <a:t>• Mecanismo:
-</a:t>
-            </a:r>
-            <a:pPr indent="0" marL="0">
-              <a:buNone/>
-            </a:pPr>
-            <a:r>
-              <a:rPr lang="en-US" sz="1000" dirty="0">
-                <a:solidFill>
-                  <a:srgbClr val="9CA3AF"/>
-                </a:solidFill>
-                <a:latin typeface="Arial" pitchFamily="34" charset="0"/>
-                <a:ea typeface="Arial" pitchFamily="34" charset="-122"/>
-                <a:cs typeface="Arial" pitchFamily="34" charset="-120"/>
-              </a:rPr>
-              <a:t>  Captura con :OLD el sueldo previo y con :NEW el nuevo monto.
-</a:t>
-            </a:r>
-            <a:pPr indent="0" marL="0">
-              <a:buNone/>
-            </a:pPr>
-            <a:r>
-              <a:rPr lang="en-US" sz="1000" b="1" dirty="0">
+                <a:latin typeface="Courier New" pitchFamily="34" charset="0"/>
+                <a:ea typeface="Courier New" pitchFamily="34" charset="-122"/>
+                <a:cs typeface="Courier New" pitchFamily="34" charset="-120"/>
+              </a:rPr>
+              <a:t>INSERT INTO AUDITORIA_SUELDO_EMPLEADO</a:t>
+            </a:r>
+            <a:endParaRPr lang="en-US" sz="750" dirty="0"/>
+          </a:p>
+          <a:p>
+            <a:pPr indent="0" marL="0">
+              <a:buNone/>
+            </a:pPr>
+            <a:r>
+              <a:rPr lang="en-US" sz="750" dirty="0">
                 <a:solidFill>
                   <a:srgbClr val="F59E0B"/>
                 </a:solidFill>
-                <a:latin typeface="Arial" pitchFamily="34" charset="0"/>
-                <a:ea typeface="Arial" pitchFamily="34" charset="-122"/>
-                <a:cs typeface="Arial" pitchFamily="34" charset="-120"/>
-              </a:rPr>
-              <a:t>• Destino:
-</a:t>
-            </a:r>
-            <a:pPr indent="0" marL="0">
-              <a:buNone/>
-            </a:pPr>
-            <a:r>
-              <a:rPr lang="en-US" sz="1000" dirty="0">
-                <a:solidFill>
-                  <a:srgbClr val="9CA3AF"/>
-                </a:solidFill>
-                <a:latin typeface="Arial" pitchFamily="34" charset="0"/>
-                <a:ea typeface="Arial" pitchFamily="34" charset="-122"/>
-                <a:cs typeface="Arial" pitchFamily="34" charset="-120"/>
-              </a:rPr>
-              <a:t>  Inserta en AUDITORIA_SUELDO_EMPLEADO con fecha, usuario y variación.</a:t>
-            </a:r>
-            <a:endParaRPr lang="en-US" sz="1000" dirty="0"/>
-          </a:p>
-        </p:txBody>
-      </p:sp>
-      <p:sp>
-        <p:nvSpPr>
-          <p:cNvPr id="15" name="Shape 13"/>
-          <p:cNvSpPr/>
-          <p:nvPr/>
-        </p:nvSpPr>
-        <p:spPr>
-          <a:xfrm>
-            <a:off x="8046720" y="1463040"/>
-            <a:ext cx="3291840" cy="4572000"/>
+                <a:latin typeface="Courier New" pitchFamily="34" charset="0"/>
+                <a:ea typeface="Courier New" pitchFamily="34" charset="-122"/>
+                <a:cs typeface="Courier New" pitchFamily="34" charset="-120"/>
+              </a:rPr>
+              <a:t>(id_usuario, sueldo_antiguo, sueldo_nuevo,</a:t>
+            </a:r>
+            <a:endParaRPr lang="en-US" sz="750" dirty="0"/>
+          </a:p>
+          <a:p>
+            <a:pPr indent="0" marL="0">
+              <a:buNone/>
+            </a:pPr>
+            <a:r>
+              <a:rPr lang="en-US" sz="750" dirty="0">
+                <a:solidFill>
+                  <a:srgbClr val="F59E0B"/>
+                </a:solidFill>
+                <a:latin typeface="Courier New" pitchFamily="34" charset="0"/>
+                <a:ea typeface="Courier New" pitchFamily="34" charset="-122"/>
+                <a:cs typeface="Courier New" pitchFamily="34" charset="-120"/>
+              </a:rPr>
+              <a:t> usuario_db, fecha)</a:t>
+            </a:r>
+            <a:endParaRPr lang="en-US" sz="750" dirty="0"/>
+          </a:p>
+          <a:p>
+            <a:pPr indent="0" marL="0">
+              <a:buNone/>
+            </a:pPr>
+            <a:r>
+              <a:rPr lang="en-US" sz="750" dirty="0">
+                <a:solidFill>
+                  <a:srgbClr val="F59E0B"/>
+                </a:solidFill>
+                <a:latin typeface="Courier New" pitchFamily="34" charset="0"/>
+                <a:ea typeface="Courier New" pitchFamily="34" charset="-122"/>
+                <a:cs typeface="Courier New" pitchFamily="34" charset="-120"/>
+              </a:rPr>
+              <a:t>VALUES (:NEW.id_usuario, :OLD.sueldo_base,</a:t>
+            </a:r>
+            <a:endParaRPr lang="en-US" sz="750" dirty="0"/>
+          </a:p>
+          <a:p>
+            <a:pPr indent="0" marL="0">
+              <a:buNone/>
+            </a:pPr>
+            <a:r>
+              <a:rPr lang="en-US" sz="750" dirty="0">
+                <a:solidFill>
+                  <a:srgbClr val="F59E0B"/>
+                </a:solidFill>
+                <a:latin typeface="Courier New" pitchFamily="34" charset="0"/>
+                <a:ea typeface="Courier New" pitchFamily="34" charset="-122"/>
+                <a:cs typeface="Courier New" pitchFamily="34" charset="-120"/>
+              </a:rPr>
+              <a:t> :NEW.sueldo_base, USER, SYSDATE);</a:t>
+            </a:r>
+            <a:endParaRPr lang="en-US" sz="750" dirty="0"/>
+          </a:p>
+        </p:txBody>
+      </p:sp>
+      <p:sp>
+        <p:nvSpPr>
+          <p:cNvPr id="20" name="Shape 18"/>
+          <p:cNvSpPr/>
+          <p:nvPr/>
+        </p:nvSpPr>
+        <p:spPr>
+          <a:xfrm>
+            <a:off x="7936992" y="1417320"/>
+            <a:ext cx="3337560" cy="4526280"/>
           </a:xfrm>
           <a:prstGeom prst="roundRect">
             <a:avLst/>
           </a:prstGeom>
           <a:solidFill>
-            <a:srgbClr val="141418"/>
+            <a:srgbClr val="151C2C"/>
           </a:solidFill>
           <a:ln w="12700">
             <a:solidFill>
-              <a:srgbClr val="10B981"/>
+              <a:srgbClr val="232E45"/>
             </a:solidFill>
             <a:prstDash val="solid"/>
           </a:ln>
@@ -4864,14 +5420,14 @@
       </p:sp>
       <p:sp>
         <p:nvSpPr>
-          <p:cNvPr id="16" name="Text 14"/>
-          <p:cNvSpPr/>
-          <p:nvPr/>
-        </p:nvSpPr>
-        <p:spPr>
-          <a:xfrm>
-            <a:off x="8229600" y="1691640"/>
-            <a:ext cx="2926080" cy="274320"/>
+          <p:cNvPr id="21" name="Text 19"/>
+          <p:cNvSpPr/>
+          <p:nvPr/>
+        </p:nvSpPr>
+        <p:spPr>
+          <a:xfrm>
+            <a:off x="8119872" y="1554480"/>
+            <a:ext cx="2971800" cy="228600"/>
           </a:xfrm>
           <a:prstGeom prst="rect">
             <a:avLst/>
@@ -4887,7 +5443,7 @@
               <a:buNone/>
             </a:pPr>
             <a:r>
-              <a:rPr lang="en-US" sz="1000" b="1" dirty="0">
+              <a:rPr lang="en-US" sz="850" b="1" dirty="0">
                 <a:solidFill>
                   <a:srgbClr val="10B981"/>
                 </a:solidFill>
@@ -4895,22 +5451,22 @@
                 <a:ea typeface="Arial" pitchFamily="34" charset="-122"/>
                 <a:cs typeface="Arial" pitchFamily="34" charset="-120"/>
               </a:rPr>
-              <a:t>SENTENCIA: AFTER (SOLVENCIA)</a:t>
-            </a:r>
-            <a:endParaRPr lang="en-US" sz="1000" dirty="0"/>
-          </a:p>
-        </p:txBody>
-      </p:sp>
-      <p:sp>
-        <p:nvSpPr>
-          <p:cNvPr id="17" name="Text 15"/>
-          <p:cNvSpPr/>
-          <p:nvPr/>
-        </p:nvSpPr>
-        <p:spPr>
-          <a:xfrm>
-            <a:off x="8229600" y="1965960"/>
-            <a:ext cx="2926080" cy="365760"/>
+              <a:t>SENTENCIA: AFTER (GLOBAL)</a:t>
+            </a:r>
+            <a:endParaRPr lang="en-US" sz="850" dirty="0"/>
+          </a:p>
+        </p:txBody>
+      </p:sp>
+      <p:sp>
+        <p:nvSpPr>
+          <p:cNvPr id="22" name="Text 20"/>
+          <p:cNvSpPr/>
+          <p:nvPr/>
+        </p:nvSpPr>
+        <p:spPr>
+          <a:xfrm>
+            <a:off x="8119872" y="1783080"/>
+            <a:ext cx="2971800" cy="320040"/>
           </a:xfrm>
           <a:prstGeom prst="rect">
             <a:avLst/>
@@ -4926,7 +5482,7 @@
               <a:buNone/>
             </a:pPr>
             <a:r>
-              <a:rPr lang="en-US" sz="1050" b="1" dirty="0">
+              <a:rPr lang="en-US" sz="950" b="1" dirty="0">
                 <a:solidFill>
                   <a:srgbClr val="FFFFFF"/>
                 </a:solidFill>
@@ -4936,20 +5492,20 @@
               </a:rPr>
               <a:t>trg_valida_solvencia_sueldos</a:t>
             </a:r>
-            <a:endParaRPr lang="en-US" sz="1050" dirty="0"/>
-          </a:p>
-        </p:txBody>
-      </p:sp>
-      <p:sp>
-        <p:nvSpPr>
-          <p:cNvPr id="18" name="Text 16"/>
-          <p:cNvSpPr/>
-          <p:nvPr/>
-        </p:nvSpPr>
-        <p:spPr>
-          <a:xfrm>
-            <a:off x="8229600" y="2423160"/>
-            <a:ext cx="2926080" cy="3474720"/>
+            <a:endParaRPr lang="en-US" sz="950" dirty="0"/>
+          </a:p>
+        </p:txBody>
+      </p:sp>
+      <p:sp>
+        <p:nvSpPr>
+          <p:cNvPr id="23" name="Text 21"/>
+          <p:cNvSpPr/>
+          <p:nvPr/>
+        </p:nvSpPr>
+        <p:spPr>
+          <a:xfrm>
+            <a:off x="8119872" y="2148840"/>
+            <a:ext cx="2971800" cy="1920240"/>
           </a:xfrm>
           <a:prstGeom prst="rect">
             <a:avLst/>
@@ -4958,14 +5514,14 @@
           <a:ln/>
         </p:spPr>
         <p:txBody>
-          <a:bodyPr wrap="square" rtlCol="0" anchor="ctr"/>
-          <a:lstStyle/>
-          <a:p>
-            <a:pPr indent="0" marL="0">
-              <a:buNone/>
-            </a:pPr>
-            <a:r>
-              <a:rPr lang="en-US" sz="1000" b="1" dirty="0">
+          <a:bodyPr wrap="square" rtlCol="0" anchor="t"/>
+          <a:lstStyle/>
+          <a:p>
+            <a:pPr indent="0" marL="0">
+              <a:buNone/>
+            </a:pPr>
+            <a:r>
+              <a:rPr lang="en-US" sz="850" b="1" dirty="0">
                 <a:solidFill>
                   <a:srgbClr val="FFFFFF"/>
                 </a:solidFill>
@@ -4973,15 +5529,15 @@
                 <a:ea typeface="Arial" pitchFamily="34" charset="-122"/>
                 <a:cs typeface="Arial" pitchFamily="34" charset="-120"/>
               </a:rPr>
-              <a:t>• Momento: </a:t>
-            </a:r>
-            <a:pPr indent="0" marL="0">
-              <a:buNone/>
-            </a:pPr>
-            <a:r>
-              <a:rPr lang="en-US" sz="1000" dirty="0">
-                <a:solidFill>
-                  <a:srgbClr val="9CA3AF"/>
+              <a:t>Momento: </a:t>
+            </a:r>
+            <a:pPr indent="0" marL="0">
+              <a:buNone/>
+            </a:pPr>
+            <a:r>
+              <a:rPr lang="en-US" sz="850" dirty="0">
+                <a:solidFill>
+                  <a:srgbClr val="94A3B8"/>
                 </a:solidFill>
                 <a:latin typeface="Arial" pitchFamily="34" charset="0"/>
                 <a:ea typeface="Arial" pitchFamily="34" charset="-122"/>
@@ -4994,7 +5550,7 @@
               <a:buNone/>
             </a:pPr>
             <a:r>
-              <a:rPr lang="en-US" sz="1000" b="1" dirty="0">
+              <a:rPr lang="en-US" sz="850" b="1" dirty="0">
                 <a:solidFill>
                   <a:srgbClr val="FFFFFF"/>
                 </a:solidFill>
@@ -5002,15 +5558,15 @@
                 <a:ea typeface="Arial" pitchFamily="34" charset="-122"/>
                 <a:cs typeface="Arial" pitchFamily="34" charset="-120"/>
               </a:rPr>
-              <a:t>• Tabla: </a:t>
-            </a:r>
-            <a:pPr indent="0" marL="0">
-              <a:buNone/>
-            </a:pPr>
-            <a:r>
-              <a:rPr lang="en-US" sz="1000" dirty="0">
-                <a:solidFill>
-                  <a:srgbClr val="9CA3AF"/>
+              <a:t>Tabla Afectada: </a:t>
+            </a:r>
+            <a:pPr indent="0" marL="0">
+              <a:buNone/>
+            </a:pPr>
+            <a:r>
+              <a:rPr lang="en-US" sz="850" dirty="0">
+                <a:solidFill>
+                  <a:srgbClr val="94A3B8"/>
                 </a:solidFill>
                 <a:latin typeface="Arial" pitchFamily="34" charset="0"/>
                 <a:ea typeface="Arial" pitchFamily="34" charset="-122"/>
@@ -5023,7 +5579,7 @@
               <a:buNone/>
             </a:pPr>
             <a:r>
-              <a:rPr lang="en-US" sz="1000" b="1" dirty="0">
+              <a:rPr lang="en-US" sz="850" b="1" dirty="0">
                 <a:solidFill>
                   <a:srgbClr val="F59E0B"/>
                 </a:solidFill>
@@ -5031,54 +5587,170 @@
                 <a:ea typeface="Arial" pitchFamily="34" charset="-122"/>
                 <a:cs typeface="Arial" pitchFamily="34" charset="-120"/>
               </a:rPr>
-              <a:t>• Regla Financiera:
+              <a:t>Regla: </a:t>
+            </a:r>
+            <a:pPr indent="0" marL="0">
+              <a:buNone/>
+            </a:pPr>
+            <a:r>
+              <a:rPr lang="en-US" sz="850" b="1" dirty="0">
+                <a:solidFill>
+                  <a:srgbClr val="FFFFFF"/>
+                </a:solidFill>
+                <a:latin typeface="Arial" pitchFamily="34" charset="0"/>
+                <a:ea typeface="Arial" pitchFamily="34" charset="-122"/>
+                <a:cs typeface="Arial" pitchFamily="34" charset="-120"/>
+              </a:rPr>
+              <a:t>Control de Solvencia Financiera
 </a:t>
             </a:r>
             <a:pPr indent="0" marL="0">
               <a:buNone/>
             </a:pPr>
             <a:r>
-              <a:rPr lang="en-US" sz="1000" dirty="0">
-                <a:solidFill>
-                  <a:srgbClr val="9CA3AF"/>
-                </a:solidFill>
-                <a:latin typeface="Arial" pitchFamily="34" charset="0"/>
-                <a:ea typeface="Arial" pitchFamily="34" charset="-122"/>
-                <a:cs typeface="Arial" pitchFamily="34" charset="-120"/>
-              </a:rPr>
-              <a:t>  Las ganancias/ventas no pueden ser menores a los sueldos.
-</a:t>
-            </a:r>
-            <a:pPr indent="0" marL="0">
-              <a:buNone/>
-            </a:pPr>
-            <a:r>
-              <a:rPr lang="en-US" sz="1000" b="1" dirty="0">
-                <a:solidFill>
-                  <a:srgbClr val="10B981"/>
-                </a:solidFill>
-                <a:latin typeface="Arial" pitchFamily="34" charset="0"/>
-                <a:ea typeface="Arial" pitchFamily="34" charset="-122"/>
-                <a:cs typeface="Arial" pitchFamily="34" charset="-120"/>
-              </a:rPr>
-              <a:t>• Ventaja Técnica Clave:
-</a:t>
-            </a:r>
-            <a:pPr indent="0" marL="0">
-              <a:buNone/>
-            </a:pPr>
-            <a:r>
-              <a:rPr lang="en-US" sz="1000" dirty="0">
-                <a:solidFill>
-                  <a:srgbClr val="9CA3AF"/>
-                </a:solidFill>
-                <a:latin typeface="Arial" pitchFamily="34" charset="0"/>
-                <a:ea typeface="Arial" pitchFamily="34" charset="-122"/>
-                <a:cs typeface="Arial" pitchFamily="34" charset="-120"/>
-              </a:rPr>
-              <a:t>  Evita ORA-04091 (Mutating Table) al evaluar agregaciones totales (SUM) al finalizar la sentencia.</a:t>
-            </a:r>
-            <a:endParaRPr lang="en-US" sz="1000" dirty="0"/>
+              <a:rPr lang="en-US" sz="850" dirty="0">
+                <a:solidFill>
+                  <a:srgbClr val="94A3B8"/>
+                </a:solidFill>
+                <a:latin typeface="Arial" pitchFamily="34" charset="0"/>
+                <a:ea typeface="Arial" pitchFamily="34" charset="-122"/>
+                <a:cs typeface="Arial" pitchFamily="34" charset="-120"/>
+              </a:rPr>
+              <a:t>Compara SUM(sueldos) vs SUM(ventas). Si nómina &gt; ventas, aborta con ORA-20003. Evita tabla mutante (ORA-04091).</a:t>
+            </a:r>
+            <a:endParaRPr lang="en-US" sz="850" dirty="0"/>
+          </a:p>
+        </p:txBody>
+      </p:sp>
+      <p:sp>
+        <p:nvSpPr>
+          <p:cNvPr id="24" name="Shape 22"/>
+          <p:cNvSpPr/>
+          <p:nvPr/>
+        </p:nvSpPr>
+        <p:spPr>
+          <a:xfrm>
+            <a:off x="8119872" y="4114800"/>
+            <a:ext cx="2971800" cy="1600200"/>
+          </a:xfrm>
+          <a:prstGeom prst="roundRect">
+            <a:avLst/>
+          </a:prstGeom>
+          <a:solidFill>
+            <a:srgbClr val="080B12"/>
+          </a:solidFill>
+          <a:ln w="6350">
+            <a:solidFill>
+              <a:srgbClr val="232E45"/>
+            </a:solidFill>
+            <a:prstDash val="solid"/>
+          </a:ln>
+        </p:spPr>
+      </p:sp>
+      <p:sp>
+        <p:nvSpPr>
+          <p:cNvPr id="25" name="Text 23"/>
+          <p:cNvSpPr/>
+          <p:nvPr/>
+        </p:nvSpPr>
+        <p:spPr>
+          <a:xfrm>
+            <a:off x="8211312" y="4206240"/>
+            <a:ext cx="2788920" cy="1417320"/>
+          </a:xfrm>
+          <a:prstGeom prst="rect">
+            <a:avLst/>
+          </a:prstGeom>
+          <a:noFill/>
+          <a:ln/>
+        </p:spPr>
+        <p:txBody>
+          <a:bodyPr wrap="square" rtlCol="0" anchor="t"/>
+          <a:lstStyle/>
+          <a:p>
+            <a:pPr indent="0" marL="0">
+              <a:buNone/>
+            </a:pPr>
+            <a:r>
+              <a:rPr lang="en-US" sz="750" dirty="0">
+                <a:solidFill>
+                  <a:srgbClr val="F59E0B"/>
+                </a:solidFill>
+                <a:latin typeface="Courier New" pitchFamily="34" charset="0"/>
+                <a:ea typeface="Courier New" pitchFamily="34" charset="-122"/>
+                <a:cs typeface="Courier New" pitchFamily="34" charset="-120"/>
+              </a:rPr>
+              <a:t>SELECT SUM(sueldo_base) INTO v_nomina...</a:t>
+            </a:r>
+            <a:endParaRPr lang="en-US" sz="750" dirty="0"/>
+          </a:p>
+          <a:p>
+            <a:pPr indent="0" marL="0">
+              <a:buNone/>
+            </a:pPr>
+            <a:r>
+              <a:rPr lang="en-US" sz="750" dirty="0">
+                <a:solidFill>
+                  <a:srgbClr val="F59E0B"/>
+                </a:solidFill>
+                <a:latin typeface="Courier New" pitchFamily="34" charset="0"/>
+                <a:ea typeface="Courier New" pitchFamily="34" charset="-122"/>
+                <a:cs typeface="Courier New" pitchFamily="34" charset="-120"/>
+              </a:rPr>
+              <a:t>SELECT SUM(total_pedido) INTO v_ventas...</a:t>
+            </a:r>
+            <a:endParaRPr lang="en-US" sz="750" dirty="0"/>
+          </a:p>
+          <a:p>
+            <a:pPr indent="0" marL="0">
+              <a:buNone/>
+            </a:pPr>
+            <a:r>
+              <a:rPr lang="en-US" sz="750" dirty="0">
+                <a:solidFill>
+                  <a:srgbClr val="F59E0B"/>
+                </a:solidFill>
+                <a:latin typeface="Courier New" pitchFamily="34" charset="0"/>
+                <a:ea typeface="Courier New" pitchFamily="34" charset="-122"/>
+                <a:cs typeface="Courier New" pitchFamily="34" charset="-120"/>
+              </a:rPr>
+              <a:t>IF v_nomina &gt; v_ventas THEN</a:t>
+            </a:r>
+            <a:endParaRPr lang="en-US" sz="750" dirty="0"/>
+          </a:p>
+          <a:p>
+            <a:pPr indent="0" marL="0">
+              <a:buNone/>
+            </a:pPr>
+            <a:r>
+              <a:rPr lang="en-US" sz="750" dirty="0">
+                <a:solidFill>
+                  <a:srgbClr val="F59E0B"/>
+                </a:solidFill>
+                <a:latin typeface="Courier New" pitchFamily="34" charset="0"/>
+                <a:ea typeface="Courier New" pitchFamily="34" charset="-122"/>
+                <a:cs typeface="Courier New" pitchFamily="34" charset="-120"/>
+              </a:rPr>
+              <a:t>  RAISE_APPLICATION_ERROR(-20003, ...);</a:t>
+            </a:r>
+            <a:endParaRPr lang="en-US" sz="750" dirty="0"/>
+          </a:p>
+          <a:p>
+            <a:pPr indent="0" marL="0">
+              <a:buNone/>
+            </a:pPr>
+            <a:r>
+              <a:rPr lang="en-US" sz="750" dirty="0">
+                <a:solidFill>
+                  <a:srgbClr val="F59E0B"/>
+                </a:solidFill>
+                <a:latin typeface="Courier New" pitchFamily="34" charset="0"/>
+                <a:ea typeface="Courier New" pitchFamily="34" charset="-122"/>
+                <a:cs typeface="Courier New" pitchFamily="34" charset="-120"/>
+              </a:rPr>
+              <a:t>END IF;</a:t>
+            </a:r>
+            <a:endParaRPr lang="en-US" sz="750" dirty="0"/>
           </a:p>
         </p:txBody>
       </p:sp>
@@ -5096,7 +5768,7 @@
     <p:bg>
       <p:bgPr>
         <a:solidFill>
-          <a:srgbClr val="0B0B0D"/>
+          <a:srgbClr val="0B0F19"/>
         </a:solidFill>
       </p:bgPr>
     </p:bg>
@@ -5123,7 +5795,7 @@
         <p:spPr>
           <a:xfrm>
             <a:off x="0" y="0"/>
-            <a:ext cx="9144000" cy="91440"/>
+            <a:ext cx="12191695" cy="73152"/>
           </a:xfrm>
           <a:prstGeom prst="rect">
             <a:avLst/>
@@ -5142,8 +5814,8 @@
         </p:nvSpPr>
         <p:spPr>
           <a:xfrm>
-            <a:off x="731520" y="457200"/>
-            <a:ext cx="7315200" cy="274320"/>
+            <a:off x="914400" y="411480"/>
+            <a:ext cx="8229600" cy="228600"/>
           </a:xfrm>
           <a:prstGeom prst="rect">
             <a:avLst/>
@@ -5159,7 +5831,7 @@
               <a:buNone/>
             </a:pPr>
             <a:r>
-              <a:rPr lang="en-US" sz="1000" b="1" spc="200" kern="0" dirty="0">
+              <a:rPr lang="en-US" sz="1000" b="1" spc="150" kern="0" dirty="0">
                 <a:solidFill>
                   <a:srgbClr val="F59E0B"/>
                 </a:solidFill>
@@ -5167,7 +5839,7 @@
                 <a:ea typeface="Arial" pitchFamily="34" charset="-122"/>
                 <a:cs typeface="Arial" pitchFamily="34" charset="-120"/>
               </a:rPr>
-              <a:t>5. DEMOSTRACIÓN Y CONCLUSIÓN</a:t>
+              <a:t>5. VERIFICACIÓN Y RESULTADOS</a:t>
             </a:r>
             <a:endParaRPr lang="en-US" sz="1000" dirty="0"/>
           </a:p>
@@ -5181,8 +5853,8 @@
         </p:nvSpPr>
         <p:spPr>
           <a:xfrm>
-            <a:off x="731520" y="731520"/>
-            <a:ext cx="10515600" cy="548640"/>
+            <a:off x="914400" y="685800"/>
+            <a:ext cx="10362895" cy="411480"/>
           </a:xfrm>
           <a:prstGeom prst="rect">
             <a:avLst/>
@@ -5206,7 +5878,7 @@
                 <a:ea typeface="Arial" pitchFamily="34" charset="-122"/>
                 <a:cs typeface="Arial" pitchFamily="34" charset="-120"/>
               </a:rPr>
-              <a:t>Casos de Prueba en Oracle SQL Developer y Resultados Obtenidos</a:t>
+              <a:t>Casos de Prueba en Oracle SQL Developer y Conclusión</a:t>
             </a:r>
             <a:endParaRPr lang="en-US" sz="2200" dirty="0"/>
           </a:p>
@@ -5214,14 +5886,37 @@
       </p:sp>
       <p:sp>
         <p:nvSpPr>
-          <p:cNvPr id="5" name="Text 3"/>
-          <p:cNvSpPr/>
-          <p:nvPr/>
-        </p:nvSpPr>
-        <p:spPr>
-          <a:xfrm>
-            <a:off x="731520" y="6400800"/>
-            <a:ext cx="7315200" cy="274320"/>
+          <p:cNvPr id="5" name="Shape 3"/>
+          <p:cNvSpPr/>
+          <p:nvPr/>
+        </p:nvSpPr>
+        <p:spPr>
+          <a:xfrm>
+            <a:off x="914400" y="1188720"/>
+            <a:ext cx="10362895" cy="0"/>
+          </a:xfrm>
+          <a:prstGeom prst="line">
+            <a:avLst/>
+          </a:prstGeom>
+          <a:noFill/>
+          <a:ln w="12700">
+            <a:solidFill>
+              <a:srgbClr val="232E45"/>
+            </a:solidFill>
+            <a:prstDash val="solid"/>
+          </a:ln>
+        </p:spPr>
+      </p:sp>
+      <p:sp>
+        <p:nvSpPr>
+          <p:cNvPr id="6" name="Text 4"/>
+          <p:cNvSpPr/>
+          <p:nvPr/>
+        </p:nvSpPr>
+        <p:spPr>
+          <a:xfrm>
+            <a:off x="914400" y="6263640"/>
+            <a:ext cx="6858000" cy="274320"/>
           </a:xfrm>
           <a:prstGeom prst="rect">
             <a:avLst/>
@@ -5239,13 +5934,13 @@
             <a:r>
               <a:rPr lang="en-US" sz="900" dirty="0">
                 <a:solidFill>
-                  <a:srgbClr val="9CA3AF"/>
-                </a:solidFill>
-                <a:latin typeface="Arial" pitchFamily="34" charset="0"/>
-                <a:ea typeface="Arial" pitchFamily="34" charset="-122"/>
-                <a:cs typeface="Arial" pitchFamily="34" charset="-120"/>
-              </a:rPr>
-              <a:t>Taller de Base de Datos (BDY1103) | Caso Estilo Urbano | Duoc UC</a:t>
+                  <a:srgbClr val="94A3B8"/>
+                </a:solidFill>
+                <a:latin typeface="Arial" pitchFamily="34" charset="0"/>
+                <a:ea typeface="Arial" pitchFamily="34" charset="-122"/>
+                <a:cs typeface="Arial" pitchFamily="34" charset="-120"/>
+              </a:rPr>
+              <a:t>Taller de Base de Datos (BDY1103) • Caso: Estilo Urbano • Duoc UC</a:t>
             </a:r>
             <a:endParaRPr lang="en-US" sz="900" dirty="0"/>
           </a:p>
@@ -5253,14 +5948,14 @@
       </p:sp>
       <p:sp>
         <p:nvSpPr>
-          <p:cNvPr id="6" name="Text 4"/>
-          <p:cNvSpPr/>
-          <p:nvPr/>
-        </p:nvSpPr>
-        <p:spPr>
-          <a:xfrm>
-            <a:off x="9144000" y="6400800"/>
-            <a:ext cx="2286000" cy="274320"/>
+          <p:cNvPr id="7" name="Text 5"/>
+          <p:cNvSpPr/>
+          <p:nvPr/>
+        </p:nvSpPr>
+        <p:spPr>
+          <a:xfrm>
+            <a:off x="8046720" y="6263640"/>
+            <a:ext cx="3230575" cy="274320"/>
           </a:xfrm>
           <a:prstGeom prst="rect">
             <a:avLst/>
@@ -5276,7 +5971,7 @@
               <a:buNone/>
             </a:pPr>
             <a:r>
-              <a:rPr lang="en-US" sz="900" dirty="0">
+              <a:rPr lang="en-US" sz="900" b="1" dirty="0">
                 <a:solidFill>
                   <a:srgbClr val="F59E0B"/>
                 </a:solidFill>
@@ -5284,7 +5979,7 @@
                 <a:ea typeface="Arial" pitchFamily="34" charset="-122"/>
                 <a:cs typeface="Arial" pitchFamily="34" charset="-120"/>
               </a:rPr>
-              <a:t>EP2 - 60% Ponderación</a:t>
+              <a:t>Evaluación Parcial N° 2 (60%)</a:t>
             </a:r>
             <a:endParaRPr lang="en-US" sz="900" dirty="0"/>
           </a:p>
@@ -5305,20 +6000,20 @@
           </p:nvPr>
         </p:nvGraphicFramePr>
         <p:xfrm>
-          <a:off x="731520" y="1463040"/>
-          <a:ext cx="10607040" cy="2926080"/>
+          <a:off x="914400" y="1417320"/>
+          <a:ext cx="10362895" cy="2423160"/>
         </p:xfrm>
         <a:graphic>
           <a:graphicData uri="http://schemas.openxmlformats.org/drawingml/2006/table">
             <a:tbl>
               <a:tblPr/>
               <a:tblGrid>
-                <a:gridCol w="2011680"/>
-                <a:gridCol w="3474720"/>
-                <a:gridCol w="3657600"/>
-                <a:gridCol w="1463040"/>
+                <a:gridCol w="1920240"/>
+                <a:gridCol w="3931920"/>
+                <a:gridCol w="3200400"/>
+                <a:gridCol w="1310335"/>
               </a:tblGrid>
-              <a:tr h="487680">
+              <a:tr h="403860">
                 <a:tc>
                   <a:txBody>
                     <a:bodyPr/>
@@ -5328,20 +6023,27 @@
                         <a:buNone/>
                       </a:pPr>
                       <a:r>
-                        <a:rPr lang="en-US" sz="950" dirty="0">
+                        <a:rPr lang="en-US" sz="850" b="1" dirty="0">
                           <a:solidFill>
-                            <a:srgbClr val="FFFFFF"/>
+                            <a:srgbClr val="F59E0B"/>
                           </a:solidFill>
+                          <a:latin typeface="Arial" pitchFamily="34" charset="0"/>
+                          <a:ea typeface="Arial" pitchFamily="34" charset="-122"/>
+                          <a:cs typeface="Arial" pitchFamily="34" charset="-120"/>
                         </a:rPr>
-                        <a:t>Caso de Prueba</a:t>
+                        <a:t>Caso de Negocio Evaluado</a:t>
                       </a:r>
-                      <a:endParaRPr lang="en-US" sz="950" dirty="0"/>
+                      <a:endParaRPr lang="en-US" sz="850" dirty="0">
+                        <a:latin typeface="Arial" charset="0"/>
+                        <a:ea typeface="Arial" charset="0"/>
+                        <a:cs typeface="Arial" charset="0"/>
+                      </a:endParaRPr>
                     </a:p>
                   </a:txBody>
                   <a:tcPr marL="91440" marR="91440" marT="45720" marB="45720" anchor="ctr">
                     <a:lnL w="12700" cap="flat" cmpd="sng" algn="ctr">
                       <a:solidFill>
-                        <a:srgbClr val="27272A"/>
+                        <a:srgbClr val="232E45"/>
                       </a:solidFill>
                       <a:prstDash val="solid"/>
                       <a:round/>
@@ -5350,7 +6052,7 @@
                     </a:lnL>
                     <a:lnR w="12700" cap="flat" cmpd="sng" algn="ctr">
                       <a:solidFill>
-                        <a:srgbClr val="27272A"/>
+                        <a:srgbClr val="232E45"/>
                       </a:solidFill>
                       <a:prstDash val="solid"/>
                       <a:round/>
@@ -5359,7 +6061,7 @@
                     </a:lnR>
                     <a:lnT w="12700" cap="flat" cmpd="sng" algn="ctr">
                       <a:solidFill>
-                        <a:srgbClr val="27272A"/>
+                        <a:srgbClr val="232E45"/>
                       </a:solidFill>
                       <a:prstDash val="solid"/>
                       <a:round/>
@@ -5368,7 +6070,7 @@
                     </a:lnT>
                     <a:lnB w="12700" cap="flat" cmpd="sng" algn="ctr">
                       <a:solidFill>
-                        <a:srgbClr val="27272A"/>
+                        <a:srgbClr val="232E45"/>
                       </a:solidFill>
                       <a:prstDash val="solid"/>
                       <a:round/>
@@ -5376,7 +6078,7 @@
                       <a:tailEnd type="none" w="med" len="med"/>
                     </a:lnB>
                     <a:solidFill>
-                      <a:srgbClr val="141418"/>
+                      <a:srgbClr val="1B253B"/>
                     </a:solidFill>
                   </a:tcPr>
                 </a:tc>
@@ -5389,20 +6091,27 @@
                         <a:buNone/>
                       </a:pPr>
                       <a:r>
-                        <a:rPr lang="en-US" sz="950" dirty="0">
+                        <a:rPr lang="en-US" sz="850" b="1" dirty="0">
                           <a:solidFill>
-                            <a:srgbClr val="FFFFFF"/>
+                            <a:srgbClr val="F59E0B"/>
                           </a:solidFill>
+                          <a:latin typeface="Arial" pitchFamily="34" charset="0"/>
+                          <a:ea typeface="Arial" pitchFamily="34" charset="-122"/>
+                          <a:cs typeface="Arial" pitchFamily="34" charset="-120"/>
                         </a:rPr>
-                        <a:t>Comando Ejecutado</a:t>
+                        <a:t>Sentencia SQL Probada en Oracle</a:t>
                       </a:r>
-                      <a:endParaRPr lang="en-US" sz="950" dirty="0"/>
+                      <a:endParaRPr lang="en-US" sz="850" dirty="0">
+                        <a:latin typeface="Arial" charset="0"/>
+                        <a:ea typeface="Arial" charset="0"/>
+                        <a:cs typeface="Arial" charset="0"/>
+                      </a:endParaRPr>
                     </a:p>
                   </a:txBody>
                   <a:tcPr marL="91440" marR="91440" marT="45720" marB="45720" anchor="ctr">
                     <a:lnL w="12700" cap="flat" cmpd="sng" algn="ctr">
                       <a:solidFill>
-                        <a:srgbClr val="27272A"/>
+                        <a:srgbClr val="232E45"/>
                       </a:solidFill>
                       <a:prstDash val="solid"/>
                       <a:round/>
@@ -5411,7 +6120,7 @@
                     </a:lnL>
                     <a:lnR w="12700" cap="flat" cmpd="sng" algn="ctr">
                       <a:solidFill>
-                        <a:srgbClr val="27272A"/>
+                        <a:srgbClr val="232E45"/>
                       </a:solidFill>
                       <a:prstDash val="solid"/>
                       <a:round/>
@@ -5420,7 +6129,7 @@
                     </a:lnR>
                     <a:lnT w="12700" cap="flat" cmpd="sng" algn="ctr">
                       <a:solidFill>
-                        <a:srgbClr val="27272A"/>
+                        <a:srgbClr val="232E45"/>
                       </a:solidFill>
                       <a:prstDash val="solid"/>
                       <a:round/>
@@ -5429,7 +6138,7 @@
                     </a:lnT>
                     <a:lnB w="12700" cap="flat" cmpd="sng" algn="ctr">
                       <a:solidFill>
-                        <a:srgbClr val="27272A"/>
+                        <a:srgbClr val="232E45"/>
                       </a:solidFill>
                       <a:prstDash val="solid"/>
                       <a:round/>
@@ -5437,7 +6146,7 @@
                       <a:tailEnd type="none" w="med" len="med"/>
                     </a:lnB>
                     <a:solidFill>
-                      <a:srgbClr val="141418"/>
+                      <a:srgbClr val="1B253B"/>
                     </a:solidFill>
                   </a:tcPr>
                 </a:tc>
@@ -5450,20 +6159,27 @@
                         <a:buNone/>
                       </a:pPr>
                       <a:r>
-                        <a:rPr lang="en-US" sz="950" dirty="0">
+                        <a:rPr lang="en-US" sz="850" b="1" dirty="0">
                           <a:solidFill>
-                            <a:srgbClr val="FFFFFF"/>
+                            <a:srgbClr val="F59E0B"/>
                           </a:solidFill>
+                          <a:latin typeface="Arial" pitchFamily="34" charset="0"/>
+                          <a:ea typeface="Arial" pitchFamily="34" charset="-122"/>
+                          <a:cs typeface="Arial" pitchFamily="34" charset="-120"/>
                         </a:rPr>
-                        <a:t>Efecto del Trigger / Package</a:t>
+                        <a:t>Mecanismo PL/SQL Activado</a:t>
                       </a:r>
-                      <a:endParaRPr lang="en-US" sz="950" dirty="0"/>
+                      <a:endParaRPr lang="en-US" sz="850" dirty="0">
+                        <a:latin typeface="Arial" charset="0"/>
+                        <a:ea typeface="Arial" charset="0"/>
+                        <a:cs typeface="Arial" charset="0"/>
+                      </a:endParaRPr>
                     </a:p>
                   </a:txBody>
                   <a:tcPr marL="91440" marR="91440" marT="45720" marB="45720" anchor="ctr">
                     <a:lnL w="12700" cap="flat" cmpd="sng" algn="ctr">
                       <a:solidFill>
-                        <a:srgbClr val="27272A"/>
+                        <a:srgbClr val="232E45"/>
                       </a:solidFill>
                       <a:prstDash val="solid"/>
                       <a:round/>
@@ -5472,7 +6188,7 @@
                     </a:lnL>
                     <a:lnR w="12700" cap="flat" cmpd="sng" algn="ctr">
                       <a:solidFill>
-                        <a:srgbClr val="27272A"/>
+                        <a:srgbClr val="232E45"/>
                       </a:solidFill>
                       <a:prstDash val="solid"/>
                       <a:round/>
@@ -5481,7 +6197,7 @@
                     </a:lnR>
                     <a:lnT w="12700" cap="flat" cmpd="sng" algn="ctr">
                       <a:solidFill>
-                        <a:srgbClr val="27272A"/>
+                        <a:srgbClr val="232E45"/>
                       </a:solidFill>
                       <a:prstDash val="solid"/>
                       <a:round/>
@@ -5490,7 +6206,7 @@
                     </a:lnT>
                     <a:lnB w="12700" cap="flat" cmpd="sng" algn="ctr">
                       <a:solidFill>
-                        <a:srgbClr val="27272A"/>
+                        <a:srgbClr val="232E45"/>
                       </a:solidFill>
                       <a:prstDash val="solid"/>
                       <a:round/>
@@ -5498,7 +6214,7 @@
                       <a:tailEnd type="none" w="med" len="med"/>
                     </a:lnB>
                     <a:solidFill>
-                      <a:srgbClr val="141418"/>
+                      <a:srgbClr val="1B253B"/>
                     </a:solidFill>
                   </a:tcPr>
                 </a:tc>
@@ -5511,20 +6227,27 @@
                         <a:buNone/>
                       </a:pPr>
                       <a:r>
-                        <a:rPr lang="en-US" sz="950" dirty="0">
+                        <a:rPr lang="en-US" sz="850" b="1" dirty="0">
                           <a:solidFill>
-                            <a:srgbClr val="FFFFFF"/>
+                            <a:srgbClr val="F59E0B"/>
                           </a:solidFill>
+                          <a:latin typeface="Arial" pitchFamily="34" charset="0"/>
+                          <a:ea typeface="Arial" pitchFamily="34" charset="-122"/>
+                          <a:cs typeface="Arial" pitchFamily="34" charset="-120"/>
                         </a:rPr>
-                        <a:t>Resultado</a:t>
+                        <a:t>Resultado Obtenido</a:t>
                       </a:r>
-                      <a:endParaRPr lang="en-US" sz="950" dirty="0"/>
+                      <a:endParaRPr lang="en-US" sz="850" dirty="0">
+                        <a:latin typeface="Arial" charset="0"/>
+                        <a:ea typeface="Arial" charset="0"/>
+                        <a:cs typeface="Arial" charset="0"/>
+                      </a:endParaRPr>
                     </a:p>
                   </a:txBody>
                   <a:tcPr marL="91440" marR="91440" marT="45720" marB="45720" anchor="ctr">
                     <a:lnL w="12700" cap="flat" cmpd="sng" algn="ctr">
                       <a:solidFill>
-                        <a:srgbClr val="27272A"/>
+                        <a:srgbClr val="232E45"/>
                       </a:solidFill>
                       <a:prstDash val="solid"/>
                       <a:round/>
@@ -5533,7 +6256,7 @@
                     </a:lnL>
                     <a:lnR w="12700" cap="flat" cmpd="sng" algn="ctr">
                       <a:solidFill>
-                        <a:srgbClr val="27272A"/>
+                        <a:srgbClr val="232E45"/>
                       </a:solidFill>
                       <a:prstDash val="solid"/>
                       <a:round/>
@@ -5542,7 +6265,7 @@
                     </a:lnR>
                     <a:lnT w="12700" cap="flat" cmpd="sng" algn="ctr">
                       <a:solidFill>
-                        <a:srgbClr val="27272A"/>
+                        <a:srgbClr val="232E45"/>
                       </a:solidFill>
                       <a:prstDash val="solid"/>
                       <a:round/>
@@ -5551,7 +6274,7 @@
                     </a:lnT>
                     <a:lnB w="12700" cap="flat" cmpd="sng" algn="ctr">
                       <a:solidFill>
-                        <a:srgbClr val="27272A"/>
+                        <a:srgbClr val="232E45"/>
                       </a:solidFill>
                       <a:prstDash val="solid"/>
                       <a:round/>
@@ -5559,12 +6282,12 @@
                       <a:tailEnd type="none" w="med" len="med"/>
                     </a:lnB>
                     <a:solidFill>
-                      <a:srgbClr val="141418"/>
+                      <a:srgbClr val="1B253B"/>
                     </a:solidFill>
                   </a:tcPr>
                 </a:tc>
               </a:tr>
-              <a:tr h="487680">
+              <a:tr h="403860">
                 <a:tc>
                   <a:txBody>
                     <a:bodyPr/>
@@ -5574,20 +6297,27 @@
                         <a:buNone/>
                       </a:pPr>
                       <a:r>
-                        <a:rPr lang="en-US" sz="950" dirty="0">
+                        <a:rPr lang="en-US" sz="850" dirty="0">
                           <a:solidFill>
                             <a:srgbClr val="FFFFFF"/>
                           </a:solidFill>
+                          <a:latin typeface="Arial" pitchFamily="34" charset="0"/>
+                          <a:ea typeface="Arial" pitchFamily="34" charset="-122"/>
+                          <a:cs typeface="Arial" pitchFamily="34" charset="-120"/>
                         </a:rPr>
-                        <a:t>1. Auditoría Sueldo</a:t>
+                        <a:t>1. Auditoría Salarial</a:t>
                       </a:r>
-                      <a:endParaRPr lang="en-US" sz="950" dirty="0"/>
+                      <a:endParaRPr lang="en-US" sz="850" dirty="0">
+                        <a:latin typeface="Arial" charset="0"/>
+                        <a:ea typeface="Arial" charset="0"/>
+                        <a:cs typeface="Arial" charset="0"/>
+                      </a:endParaRPr>
                     </a:p>
                   </a:txBody>
                   <a:tcPr marL="91440" marR="91440" marT="45720" marB="45720" anchor="ctr">
                     <a:lnL w="12700" cap="flat" cmpd="sng" algn="ctr">
                       <a:solidFill>
-                        <a:srgbClr val="27272A"/>
+                        <a:srgbClr val="232E45"/>
                       </a:solidFill>
                       <a:prstDash val="solid"/>
                       <a:round/>
@@ -5596,7 +6326,7 @@
                     </a:lnL>
                     <a:lnR w="12700" cap="flat" cmpd="sng" algn="ctr">
                       <a:solidFill>
-                        <a:srgbClr val="27272A"/>
+                        <a:srgbClr val="232E45"/>
                       </a:solidFill>
                       <a:prstDash val="solid"/>
                       <a:round/>
@@ -5605,7 +6335,7 @@
                     </a:lnR>
                     <a:lnT w="12700" cap="flat" cmpd="sng" algn="ctr">
                       <a:solidFill>
-                        <a:srgbClr val="27272A"/>
+                        <a:srgbClr val="232E45"/>
                       </a:solidFill>
                       <a:prstDash val="solid"/>
                       <a:round/>
@@ -5614,7 +6344,7 @@
                     </a:lnT>
                     <a:lnB w="12700" cap="flat" cmpd="sng" algn="ctr">
                       <a:solidFill>
-                        <a:srgbClr val="27272A"/>
+                        <a:srgbClr val="232E45"/>
                       </a:solidFill>
                       <a:prstDash val="solid"/>
                       <a:round/>
@@ -5622,7 +6352,7 @@
                       <a:tailEnd type="none" w="med" len="med"/>
                     </a:lnB>
                     <a:solidFill>
-                      <a:srgbClr val="141418"/>
+                      <a:srgbClr val="151C2C"/>
                     </a:solidFill>
                   </a:tcPr>
                 </a:tc>
@@ -5635,20 +6365,27 @@
                         <a:buNone/>
                       </a:pPr>
                       <a:r>
-                        <a:rPr lang="en-US" sz="950" dirty="0">
+                        <a:rPr lang="en-US" sz="850" dirty="0">
                           <a:solidFill>
-                            <a:srgbClr val="FFFFFF"/>
+                            <a:srgbClr val="94A3B8"/>
                           </a:solidFill>
+                          <a:latin typeface="Courier New" pitchFamily="34" charset="0"/>
+                          <a:ea typeface="Courier New" pitchFamily="34" charset="-122"/>
+                          <a:cs typeface="Courier New" pitchFamily="34" charset="-120"/>
                         </a:rPr>
-                        <a:t>UPDATE USUARIO SET sueldo_base = 750000...</a:t>
+                        <a:t>UPDATE USUARIO SET sueldo_base = 750000 WHERE id_usuario = 2;</a:t>
                       </a:r>
-                      <a:endParaRPr lang="en-US" sz="950" dirty="0"/>
+                      <a:endParaRPr lang="en-US" sz="850" dirty="0">
+                        <a:latin typeface="Courier New" charset="0"/>
+                        <a:ea typeface="Courier New" charset="0"/>
+                        <a:cs typeface="Courier New" charset="0"/>
+                      </a:endParaRPr>
                     </a:p>
                   </a:txBody>
                   <a:tcPr marL="91440" marR="91440" marT="45720" marB="45720" anchor="ctr">
                     <a:lnL w="12700" cap="flat" cmpd="sng" algn="ctr">
                       <a:solidFill>
-                        <a:srgbClr val="27272A"/>
+                        <a:srgbClr val="232E45"/>
                       </a:solidFill>
                       <a:prstDash val="solid"/>
                       <a:round/>
@@ -5657,7 +6394,7 @@
                     </a:lnL>
                     <a:lnR w="12700" cap="flat" cmpd="sng" algn="ctr">
                       <a:solidFill>
-                        <a:srgbClr val="27272A"/>
+                        <a:srgbClr val="232E45"/>
                       </a:solidFill>
                       <a:prstDash val="solid"/>
                       <a:round/>
@@ -5666,7 +6403,7 @@
                     </a:lnR>
                     <a:lnT w="12700" cap="flat" cmpd="sng" algn="ctr">
                       <a:solidFill>
-                        <a:srgbClr val="27272A"/>
+                        <a:srgbClr val="232E45"/>
                       </a:solidFill>
                       <a:prstDash val="solid"/>
                       <a:round/>
@@ -5675,7 +6412,7 @@
                     </a:lnT>
                     <a:lnB w="12700" cap="flat" cmpd="sng" algn="ctr">
                       <a:solidFill>
-                        <a:srgbClr val="27272A"/>
+                        <a:srgbClr val="232E45"/>
                       </a:solidFill>
                       <a:prstDash val="solid"/>
                       <a:round/>
@@ -5683,7 +6420,7 @@
                       <a:tailEnd type="none" w="med" len="med"/>
                     </a:lnB>
                     <a:solidFill>
-                      <a:srgbClr val="141418"/>
+                      <a:srgbClr val="151C2C"/>
                     </a:solidFill>
                   </a:tcPr>
                 </a:tc>
@@ -5696,20 +6433,27 @@
                         <a:buNone/>
                       </a:pPr>
                       <a:r>
-                        <a:rPr lang="en-US" sz="950" dirty="0">
+                        <a:rPr lang="en-US" sz="850" dirty="0">
                           <a:solidFill>
                             <a:srgbClr val="FFFFFF"/>
                           </a:solidFill>
+                          <a:latin typeface="Arial" pitchFamily="34" charset="0"/>
+                          <a:ea typeface="Arial" pitchFamily="34" charset="-122"/>
+                          <a:cs typeface="Arial" pitchFamily="34" charset="-120"/>
                         </a:rPr>
-                        <a:t>Trigger AFTER registra :OLD=$650k, :NEW=$750k</a:t>
+                        <a:t>Trigger AFTER registra :OLD=$650k, :NEW=$750k en auditoría</a:t>
                       </a:r>
-                      <a:endParaRPr lang="en-US" sz="950" dirty="0"/>
+                      <a:endParaRPr lang="en-US" sz="850" dirty="0">
+                        <a:latin typeface="Arial" charset="0"/>
+                        <a:ea typeface="Arial" charset="0"/>
+                        <a:cs typeface="Arial" charset="0"/>
+                      </a:endParaRPr>
                     </a:p>
                   </a:txBody>
                   <a:tcPr marL="91440" marR="91440" marT="45720" marB="45720" anchor="ctr">
                     <a:lnL w="12700" cap="flat" cmpd="sng" algn="ctr">
                       <a:solidFill>
-                        <a:srgbClr val="27272A"/>
+                        <a:srgbClr val="232E45"/>
                       </a:solidFill>
                       <a:prstDash val="solid"/>
                       <a:round/>
@@ -5718,7 +6462,7 @@
                     </a:lnL>
                     <a:lnR w="12700" cap="flat" cmpd="sng" algn="ctr">
                       <a:solidFill>
-                        <a:srgbClr val="27272A"/>
+                        <a:srgbClr val="232E45"/>
                       </a:solidFill>
                       <a:prstDash val="solid"/>
                       <a:round/>
@@ -5727,7 +6471,7 @@
                     </a:lnR>
                     <a:lnT w="12700" cap="flat" cmpd="sng" algn="ctr">
                       <a:solidFill>
-                        <a:srgbClr val="27272A"/>
+                        <a:srgbClr val="232E45"/>
                       </a:solidFill>
                       <a:prstDash val="solid"/>
                       <a:round/>
@@ -5736,7 +6480,7 @@
                     </a:lnT>
                     <a:lnB w="12700" cap="flat" cmpd="sng" algn="ctr">
                       <a:solidFill>
-                        <a:srgbClr val="27272A"/>
+                        <a:srgbClr val="232E45"/>
                       </a:solidFill>
                       <a:prstDash val="solid"/>
                       <a:round/>
@@ -5744,7 +6488,7 @@
                       <a:tailEnd type="none" w="med" len="med"/>
                     </a:lnB>
                     <a:solidFill>
-                      <a:srgbClr val="141418"/>
+                      <a:srgbClr val="151C2C"/>
                     </a:solidFill>
                   </a:tcPr>
                 </a:tc>
@@ -5757,20 +6501,27 @@
                         <a:buNone/>
                       </a:pPr>
                       <a:r>
-                        <a:rPr lang="en-US" sz="950" dirty="0">
+                        <a:rPr lang="en-US" sz="850" b="1" dirty="0">
                           <a:solidFill>
-                            <a:srgbClr val="FFFFFF"/>
+                            <a:srgbClr val="10B981"/>
                           </a:solidFill>
+                          <a:latin typeface="Arial" pitchFamily="34" charset="0"/>
+                          <a:ea typeface="Arial" pitchFamily="34" charset="-122"/>
+                          <a:cs typeface="Arial" pitchFamily="34" charset="-120"/>
                         </a:rPr>
                         <a:t>OK: Auditado</a:t>
                       </a:r>
-                      <a:endParaRPr lang="en-US" sz="950" dirty="0"/>
+                      <a:endParaRPr lang="en-US" sz="850" dirty="0">
+                        <a:latin typeface="Arial" charset="0"/>
+                        <a:ea typeface="Arial" charset="0"/>
+                        <a:cs typeface="Arial" charset="0"/>
+                      </a:endParaRPr>
                     </a:p>
                   </a:txBody>
                   <a:tcPr marL="91440" marR="91440" marT="45720" marB="45720" anchor="ctr">
                     <a:lnL w="12700" cap="flat" cmpd="sng" algn="ctr">
                       <a:solidFill>
-                        <a:srgbClr val="27272A"/>
+                        <a:srgbClr val="232E45"/>
                       </a:solidFill>
                       <a:prstDash val="solid"/>
                       <a:round/>
@@ -5779,7 +6530,7 @@
                     </a:lnL>
                     <a:lnR w="12700" cap="flat" cmpd="sng" algn="ctr">
                       <a:solidFill>
-                        <a:srgbClr val="27272A"/>
+                        <a:srgbClr val="232E45"/>
                       </a:solidFill>
                       <a:prstDash val="solid"/>
                       <a:round/>
@@ -5788,7 +6539,7 @@
                     </a:lnR>
                     <a:lnT w="12700" cap="flat" cmpd="sng" algn="ctr">
                       <a:solidFill>
-                        <a:srgbClr val="27272A"/>
+                        <a:srgbClr val="232E45"/>
                       </a:solidFill>
                       <a:prstDash val="solid"/>
                       <a:round/>
@@ -5797,7 +6548,7 @@
                     </a:lnT>
                     <a:lnB w="12700" cap="flat" cmpd="sng" algn="ctr">
                       <a:solidFill>
-                        <a:srgbClr val="27272A"/>
+                        <a:srgbClr val="232E45"/>
                       </a:solidFill>
                       <a:prstDash val="solid"/>
                       <a:round/>
@@ -5805,12 +6556,12 @@
                       <a:tailEnd type="none" w="med" len="med"/>
                     </a:lnB>
                     <a:solidFill>
-                      <a:srgbClr val="141418"/>
+                      <a:srgbClr val="151C2C"/>
                     </a:solidFill>
                   </a:tcPr>
                 </a:tc>
               </a:tr>
-              <a:tr h="487680">
+              <a:tr h="403860">
                 <a:tc>
                   <a:txBody>
                     <a:bodyPr/>
@@ -5820,20 +6571,27 @@
                         <a:buNone/>
                       </a:pPr>
                       <a:r>
-                        <a:rPr lang="en-US" sz="950" dirty="0">
+                        <a:rPr lang="en-US" sz="850" dirty="0">
                           <a:solidFill>
                             <a:srgbClr val="FFFFFF"/>
                           </a:solidFill>
+                          <a:latin typeface="Arial" pitchFamily="34" charset="0"/>
+                          <a:ea typeface="Arial" pitchFamily="34" charset="-122"/>
+                          <a:cs typeface="Arial" pitchFamily="34" charset="-120"/>
                         </a:rPr>
-                        <a:t>2. Sueldo Mínimo</a:t>
+                        <a:t>2. Sueldo Mínimo Legal</a:t>
                       </a:r>
-                      <a:endParaRPr lang="en-US" sz="950" dirty="0"/>
+                      <a:endParaRPr lang="en-US" sz="850" dirty="0">
+                        <a:latin typeface="Arial" charset="0"/>
+                        <a:ea typeface="Arial" charset="0"/>
+                        <a:cs typeface="Arial" charset="0"/>
+                      </a:endParaRPr>
                     </a:p>
                   </a:txBody>
                   <a:tcPr marL="91440" marR="91440" marT="45720" marB="45720" anchor="ctr">
                     <a:lnL w="12700" cap="flat" cmpd="sng" algn="ctr">
                       <a:solidFill>
-                        <a:srgbClr val="27272A"/>
+                        <a:srgbClr val="232E45"/>
                       </a:solidFill>
                       <a:prstDash val="solid"/>
                       <a:round/>
@@ -5842,7 +6600,7 @@
                     </a:lnL>
                     <a:lnR w="12700" cap="flat" cmpd="sng" algn="ctr">
                       <a:solidFill>
-                        <a:srgbClr val="27272A"/>
+                        <a:srgbClr val="232E45"/>
                       </a:solidFill>
                       <a:prstDash val="solid"/>
                       <a:round/>
@@ -5851,7 +6609,7 @@
                     </a:lnR>
                     <a:lnT w="12700" cap="flat" cmpd="sng" algn="ctr">
                       <a:solidFill>
-                        <a:srgbClr val="27272A"/>
+                        <a:srgbClr val="232E45"/>
                       </a:solidFill>
                       <a:prstDash val="solid"/>
                       <a:round/>
@@ -5860,7 +6618,7 @@
                     </a:lnT>
                     <a:lnB w="12700" cap="flat" cmpd="sng" algn="ctr">
                       <a:solidFill>
-                        <a:srgbClr val="27272A"/>
+                        <a:srgbClr val="232E45"/>
                       </a:solidFill>
                       <a:prstDash val="solid"/>
                       <a:round/>
@@ -5868,7 +6626,7 @@
                       <a:tailEnd type="none" w="med" len="med"/>
                     </a:lnB>
                     <a:solidFill>
-                      <a:srgbClr val="141418"/>
+                      <a:srgbClr val="151C2C"/>
                     </a:solidFill>
                   </a:tcPr>
                 </a:tc>
@@ -5881,20 +6639,27 @@
                         <a:buNone/>
                       </a:pPr>
                       <a:r>
-                        <a:rPr lang="en-US" sz="950" dirty="0">
+                        <a:rPr lang="en-US" sz="850" dirty="0">
                           <a:solidFill>
-                            <a:srgbClr val="FFFFFF"/>
+                            <a:srgbClr val="94A3B8"/>
                           </a:solidFill>
+                          <a:latin typeface="Courier New" pitchFamily="34" charset="0"/>
+                          <a:ea typeface="Courier New" pitchFamily="34" charset="-122"/>
+                          <a:cs typeface="Courier New" pitchFamily="34" charset="-120"/>
                         </a:rPr>
-                        <a:t>UPDATE USUARIO SET sueldo_base = 350000...</a:t>
+                        <a:t>UPDATE USUARIO SET sueldo_base = 350000 WHERE id_usuario = 2;</a:t>
                       </a:r>
-                      <a:endParaRPr lang="en-US" sz="950" dirty="0"/>
+                      <a:endParaRPr lang="en-US" sz="850" dirty="0">
+                        <a:latin typeface="Courier New" charset="0"/>
+                        <a:ea typeface="Courier New" charset="0"/>
+                        <a:cs typeface="Courier New" charset="0"/>
+                      </a:endParaRPr>
                     </a:p>
                   </a:txBody>
                   <a:tcPr marL="91440" marR="91440" marT="45720" marB="45720" anchor="ctr">
                     <a:lnL w="12700" cap="flat" cmpd="sng" algn="ctr">
                       <a:solidFill>
-                        <a:srgbClr val="27272A"/>
+                        <a:srgbClr val="232E45"/>
                       </a:solidFill>
                       <a:prstDash val="solid"/>
                       <a:round/>
@@ -5903,7 +6668,7 @@
                     </a:lnL>
                     <a:lnR w="12700" cap="flat" cmpd="sng" algn="ctr">
                       <a:solidFill>
-                        <a:srgbClr val="27272A"/>
+                        <a:srgbClr val="232E45"/>
                       </a:solidFill>
                       <a:prstDash val="solid"/>
                       <a:round/>
@@ -5912,7 +6677,7 @@
                     </a:lnR>
                     <a:lnT w="12700" cap="flat" cmpd="sng" algn="ctr">
                       <a:solidFill>
-                        <a:srgbClr val="27272A"/>
+                        <a:srgbClr val="232E45"/>
                       </a:solidFill>
                       <a:prstDash val="solid"/>
                       <a:round/>
@@ -5921,7 +6686,7 @@
                     </a:lnT>
                     <a:lnB w="12700" cap="flat" cmpd="sng" algn="ctr">
                       <a:solidFill>
-                        <a:srgbClr val="27272A"/>
+                        <a:srgbClr val="232E45"/>
                       </a:solidFill>
                       <a:prstDash val="solid"/>
                       <a:round/>
@@ -5929,7 +6694,7 @@
                       <a:tailEnd type="none" w="med" len="med"/>
                     </a:lnB>
                     <a:solidFill>
-                      <a:srgbClr val="141418"/>
+                      <a:srgbClr val="151C2C"/>
                     </a:solidFill>
                   </a:tcPr>
                 </a:tc>
@@ -5942,20 +6707,27 @@
                         <a:buNone/>
                       </a:pPr>
                       <a:r>
-                        <a:rPr lang="en-US" sz="950" dirty="0">
+                        <a:rPr lang="en-US" sz="850" dirty="0">
                           <a:solidFill>
                             <a:srgbClr val="FFFFFF"/>
                           </a:solidFill>
+                          <a:latin typeface="Arial" pitchFamily="34" charset="0"/>
+                          <a:ea typeface="Arial" pitchFamily="34" charset="-122"/>
+                          <a:cs typeface="Arial" pitchFamily="34" charset="-120"/>
                         </a:rPr>
-                        <a:t>Trigger BEFORE bloquea sueldo &lt; $500.000</a:t>
+                        <a:t>Trigger BEFORE intercepta y bloquea sueldo &lt; $500.000</a:t>
                       </a:r>
-                      <a:endParaRPr lang="en-US" sz="950" dirty="0"/>
+                      <a:endParaRPr lang="en-US" sz="850" dirty="0">
+                        <a:latin typeface="Arial" charset="0"/>
+                        <a:ea typeface="Arial" charset="0"/>
+                        <a:cs typeface="Arial" charset="0"/>
+                      </a:endParaRPr>
                     </a:p>
                   </a:txBody>
                   <a:tcPr marL="91440" marR="91440" marT="45720" marB="45720" anchor="ctr">
                     <a:lnL w="12700" cap="flat" cmpd="sng" algn="ctr">
                       <a:solidFill>
-                        <a:srgbClr val="27272A"/>
+                        <a:srgbClr val="232E45"/>
                       </a:solidFill>
                       <a:prstDash val="solid"/>
                       <a:round/>
@@ -5964,7 +6736,7 @@
                     </a:lnL>
                     <a:lnR w="12700" cap="flat" cmpd="sng" algn="ctr">
                       <a:solidFill>
-                        <a:srgbClr val="27272A"/>
+                        <a:srgbClr val="232E45"/>
                       </a:solidFill>
                       <a:prstDash val="solid"/>
                       <a:round/>
@@ -5973,7 +6745,7 @@
                     </a:lnR>
                     <a:lnT w="12700" cap="flat" cmpd="sng" algn="ctr">
                       <a:solidFill>
-                        <a:srgbClr val="27272A"/>
+                        <a:srgbClr val="232E45"/>
                       </a:solidFill>
                       <a:prstDash val="solid"/>
                       <a:round/>
@@ -5982,7 +6754,7 @@
                     </a:lnT>
                     <a:lnB w="12700" cap="flat" cmpd="sng" algn="ctr">
                       <a:solidFill>
-                        <a:srgbClr val="27272A"/>
+                        <a:srgbClr val="232E45"/>
                       </a:solidFill>
                       <a:prstDash val="solid"/>
                       <a:round/>
@@ -5990,7 +6762,7 @@
                       <a:tailEnd type="none" w="med" len="med"/>
                     </a:lnB>
                     <a:solidFill>
-                      <a:srgbClr val="141418"/>
+                      <a:srgbClr val="151C2C"/>
                     </a:solidFill>
                   </a:tcPr>
                 </a:tc>
@@ -6003,20 +6775,27 @@
                         <a:buNone/>
                       </a:pPr>
                       <a:r>
-                        <a:rPr lang="en-US" sz="950" dirty="0">
+                        <a:rPr lang="en-US" sz="850" b="1" dirty="0">
                           <a:solidFill>
-                            <a:srgbClr val="FFFFFF"/>
+                            <a:srgbClr val="EF4444"/>
                           </a:solidFill>
+                          <a:latin typeface="Arial" pitchFamily="34" charset="0"/>
+                          <a:ea typeface="Arial" pitchFamily="34" charset="-122"/>
+                          <a:cs typeface="Arial" pitchFamily="34" charset="-120"/>
                         </a:rPr>
                         <a:t>ORA-20001</a:t>
                       </a:r>
-                      <a:endParaRPr lang="en-US" sz="950" dirty="0"/>
+                      <a:endParaRPr lang="en-US" sz="850" dirty="0">
+                        <a:latin typeface="Arial" charset="0"/>
+                        <a:ea typeface="Arial" charset="0"/>
+                        <a:cs typeface="Arial" charset="0"/>
+                      </a:endParaRPr>
                     </a:p>
                   </a:txBody>
                   <a:tcPr marL="91440" marR="91440" marT="45720" marB="45720" anchor="ctr">
                     <a:lnL w="12700" cap="flat" cmpd="sng" algn="ctr">
                       <a:solidFill>
-                        <a:srgbClr val="27272A"/>
+                        <a:srgbClr val="232E45"/>
                       </a:solidFill>
                       <a:prstDash val="solid"/>
                       <a:round/>
@@ -6025,7 +6804,7 @@
                     </a:lnL>
                     <a:lnR w="12700" cap="flat" cmpd="sng" algn="ctr">
                       <a:solidFill>
-                        <a:srgbClr val="27272A"/>
+                        <a:srgbClr val="232E45"/>
                       </a:solidFill>
                       <a:prstDash val="solid"/>
                       <a:round/>
@@ -6034,7 +6813,7 @@
                     </a:lnR>
                     <a:lnT w="12700" cap="flat" cmpd="sng" algn="ctr">
                       <a:solidFill>
-                        <a:srgbClr val="27272A"/>
+                        <a:srgbClr val="232E45"/>
                       </a:solidFill>
                       <a:prstDash val="solid"/>
                       <a:round/>
@@ -6043,7 +6822,7 @@
                     </a:lnT>
                     <a:lnB w="12700" cap="flat" cmpd="sng" algn="ctr">
                       <a:solidFill>
-                        <a:srgbClr val="27272A"/>
+                        <a:srgbClr val="232E45"/>
                       </a:solidFill>
                       <a:prstDash val="solid"/>
                       <a:round/>
@@ -6051,12 +6830,12 @@
                       <a:tailEnd type="none" w="med" len="med"/>
                     </a:lnB>
                     <a:solidFill>
-                      <a:srgbClr val="141418"/>
+                      <a:srgbClr val="151C2C"/>
                     </a:solidFill>
                   </a:tcPr>
                 </a:tc>
               </a:tr>
-              <a:tr h="487680">
+              <a:tr h="403860">
                 <a:tc>
                   <a:txBody>
                     <a:bodyPr/>
@@ -6066,20 +6845,27 @@
                         <a:buNone/>
                       </a:pPr>
                       <a:r>
-                        <a:rPr lang="en-US" sz="950" dirty="0">
+                        <a:rPr lang="en-US" sz="850" dirty="0">
                           <a:solidFill>
                             <a:srgbClr val="FFFFFF"/>
                           </a:solidFill>
+                          <a:latin typeface="Arial" pitchFamily="34" charset="0"/>
+                          <a:ea typeface="Arial" pitchFamily="34" charset="-122"/>
+                          <a:cs typeface="Arial" pitchFamily="34" charset="-120"/>
                         </a:rPr>
                         <a:t>3. Solvencia Financiera</a:t>
                       </a:r>
-                      <a:endParaRPr lang="en-US" sz="950" dirty="0"/>
+                      <a:endParaRPr lang="en-US" sz="850" dirty="0">
+                        <a:latin typeface="Arial" charset="0"/>
+                        <a:ea typeface="Arial" charset="0"/>
+                        <a:cs typeface="Arial" charset="0"/>
+                      </a:endParaRPr>
                     </a:p>
                   </a:txBody>
                   <a:tcPr marL="91440" marR="91440" marT="45720" marB="45720" anchor="ctr">
                     <a:lnL w="12700" cap="flat" cmpd="sng" algn="ctr">
                       <a:solidFill>
-                        <a:srgbClr val="27272A"/>
+                        <a:srgbClr val="232E45"/>
                       </a:solidFill>
                       <a:prstDash val="solid"/>
                       <a:round/>
@@ -6088,7 +6874,7 @@
                     </a:lnL>
                     <a:lnR w="12700" cap="flat" cmpd="sng" algn="ctr">
                       <a:solidFill>
-                        <a:srgbClr val="27272A"/>
+                        <a:srgbClr val="232E45"/>
                       </a:solidFill>
                       <a:prstDash val="solid"/>
                       <a:round/>
@@ -6097,7 +6883,7 @@
                     </a:lnR>
                     <a:lnT w="12700" cap="flat" cmpd="sng" algn="ctr">
                       <a:solidFill>
-                        <a:srgbClr val="27272A"/>
+                        <a:srgbClr val="232E45"/>
                       </a:solidFill>
                       <a:prstDash val="solid"/>
                       <a:round/>
@@ -6106,7 +6892,7 @@
                     </a:lnT>
                     <a:lnB w="12700" cap="flat" cmpd="sng" algn="ctr">
                       <a:solidFill>
-                        <a:srgbClr val="27272A"/>
+                        <a:srgbClr val="232E45"/>
                       </a:solidFill>
                       <a:prstDash val="solid"/>
                       <a:round/>
@@ -6114,7 +6900,7 @@
                       <a:tailEnd type="none" w="med" len="med"/>
                     </a:lnB>
                     <a:solidFill>
-                      <a:srgbClr val="141418"/>
+                      <a:srgbClr val="151C2C"/>
                     </a:solidFill>
                   </a:tcPr>
                 </a:tc>
@@ -6127,20 +6913,27 @@
                         <a:buNone/>
                       </a:pPr>
                       <a:r>
-                        <a:rPr lang="en-US" sz="950" dirty="0">
+                        <a:rPr lang="en-US" sz="850" dirty="0">
                           <a:solidFill>
-                            <a:srgbClr val="FFFFFF"/>
+                            <a:srgbClr val="94A3B8"/>
                           </a:solidFill>
+                          <a:latin typeface="Courier New" pitchFamily="34" charset="0"/>
+                          <a:ea typeface="Courier New" pitchFamily="34" charset="-122"/>
+                          <a:cs typeface="Courier New" pitchFamily="34" charset="-120"/>
                         </a:rPr>
-                        <a:t>UPDATE USUARIO SET sueldo_base = 15000000...</a:t>
+                        <a:t>UPDATE USUARIO SET sueldo_base = 15000000 WHERE id_usuario = 2;</a:t>
                       </a:r>
-                      <a:endParaRPr lang="en-US" sz="950" dirty="0"/>
+                      <a:endParaRPr lang="en-US" sz="850" dirty="0">
+                        <a:latin typeface="Courier New" charset="0"/>
+                        <a:ea typeface="Courier New" charset="0"/>
+                        <a:cs typeface="Courier New" charset="0"/>
+                      </a:endParaRPr>
                     </a:p>
                   </a:txBody>
                   <a:tcPr marL="91440" marR="91440" marT="45720" marB="45720" anchor="ctr">
                     <a:lnL w="12700" cap="flat" cmpd="sng" algn="ctr">
                       <a:solidFill>
-                        <a:srgbClr val="27272A"/>
+                        <a:srgbClr val="232E45"/>
                       </a:solidFill>
                       <a:prstDash val="solid"/>
                       <a:round/>
@@ -6149,7 +6942,7 @@
                     </a:lnL>
                     <a:lnR w="12700" cap="flat" cmpd="sng" algn="ctr">
                       <a:solidFill>
-                        <a:srgbClr val="27272A"/>
+                        <a:srgbClr val="232E45"/>
                       </a:solidFill>
                       <a:prstDash val="solid"/>
                       <a:round/>
@@ -6158,7 +6951,7 @@
                     </a:lnR>
                     <a:lnT w="12700" cap="flat" cmpd="sng" algn="ctr">
                       <a:solidFill>
-                        <a:srgbClr val="27272A"/>
+                        <a:srgbClr val="232E45"/>
                       </a:solidFill>
                       <a:prstDash val="solid"/>
                       <a:round/>
@@ -6167,7 +6960,7 @@
                     </a:lnT>
                     <a:lnB w="12700" cap="flat" cmpd="sng" algn="ctr">
                       <a:solidFill>
-                        <a:srgbClr val="27272A"/>
+                        <a:srgbClr val="232E45"/>
                       </a:solidFill>
                       <a:prstDash val="solid"/>
                       <a:round/>
@@ -6175,7 +6968,7 @@
                       <a:tailEnd type="none" w="med" len="med"/>
                     </a:lnB>
                     <a:solidFill>
-                      <a:srgbClr val="141418"/>
+                      <a:srgbClr val="151C2C"/>
                     </a:solidFill>
                   </a:tcPr>
                 </a:tc>
@@ -6188,20 +6981,27 @@
                         <a:buNone/>
                       </a:pPr>
                       <a:r>
-                        <a:rPr lang="en-US" sz="950" dirty="0">
+                        <a:rPr lang="en-US" sz="850" dirty="0">
                           <a:solidFill>
                             <a:srgbClr val="FFFFFF"/>
                           </a:solidFill>
+                          <a:latin typeface="Arial" pitchFamily="34" charset="0"/>
+                          <a:ea typeface="Arial" pitchFamily="34" charset="-122"/>
+                          <a:cs typeface="Arial" pitchFamily="34" charset="-120"/>
                         </a:rPr>
-                        <a:t>Trigger Sentencia frena nómina &gt; ventas</a:t>
+                        <a:t>Trigger Sentencia frena transacción (Nómina &gt; Ventas)</a:t>
                       </a:r>
-                      <a:endParaRPr lang="en-US" sz="950" dirty="0"/>
+                      <a:endParaRPr lang="en-US" sz="850" dirty="0">
+                        <a:latin typeface="Arial" charset="0"/>
+                        <a:ea typeface="Arial" charset="0"/>
+                        <a:cs typeface="Arial" charset="0"/>
+                      </a:endParaRPr>
                     </a:p>
                   </a:txBody>
                   <a:tcPr marL="91440" marR="91440" marT="45720" marB="45720" anchor="ctr">
                     <a:lnL w="12700" cap="flat" cmpd="sng" algn="ctr">
                       <a:solidFill>
-                        <a:srgbClr val="27272A"/>
+                        <a:srgbClr val="232E45"/>
                       </a:solidFill>
                       <a:prstDash val="solid"/>
                       <a:round/>
@@ -6210,7 +7010,7 @@
                     </a:lnL>
                     <a:lnR w="12700" cap="flat" cmpd="sng" algn="ctr">
                       <a:solidFill>
-                        <a:srgbClr val="27272A"/>
+                        <a:srgbClr val="232E45"/>
                       </a:solidFill>
                       <a:prstDash val="solid"/>
                       <a:round/>
@@ -6219,7 +7019,7 @@
                     </a:lnR>
                     <a:lnT w="12700" cap="flat" cmpd="sng" algn="ctr">
                       <a:solidFill>
-                        <a:srgbClr val="27272A"/>
+                        <a:srgbClr val="232E45"/>
                       </a:solidFill>
                       <a:prstDash val="solid"/>
                       <a:round/>
@@ -6228,7 +7028,7 @@
                     </a:lnT>
                     <a:lnB w="12700" cap="flat" cmpd="sng" algn="ctr">
                       <a:solidFill>
-                        <a:srgbClr val="27272A"/>
+                        <a:srgbClr val="232E45"/>
                       </a:solidFill>
                       <a:prstDash val="solid"/>
                       <a:round/>
@@ -6236,7 +7036,7 @@
                       <a:tailEnd type="none" w="med" len="med"/>
                     </a:lnB>
                     <a:solidFill>
-                      <a:srgbClr val="141418"/>
+                      <a:srgbClr val="151C2C"/>
                     </a:solidFill>
                   </a:tcPr>
                 </a:tc>
@@ -6249,20 +7049,27 @@
                         <a:buNone/>
                       </a:pPr>
                       <a:r>
-                        <a:rPr lang="en-US" sz="950" dirty="0">
+                        <a:rPr lang="en-US" sz="850" b="1" dirty="0">
                           <a:solidFill>
-                            <a:srgbClr val="FFFFFF"/>
+                            <a:srgbClr val="EF4444"/>
                           </a:solidFill>
+                          <a:latin typeface="Arial" pitchFamily="34" charset="0"/>
+                          <a:ea typeface="Arial" pitchFamily="34" charset="-122"/>
+                          <a:cs typeface="Arial" pitchFamily="34" charset="-120"/>
                         </a:rPr>
                         <a:t>ORA-20003</a:t>
                       </a:r>
-                      <a:endParaRPr lang="en-US" sz="950" dirty="0"/>
+                      <a:endParaRPr lang="en-US" sz="850" dirty="0">
+                        <a:latin typeface="Arial" charset="0"/>
+                        <a:ea typeface="Arial" charset="0"/>
+                        <a:cs typeface="Arial" charset="0"/>
+                      </a:endParaRPr>
                     </a:p>
                   </a:txBody>
                   <a:tcPr marL="91440" marR="91440" marT="45720" marB="45720" anchor="ctr">
                     <a:lnL w="12700" cap="flat" cmpd="sng" algn="ctr">
                       <a:solidFill>
-                        <a:srgbClr val="27272A"/>
+                        <a:srgbClr val="232E45"/>
                       </a:solidFill>
                       <a:prstDash val="solid"/>
                       <a:round/>
@@ -6271,7 +7078,7 @@
                     </a:lnL>
                     <a:lnR w="12700" cap="flat" cmpd="sng" algn="ctr">
                       <a:solidFill>
-                        <a:srgbClr val="27272A"/>
+                        <a:srgbClr val="232E45"/>
                       </a:solidFill>
                       <a:prstDash val="solid"/>
                       <a:round/>
@@ -6280,7 +7087,7 @@
                     </a:lnR>
                     <a:lnT w="12700" cap="flat" cmpd="sng" algn="ctr">
                       <a:solidFill>
-                        <a:srgbClr val="27272A"/>
+                        <a:srgbClr val="232E45"/>
                       </a:solidFill>
                       <a:prstDash val="solid"/>
                       <a:round/>
@@ -6289,7 +7096,7 @@
                     </a:lnT>
                     <a:lnB w="12700" cap="flat" cmpd="sng" algn="ctr">
                       <a:solidFill>
-                        <a:srgbClr val="27272A"/>
+                        <a:srgbClr val="232E45"/>
                       </a:solidFill>
                       <a:prstDash val="solid"/>
                       <a:round/>
@@ -6297,12 +7104,12 @@
                       <a:tailEnd type="none" w="med" len="med"/>
                     </a:lnB>
                     <a:solidFill>
-                      <a:srgbClr val="141418"/>
+                      <a:srgbClr val="151C2C"/>
                     </a:solidFill>
                   </a:tcPr>
                 </a:tc>
               </a:tr>
-              <a:tr h="487680">
+              <a:tr h="403860">
                 <a:tc>
                   <a:txBody>
                     <a:bodyPr/>
@@ -6312,20 +7119,27 @@
                         <a:buNone/>
                       </a:pPr>
                       <a:r>
-                        <a:rPr lang="en-US" sz="950" dirty="0">
+                        <a:rPr lang="en-US" sz="850" dirty="0">
                           <a:solidFill>
                             <a:srgbClr val="FFFFFF"/>
                           </a:solidFill>
+                          <a:latin typeface="Arial" pitchFamily="34" charset="0"/>
+                          <a:ea typeface="Arial" pitchFamily="34" charset="-122"/>
+                          <a:cs typeface="Arial" pitchFamily="34" charset="-120"/>
                         </a:rPr>
-                        <a:t>4. Tracking Pedido</a:t>
+                        <a:t>4. Trazabilidad de Envíos</a:t>
                       </a:r>
-                      <a:endParaRPr lang="en-US" sz="950" dirty="0"/>
+                      <a:endParaRPr lang="en-US" sz="850" dirty="0">
+                        <a:latin typeface="Arial" charset="0"/>
+                        <a:ea typeface="Arial" charset="0"/>
+                        <a:cs typeface="Arial" charset="0"/>
+                      </a:endParaRPr>
                     </a:p>
                   </a:txBody>
                   <a:tcPr marL="91440" marR="91440" marT="45720" marB="45720" anchor="ctr">
                     <a:lnL w="12700" cap="flat" cmpd="sng" algn="ctr">
                       <a:solidFill>
-                        <a:srgbClr val="27272A"/>
+                        <a:srgbClr val="232E45"/>
                       </a:solidFill>
                       <a:prstDash val="solid"/>
                       <a:round/>
@@ -6334,7 +7148,7 @@
                     </a:lnL>
                     <a:lnR w="12700" cap="flat" cmpd="sng" algn="ctr">
                       <a:solidFill>
-                        <a:srgbClr val="27272A"/>
+                        <a:srgbClr val="232E45"/>
                       </a:solidFill>
                       <a:prstDash val="solid"/>
                       <a:round/>
@@ -6343,7 +7157,7 @@
                     </a:lnR>
                     <a:lnT w="12700" cap="flat" cmpd="sng" algn="ctr">
                       <a:solidFill>
-                        <a:srgbClr val="27272A"/>
+                        <a:srgbClr val="232E45"/>
                       </a:solidFill>
                       <a:prstDash val="solid"/>
                       <a:round/>
@@ -6352,7 +7166,7 @@
                     </a:lnT>
                     <a:lnB w="12700" cap="flat" cmpd="sng" algn="ctr">
                       <a:solidFill>
-                        <a:srgbClr val="27272A"/>
+                        <a:srgbClr val="232E45"/>
                       </a:solidFill>
                       <a:prstDash val="solid"/>
                       <a:round/>
@@ -6360,7 +7174,7 @@
                       <a:tailEnd type="none" w="med" len="med"/>
                     </a:lnB>
                     <a:solidFill>
-                      <a:srgbClr val="141418"/>
+                      <a:srgbClr val="151C2C"/>
                     </a:solidFill>
                   </a:tcPr>
                 </a:tc>
@@ -6373,20 +7187,27 @@
                         <a:buNone/>
                       </a:pPr>
                       <a:r>
-                        <a:rPr lang="en-US" sz="950" dirty="0">
+                        <a:rPr lang="en-US" sz="850" dirty="0">
                           <a:solidFill>
-                            <a:srgbClr val="FFFFFF"/>
+                            <a:srgbClr val="94A3B8"/>
                           </a:solidFill>
+                          <a:latin typeface="Courier New" pitchFamily="34" charset="0"/>
+                          <a:ea typeface="Courier New" pitchFamily="34" charset="-122"/>
+                          <a:cs typeface="Courier New" pitchFamily="34" charset="-120"/>
                         </a:rPr>
-                        <a:t>UPDATE PEDIDO SET id_estado = 4...</a:t>
+                        <a:t>UPDATE PEDIDO SET id_estado = 4 WHERE id_pedido = 1;</a:t>
                       </a:r>
-                      <a:endParaRPr lang="en-US" sz="950" dirty="0"/>
+                      <a:endParaRPr lang="en-US" sz="850" dirty="0">
+                        <a:latin typeface="Courier New" charset="0"/>
+                        <a:ea typeface="Courier New" charset="0"/>
+                        <a:cs typeface="Courier New" charset="0"/>
+                      </a:endParaRPr>
                     </a:p>
                   </a:txBody>
                   <a:tcPr marL="91440" marR="91440" marT="45720" marB="45720" anchor="ctr">
                     <a:lnL w="12700" cap="flat" cmpd="sng" algn="ctr">
                       <a:solidFill>
-                        <a:srgbClr val="27272A"/>
+                        <a:srgbClr val="232E45"/>
                       </a:solidFill>
                       <a:prstDash val="solid"/>
                       <a:round/>
@@ -6395,7 +7216,7 @@
                     </a:lnL>
                     <a:lnR w="12700" cap="flat" cmpd="sng" algn="ctr">
                       <a:solidFill>
-                        <a:srgbClr val="27272A"/>
+                        <a:srgbClr val="232E45"/>
                       </a:solidFill>
                       <a:prstDash val="solid"/>
                       <a:round/>
@@ -6404,7 +7225,7 @@
                     </a:lnR>
                     <a:lnT w="12700" cap="flat" cmpd="sng" algn="ctr">
                       <a:solidFill>
-                        <a:srgbClr val="27272A"/>
+                        <a:srgbClr val="232E45"/>
                       </a:solidFill>
                       <a:prstDash val="solid"/>
                       <a:round/>
@@ -6413,7 +7234,7 @@
                     </a:lnT>
                     <a:lnB w="12700" cap="flat" cmpd="sng" algn="ctr">
                       <a:solidFill>
-                        <a:srgbClr val="27272A"/>
+                        <a:srgbClr val="232E45"/>
                       </a:solidFill>
                       <a:prstDash val="solid"/>
                       <a:round/>
@@ -6421,7 +7242,7 @@
                       <a:tailEnd type="none" w="med" len="med"/>
                     </a:lnB>
                     <a:solidFill>
-                      <a:srgbClr val="141418"/>
+                      <a:srgbClr val="151C2C"/>
                     </a:solidFill>
                   </a:tcPr>
                 </a:tc>
@@ -6434,20 +7255,27 @@
                         <a:buNone/>
                       </a:pPr>
                       <a:r>
-                        <a:rPr lang="en-US" sz="950" dirty="0">
+                        <a:rPr lang="en-US" sz="850" dirty="0">
                           <a:solidFill>
                             <a:srgbClr val="FFFFFF"/>
                           </a:solidFill>
+                          <a:latin typeface="Arial" pitchFamily="34" charset="0"/>
+                          <a:ea typeface="Arial" pitchFamily="34" charset="-122"/>
+                          <a:cs typeface="Arial" pitchFamily="34" charset="-120"/>
                         </a:rPr>
-                        <a:t>Trigger AFTER puebla HISTORIAL_TRACKING</a:t>
+                        <a:t>Trigger AFTER puebla HISTORIAL_TRACKING_PEDIDO en tiempo real</a:t>
                       </a:r>
-                      <a:endParaRPr lang="en-US" sz="950" dirty="0"/>
+                      <a:endParaRPr lang="en-US" sz="850" dirty="0">
+                        <a:latin typeface="Arial" charset="0"/>
+                        <a:ea typeface="Arial" charset="0"/>
+                        <a:cs typeface="Arial" charset="0"/>
+                      </a:endParaRPr>
                     </a:p>
                   </a:txBody>
                   <a:tcPr marL="91440" marR="91440" marT="45720" marB="45720" anchor="ctr">
                     <a:lnL w="12700" cap="flat" cmpd="sng" algn="ctr">
                       <a:solidFill>
-                        <a:srgbClr val="27272A"/>
+                        <a:srgbClr val="232E45"/>
                       </a:solidFill>
                       <a:prstDash val="solid"/>
                       <a:round/>
@@ -6456,7 +7284,7 @@
                     </a:lnL>
                     <a:lnR w="12700" cap="flat" cmpd="sng" algn="ctr">
                       <a:solidFill>
-                        <a:srgbClr val="27272A"/>
+                        <a:srgbClr val="232E45"/>
                       </a:solidFill>
                       <a:prstDash val="solid"/>
                       <a:round/>
@@ -6465,7 +7293,7 @@
                     </a:lnR>
                     <a:lnT w="12700" cap="flat" cmpd="sng" algn="ctr">
                       <a:solidFill>
-                        <a:srgbClr val="27272A"/>
+                        <a:srgbClr val="232E45"/>
                       </a:solidFill>
                       <a:prstDash val="solid"/>
                       <a:round/>
@@ -6474,7 +7302,7 @@
                     </a:lnT>
                     <a:lnB w="12700" cap="flat" cmpd="sng" algn="ctr">
                       <a:solidFill>
-                        <a:srgbClr val="27272A"/>
+                        <a:srgbClr val="232E45"/>
                       </a:solidFill>
                       <a:prstDash val="solid"/>
                       <a:round/>
@@ -6482,7 +7310,7 @@
                       <a:tailEnd type="none" w="med" len="med"/>
                     </a:lnB>
                     <a:solidFill>
-                      <a:srgbClr val="141418"/>
+                      <a:srgbClr val="151C2C"/>
                     </a:solidFill>
                   </a:tcPr>
                 </a:tc>
@@ -6495,20 +7323,27 @@
                         <a:buNone/>
                       </a:pPr>
                       <a:r>
-                        <a:rPr lang="en-US" sz="950" dirty="0">
+                        <a:rPr lang="en-US" sz="850" b="1" dirty="0">
                           <a:solidFill>
-                            <a:srgbClr val="FFFFFF"/>
+                            <a:srgbClr val="10B981"/>
                           </a:solidFill>
+                          <a:latin typeface="Arial" pitchFamily="34" charset="0"/>
+                          <a:ea typeface="Arial" pitchFamily="34" charset="-122"/>
+                          <a:cs typeface="Arial" pitchFamily="34" charset="-120"/>
                         </a:rPr>
                         <a:t>OK: Tracking</a:t>
                       </a:r>
-                      <a:endParaRPr lang="en-US" sz="950" dirty="0"/>
+                      <a:endParaRPr lang="en-US" sz="850" dirty="0">
+                        <a:latin typeface="Arial" charset="0"/>
+                        <a:ea typeface="Arial" charset="0"/>
+                        <a:cs typeface="Arial" charset="0"/>
+                      </a:endParaRPr>
                     </a:p>
                   </a:txBody>
                   <a:tcPr marL="91440" marR="91440" marT="45720" marB="45720" anchor="ctr">
                     <a:lnL w="12700" cap="flat" cmpd="sng" algn="ctr">
                       <a:solidFill>
-                        <a:srgbClr val="27272A"/>
+                        <a:srgbClr val="232E45"/>
                       </a:solidFill>
                       <a:prstDash val="solid"/>
                       <a:round/>
@@ -6517,7 +7352,7 @@
                     </a:lnL>
                     <a:lnR w="12700" cap="flat" cmpd="sng" algn="ctr">
                       <a:solidFill>
-                        <a:srgbClr val="27272A"/>
+                        <a:srgbClr val="232E45"/>
                       </a:solidFill>
                       <a:prstDash val="solid"/>
                       <a:round/>
@@ -6526,7 +7361,7 @@
                     </a:lnR>
                     <a:lnT w="12700" cap="flat" cmpd="sng" algn="ctr">
                       <a:solidFill>
-                        <a:srgbClr val="27272A"/>
+                        <a:srgbClr val="232E45"/>
                       </a:solidFill>
                       <a:prstDash val="solid"/>
                       <a:round/>
@@ -6535,7 +7370,7 @@
                     </a:lnT>
                     <a:lnB w="12700" cap="flat" cmpd="sng" algn="ctr">
                       <a:solidFill>
-                        <a:srgbClr val="27272A"/>
+                        <a:srgbClr val="232E45"/>
                       </a:solidFill>
                       <a:prstDash val="solid"/>
                       <a:round/>
@@ -6543,12 +7378,12 @@
                       <a:tailEnd type="none" w="med" len="med"/>
                     </a:lnB>
                     <a:solidFill>
-                      <a:srgbClr val="141418"/>
+                      <a:srgbClr val="151C2C"/>
                     </a:solidFill>
                   </a:tcPr>
                 </a:tc>
               </a:tr>
-              <a:tr h="487680">
+              <a:tr h="403860">
                 <a:tc>
                   <a:txBody>
                     <a:bodyPr/>
@@ -6558,20 +7393,27 @@
                         <a:buNone/>
                       </a:pPr>
                       <a:r>
-                        <a:rPr lang="en-US" sz="950" dirty="0">
+                        <a:rPr lang="en-US" sz="850" dirty="0">
                           <a:solidFill>
                             <a:srgbClr val="FFFFFF"/>
                           </a:solidFill>
+                          <a:latin typeface="Arial" pitchFamily="34" charset="0"/>
+                          <a:ea typeface="Arial" pitchFamily="34" charset="-122"/>
+                          <a:cs typeface="Arial" pitchFamily="34" charset="-120"/>
                         </a:rPr>
-                        <a:t>5. Reajuste Masivo</a:t>
+                        <a:t>5. Reajuste Inflacionario</a:t>
                       </a:r>
-                      <a:endParaRPr lang="en-US" sz="950" dirty="0"/>
+                      <a:endParaRPr lang="en-US" sz="850" dirty="0">
+                        <a:latin typeface="Arial" charset="0"/>
+                        <a:ea typeface="Arial" charset="0"/>
+                        <a:cs typeface="Arial" charset="0"/>
+                      </a:endParaRPr>
                     </a:p>
                   </a:txBody>
                   <a:tcPr marL="91440" marR="91440" marT="45720" marB="45720" anchor="ctr">
                     <a:lnL w="12700" cap="flat" cmpd="sng" algn="ctr">
                       <a:solidFill>
-                        <a:srgbClr val="27272A"/>
+                        <a:srgbClr val="232E45"/>
                       </a:solidFill>
                       <a:prstDash val="solid"/>
                       <a:round/>
@@ -6580,7 +7422,7 @@
                     </a:lnL>
                     <a:lnR w="12700" cap="flat" cmpd="sng" algn="ctr">
                       <a:solidFill>
-                        <a:srgbClr val="27272A"/>
+                        <a:srgbClr val="232E45"/>
                       </a:solidFill>
                       <a:prstDash val="solid"/>
                       <a:round/>
@@ -6589,7 +7431,7 @@
                     </a:lnR>
                     <a:lnT w="12700" cap="flat" cmpd="sng" algn="ctr">
                       <a:solidFill>
-                        <a:srgbClr val="27272A"/>
+                        <a:srgbClr val="232E45"/>
                       </a:solidFill>
                       <a:prstDash val="solid"/>
                       <a:round/>
@@ -6598,7 +7440,7 @@
                     </a:lnT>
                     <a:lnB w="12700" cap="flat" cmpd="sng" algn="ctr">
                       <a:solidFill>
-                        <a:srgbClr val="27272A"/>
+                        <a:srgbClr val="232E45"/>
                       </a:solidFill>
                       <a:prstDash val="solid"/>
                       <a:round/>
@@ -6606,7 +7448,7 @@
                       <a:tailEnd type="none" w="med" len="med"/>
                     </a:lnB>
                     <a:solidFill>
-                      <a:srgbClr val="141418"/>
+                      <a:srgbClr val="151C2C"/>
                     </a:solidFill>
                   </a:tcPr>
                 </a:tc>
@@ -6619,20 +7461,27 @@
                         <a:buNone/>
                       </a:pPr>
                       <a:r>
-                        <a:rPr lang="en-US" sz="950" dirty="0">
+                        <a:rPr lang="en-US" sz="850" dirty="0">
                           <a:solidFill>
-                            <a:srgbClr val="FFFFFF"/>
+                            <a:srgbClr val="94A3B8"/>
                           </a:solidFill>
+                          <a:latin typeface="Courier New" pitchFamily="34" charset="0"/>
+                          <a:ea typeface="Courier New" pitchFamily="34" charset="-122"/>
+                          <a:cs typeface="Courier New" pitchFamily="34" charset="-120"/>
                         </a:rPr>
-                        <a:t>EXEC PKG_ESTILO_URBANO.sp_reajuste_masivo;</a:t>
+                        <a:t>EXEC PKG_ESTILO_URBANO.sp_reajuste_masivo_sueldos;</a:t>
                       </a:r>
-                      <a:endParaRPr lang="en-US" sz="950" dirty="0"/>
+                      <a:endParaRPr lang="en-US" sz="850" dirty="0">
+                        <a:latin typeface="Courier New" charset="0"/>
+                        <a:ea typeface="Courier New" charset="0"/>
+                        <a:cs typeface="Courier New" charset="0"/>
+                      </a:endParaRPr>
                     </a:p>
                   </a:txBody>
                   <a:tcPr marL="91440" marR="91440" marT="45720" marB="45720" anchor="ctr">
                     <a:lnL w="12700" cap="flat" cmpd="sng" algn="ctr">
                       <a:solidFill>
-                        <a:srgbClr val="27272A"/>
+                        <a:srgbClr val="232E45"/>
                       </a:solidFill>
                       <a:prstDash val="solid"/>
                       <a:round/>
@@ -6641,7 +7490,7 @@
                     </a:lnL>
                     <a:lnR w="12700" cap="flat" cmpd="sng" algn="ctr">
                       <a:solidFill>
-                        <a:srgbClr val="27272A"/>
+                        <a:srgbClr val="232E45"/>
                       </a:solidFill>
                       <a:prstDash val="solid"/>
                       <a:round/>
@@ -6650,7 +7499,7 @@
                     </a:lnR>
                     <a:lnT w="12700" cap="flat" cmpd="sng" algn="ctr">
                       <a:solidFill>
-                        <a:srgbClr val="27272A"/>
+                        <a:srgbClr val="232E45"/>
                       </a:solidFill>
                       <a:prstDash val="solid"/>
                       <a:round/>
@@ -6659,7 +7508,7 @@
                     </a:lnT>
                     <a:lnB w="12700" cap="flat" cmpd="sng" algn="ctr">
                       <a:solidFill>
-                        <a:srgbClr val="27272A"/>
+                        <a:srgbClr val="232E45"/>
                       </a:solidFill>
                       <a:prstDash val="solid"/>
                       <a:round/>
@@ -6667,7 +7516,7 @@
                       <a:tailEnd type="none" w="med" len="med"/>
                     </a:lnB>
                     <a:solidFill>
-                      <a:srgbClr val="141418"/>
+                      <a:srgbClr val="151C2C"/>
                     </a:solidFill>
                   </a:tcPr>
                 </a:tc>
@@ -6680,20 +7529,27 @@
                         <a:buNone/>
                       </a:pPr>
                       <a:r>
-                        <a:rPr lang="en-US" sz="950" dirty="0">
+                        <a:rPr lang="en-US" sz="850" dirty="0">
                           <a:solidFill>
                             <a:srgbClr val="FFFFFF"/>
                           </a:solidFill>
+                          <a:latin typeface="Arial" pitchFamily="34" charset="0"/>
+                          <a:ea typeface="Arial" pitchFamily="34" charset="-122"/>
+                          <a:cs typeface="Arial" pitchFamily="34" charset="-120"/>
                         </a:rPr>
-                        <a:t>Package aplica 4.5% masivo a operadores</a:t>
+                        <a:t>Package aplica reajuste del 4.5% a dotación activa</a:t>
                       </a:r>
-                      <a:endParaRPr lang="en-US" sz="950" dirty="0"/>
+                      <a:endParaRPr lang="en-US" sz="850" dirty="0">
+                        <a:latin typeface="Arial" charset="0"/>
+                        <a:ea typeface="Arial" charset="0"/>
+                        <a:cs typeface="Arial" charset="0"/>
+                      </a:endParaRPr>
                     </a:p>
                   </a:txBody>
                   <a:tcPr marL="91440" marR="91440" marT="45720" marB="45720" anchor="ctr">
                     <a:lnL w="12700" cap="flat" cmpd="sng" algn="ctr">
                       <a:solidFill>
-                        <a:srgbClr val="27272A"/>
+                        <a:srgbClr val="232E45"/>
                       </a:solidFill>
                       <a:prstDash val="solid"/>
                       <a:round/>
@@ -6702,7 +7558,7 @@
                     </a:lnL>
                     <a:lnR w="12700" cap="flat" cmpd="sng" algn="ctr">
                       <a:solidFill>
-                        <a:srgbClr val="27272A"/>
+                        <a:srgbClr val="232E45"/>
                       </a:solidFill>
                       <a:prstDash val="solid"/>
                       <a:round/>
@@ -6711,7 +7567,7 @@
                     </a:lnR>
                     <a:lnT w="12700" cap="flat" cmpd="sng" algn="ctr">
                       <a:solidFill>
-                        <a:srgbClr val="27272A"/>
+                        <a:srgbClr val="232E45"/>
                       </a:solidFill>
                       <a:prstDash val="solid"/>
                       <a:round/>
@@ -6720,7 +7576,7 @@
                     </a:lnT>
                     <a:lnB w="12700" cap="flat" cmpd="sng" algn="ctr">
                       <a:solidFill>
-                        <a:srgbClr val="27272A"/>
+                        <a:srgbClr val="232E45"/>
                       </a:solidFill>
                       <a:prstDash val="solid"/>
                       <a:round/>
@@ -6728,7 +7584,7 @@
                       <a:tailEnd type="none" w="med" len="med"/>
                     </a:lnB>
                     <a:solidFill>
-                      <a:srgbClr val="141418"/>
+                      <a:srgbClr val="151C2C"/>
                     </a:solidFill>
                   </a:tcPr>
                 </a:tc>
@@ -6741,20 +7597,27 @@
                         <a:buNone/>
                       </a:pPr>
                       <a:r>
-                        <a:rPr lang="en-US" sz="950" dirty="0">
+                        <a:rPr lang="en-US" sz="850" b="1" dirty="0">
                           <a:solidFill>
-                            <a:srgbClr val="FFFFFF"/>
+                            <a:srgbClr val="10B981"/>
                           </a:solidFill>
+                          <a:latin typeface="Arial" pitchFamily="34" charset="0"/>
+                          <a:ea typeface="Arial" pitchFamily="34" charset="-122"/>
+                          <a:cs typeface="Arial" pitchFamily="34" charset="-120"/>
                         </a:rPr>
                         <a:t>OK: Nómina</a:t>
                       </a:r>
-                      <a:endParaRPr lang="en-US" sz="950" dirty="0"/>
+                      <a:endParaRPr lang="en-US" sz="850" dirty="0">
+                        <a:latin typeface="Arial" charset="0"/>
+                        <a:ea typeface="Arial" charset="0"/>
+                        <a:cs typeface="Arial" charset="0"/>
+                      </a:endParaRPr>
                     </a:p>
                   </a:txBody>
                   <a:tcPr marL="91440" marR="91440" marT="45720" marB="45720" anchor="ctr">
                     <a:lnL w="12700" cap="flat" cmpd="sng" algn="ctr">
                       <a:solidFill>
-                        <a:srgbClr val="27272A"/>
+                        <a:srgbClr val="232E45"/>
                       </a:solidFill>
                       <a:prstDash val="solid"/>
                       <a:round/>
@@ -6763,7 +7626,7 @@
                     </a:lnL>
                     <a:lnR w="12700" cap="flat" cmpd="sng" algn="ctr">
                       <a:solidFill>
-                        <a:srgbClr val="27272A"/>
+                        <a:srgbClr val="232E45"/>
                       </a:solidFill>
                       <a:prstDash val="solid"/>
                       <a:round/>
@@ -6772,7 +7635,7 @@
                     </a:lnR>
                     <a:lnT w="12700" cap="flat" cmpd="sng" algn="ctr">
                       <a:solidFill>
-                        <a:srgbClr val="27272A"/>
+                        <a:srgbClr val="232E45"/>
                       </a:solidFill>
                       <a:prstDash val="solid"/>
                       <a:round/>
@@ -6781,7 +7644,7 @@
                     </a:lnT>
                     <a:lnB w="12700" cap="flat" cmpd="sng" algn="ctr">
                       <a:solidFill>
-                        <a:srgbClr val="27272A"/>
+                        <a:srgbClr val="232E45"/>
                       </a:solidFill>
                       <a:prstDash val="solid"/>
                       <a:round/>
@@ -6789,7 +7652,7 @@
                       <a:tailEnd type="none" w="med" len="med"/>
                     </a:lnB>
                     <a:solidFill>
-                      <a:srgbClr val="141418"/>
+                      <a:srgbClr val="151C2C"/>
                     </a:solidFill>
                   </a:tcPr>
                 </a:tc>
@@ -6800,22 +7663,22 @@
       </p:graphicFrame>
       <p:sp>
         <p:nvSpPr>
-          <p:cNvPr id="8" name="Shape 5"/>
-          <p:cNvSpPr/>
-          <p:nvPr/>
-        </p:nvSpPr>
-        <p:spPr>
-          <a:xfrm>
-            <a:off x="731520" y="4663440"/>
-            <a:ext cx="10607040" cy="1463040"/>
+          <p:cNvPr id="9" name="Shape 6"/>
+          <p:cNvSpPr/>
+          <p:nvPr/>
+        </p:nvSpPr>
+        <p:spPr>
+          <a:xfrm>
+            <a:off x="914400" y="4069080"/>
+            <a:ext cx="10362895" cy="1874520"/>
           </a:xfrm>
           <a:prstGeom prst="roundRect">
             <a:avLst/>
           </a:prstGeom>
           <a:solidFill>
-            <a:srgbClr val="141418"/>
+            <a:srgbClr val="151C2C"/>
           </a:solidFill>
-          <a:ln w="12700">
+          <a:ln w="19050">
             <a:solidFill>
               <a:srgbClr val="F59E0B"/>
             </a:solidFill>
@@ -6825,14 +7688,14 @@
       </p:sp>
       <p:sp>
         <p:nvSpPr>
-          <p:cNvPr id="9" name="Text 6"/>
-          <p:cNvSpPr/>
-          <p:nvPr/>
-        </p:nvSpPr>
-        <p:spPr>
-          <a:xfrm>
-            <a:off x="1005840" y="4800600"/>
-            <a:ext cx="10058400" cy="274320"/>
+          <p:cNvPr id="10" name="Text 7"/>
+          <p:cNvSpPr/>
+          <p:nvPr/>
+        </p:nvSpPr>
+        <p:spPr>
+          <a:xfrm>
+            <a:off x="1188720" y="4251960"/>
+            <a:ext cx="9784080" cy="274320"/>
           </a:xfrm>
           <a:prstGeom prst="rect">
             <a:avLst/>
@@ -6856,7 +7719,7 @@
                 <a:ea typeface="Arial" pitchFamily="34" charset="-122"/>
                 <a:cs typeface="Arial" pitchFamily="34" charset="-120"/>
               </a:rPr>
-              <a:t>CONCLUSIÓN DEL PROYECTO:</a:t>
+              <a:t>CONCLUSIÓN Y LOGROS DEL PROYECTO</a:t>
             </a:r>
             <a:endParaRPr lang="en-US" sz="1100" dirty="0"/>
           </a:p>
@@ -6864,14 +7727,14 @@
       </p:sp>
       <p:sp>
         <p:nvSpPr>
-          <p:cNvPr id="10" name="Text 7"/>
-          <p:cNvSpPr/>
-          <p:nvPr/>
-        </p:nvSpPr>
-        <p:spPr>
-          <a:xfrm>
-            <a:off x="1005840" y="5074920"/>
-            <a:ext cx="10058400" cy="822960"/>
+          <p:cNvPr id="11" name="Text 8"/>
+          <p:cNvSpPr/>
+          <p:nvPr/>
+        </p:nvSpPr>
+        <p:spPr>
+          <a:xfrm>
+            <a:off x="1188720" y="4526280"/>
+            <a:ext cx="9784080" cy="1280160"/>
           </a:xfrm>
           <a:prstGeom prst="rect">
             <a:avLst/>
@@ -6880,24 +7743,96 @@
           <a:ln/>
         </p:spPr>
         <p:txBody>
-          <a:bodyPr wrap="square" rtlCol="0" anchor="ctr"/>
-          <a:lstStyle/>
-          <a:p>
-            <a:pPr indent="0" marL="0">
-              <a:buNone/>
-            </a:pPr>
-            <a:r>
-              <a:rPr lang="en-US" sz="1000" dirty="0">
-                <a:solidFill>
-                  <a:srgbClr val="9CA3AF"/>
-                </a:solidFill>
-                <a:latin typeface="Arial" pitchFamily="34" charset="0"/>
-                <a:ea typeface="Arial" pitchFamily="34" charset="-122"/>
-                <a:cs typeface="Arial" pitchFamily="34" charset="-120"/>
-              </a:rPr>
-              <a:t>La implementación de Packages y Triggers a nivel de fila y sentencia en Oracle Database 19c/21c permite a "Estilo Urbano" alcanzar un nivel bancario de integridad: ningún sueldo puede alterarse sin bitácora, la solvencia está blindada contra quiebres y cada pedido cuenta con trazabilidad en tiempo real.</a:t>
-            </a:r>
-            <a:endParaRPr lang="en-US" sz="1000" dirty="0"/>
+          <a:bodyPr wrap="square" rtlCol="0" anchor="t"/>
+          <a:lstStyle/>
+          <a:p>
+            <a:pPr indent="0" marL="0">
+              <a:buNone/>
+            </a:pPr>
+            <a:r>
+              <a:rPr lang="en-US" sz="950" b="1" dirty="0">
+                <a:solidFill>
+                  <a:srgbClr val="FFFFFF"/>
+                </a:solidFill>
+                <a:latin typeface="Arial" pitchFamily="34" charset="0"/>
+                <a:ea typeface="Arial" pitchFamily="34" charset="-122"/>
+                <a:cs typeface="Arial" pitchFamily="34" charset="-120"/>
+              </a:rPr>
+              <a:t>1. Gobernanza Centralizada: </a:t>
+            </a:r>
+            <a:pPr indent="0" marL="0">
+              <a:buNone/>
+            </a:pPr>
+            <a:r>
+              <a:rPr lang="en-US" sz="950" dirty="0">
+                <a:solidFill>
+                  <a:srgbClr val="94A3B8"/>
+                </a:solidFill>
+                <a:latin typeface="Arial" pitchFamily="34" charset="0"/>
+                <a:ea typeface="Arial" pitchFamily="34" charset="-122"/>
+                <a:cs typeface="Arial" pitchFamily="34" charset="-120"/>
+              </a:rPr>
+              <a:t>La lógica de negocio se ejecuta 100% en el motor Oracle Cloud ADB, garantizando integridad y eliminando vulnerabilidades en el cliente web.
+</a:t>
+            </a:r>
+            <a:pPr indent="0" marL="0">
+              <a:buNone/>
+            </a:pPr>
+            <a:r>
+              <a:rPr lang="en-US" sz="950" b="1" dirty="0">
+                <a:solidFill>
+                  <a:srgbClr val="FFFFFF"/>
+                </a:solidFill>
+                <a:latin typeface="Arial" pitchFamily="34" charset="0"/>
+                <a:ea typeface="Arial" pitchFamily="34" charset="-122"/>
+                <a:cs typeface="Arial" pitchFamily="34" charset="-120"/>
+              </a:rPr>
+              <a:t>2. Trazabilidad y Transparencia: </a:t>
+            </a:r>
+            <a:pPr indent="0" marL="0">
+              <a:buNone/>
+            </a:pPr>
+            <a:r>
+              <a:rPr lang="en-US" sz="950" dirty="0">
+                <a:solidFill>
+                  <a:srgbClr val="94A3B8"/>
+                </a:solidFill>
+                <a:latin typeface="Arial" pitchFamily="34" charset="0"/>
+                <a:ea typeface="Arial" pitchFamily="34" charset="-122"/>
+                <a:cs typeface="Arial" pitchFamily="34" charset="-120"/>
+              </a:rPr>
+              <a:t>Ningún sueldo o pedido puede modificarse sin dejar registro histórico irreversible (:OLD y :NEW en auditoría, tracking de courier).
+</a:t>
+            </a:r>
+            <a:pPr indent="0" marL="0">
+              <a:buNone/>
+            </a:pPr>
+            <a:r>
+              <a:rPr lang="en-US" sz="950" b="1" dirty="0">
+                <a:solidFill>
+                  <a:srgbClr val="FFFFFF"/>
+                </a:solidFill>
+                <a:latin typeface="Arial" pitchFamily="34" charset="0"/>
+                <a:ea typeface="Arial" pitchFamily="34" charset="-122"/>
+                <a:cs typeface="Arial" pitchFamily="34" charset="-120"/>
+              </a:rPr>
+              <a:t>3. Solvencia Financiera Blindada: </a:t>
+            </a:r>
+            <a:pPr indent="0" marL="0">
+              <a:buNone/>
+            </a:pPr>
+            <a:r>
+              <a:rPr lang="en-US" sz="950" dirty="0">
+                <a:solidFill>
+                  <a:srgbClr val="94A3B8"/>
+                </a:solidFill>
+                <a:latin typeface="Arial" pitchFamily="34" charset="0"/>
+                <a:ea typeface="Arial" pitchFamily="34" charset="-122"/>
+                <a:cs typeface="Arial" pitchFamily="34" charset="-120"/>
+              </a:rPr>
+              <a:t>Los disparadores de sentencia previenen quiebras operacionales bloqueando de raíz nóminas superiores a las ventas del negocio.</a:t>
+            </a:r>
+            <a:endParaRPr lang="en-US" sz="950" dirty="0"/>
           </a:p>
         </p:txBody>
       </p:sp>

--- a/PRESENTACION_EP2_ESTILO_URBANO.pptx
+++ b/PRESENTACION_EP2_ESTILO_URBANO.pptx
@@ -3189,7 +3189,7 @@
                 <a:ea typeface="Courier New" pitchFamily="34" charset="-122"/>
                 <a:cs typeface="Courier New" pitchFamily="34" charset="-120"/>
               </a:rPr>
-              <a:t>sp_actualizar_sueldo_empleado(p_id, p_sueldo)</a:t>
+              <a:t>sp_actualizar_sueldo_empleado(p_id_trabajador, p_sueldo)</a:t>
             </a:r>
             <a:endParaRPr lang="en-US" sz="1050" dirty="0"/>
           </a:p>
@@ -3228,7 +3228,7 @@
                 <a:ea typeface="Arial" pitchFamily="34" charset="-122"/>
                 <a:cs typeface="Arial" pitchFamily="34" charset="-120"/>
               </a:rPr>
-              <a:t>Actualiza el sueldo individual garantizando previamente que el usuario sea un trabajador activo mediante validación interna.</a:t>
+              <a:t>Actualiza el sueldo individual del trabajador garantizando previamente que sea un operador activo mediante validación interna.</a:t>
             </a:r>
             <a:endParaRPr lang="en-US" sz="950" dirty="0"/>
           </a:p>
@@ -4182,8 +4182,8 @@
                 <a:cs typeface="Courier New" pitchFamily="34" charset="-120"/>
               </a:rPr>
               <a:t>  PROCEDURE sp_actualizar_sueldo_empleado(
-    p_id_usuario   NUMBER,
-    p_nuevo_sueldo NUMBER
+    p_id_trabajador NUMBER,
+    p_nuevo_sueldo  NUMBER
   );
 </a:t>
             </a:r>
@@ -4412,12 +4412,12 @@
                 <a:cs typeface="Courier New" pitchFamily="34" charset="-120"/>
               </a:rPr>
               <a:t>  FUNCTION fn_es_trabajador_valido(
-    p_id_usuario NUMBER
+    p_id_trabajador NUMBER
   ) RETURN BOOLEAN IS
     v_count NUMBER;
   BEGIN
     SELECT COUNT(*) INTO v_count
-    FROM USUARIO WHERE id_usuario = p_id_usuario
+    FROM USUARIO WHERE id_usuario = p_id_trabajador
       AND id_rol = 2 AND estado = 'A';
     RETURN (v_count &gt; 0);
   END fn_es_trabajador_valido;
@@ -7772,7 +7772,7 @@
                 <a:ea typeface="Arial" pitchFamily="34" charset="-122"/>
                 <a:cs typeface="Arial" pitchFamily="34" charset="-120"/>
               </a:rPr>
-              <a:t>La lógica de negocio se ejecuta 100% en el motor Oracle Cloud ADB, garantizando integridad y eliminando vulnerabilidades en el cliente web.
+              <a:t>Lógica 100% en Oracle Cloud ADB, blindando el sistema contra modificaciones externas no autorizadas.
 </a:t>
             </a:r>
             <a:pPr indent="0" marL="0">
@@ -7801,7 +7801,7 @@
                 <a:ea typeface="Arial" pitchFamily="34" charset="-122"/>
                 <a:cs typeface="Arial" pitchFamily="34" charset="-120"/>
               </a:rPr>
-              <a:t>Ningún sueldo o pedido puede modificarse sin dejar registro histórico irreversible (:OLD y :NEW en auditoría, tracking de courier).
+              <a:t>Triggers con :OLD y :NEW registran cada alteración salarial y cambio de tracking en courier.
 </a:t>
             </a:r>
             <a:pPr indent="0" marL="0">
@@ -7830,7 +7830,36 @@
                 <a:ea typeface="Arial" pitchFamily="34" charset="-122"/>
                 <a:cs typeface="Arial" pitchFamily="34" charset="-120"/>
               </a:rPr>
-              <a:t>Los disparadores de sentencia previenen quiebras operacionales bloqueando de raíz nóminas superiores a las ventas del negocio.</a:t>
+              <a:t>Triggers de sentencia previenen quiebras bloqueando nóminas que superen las ventas del negocio.
+</a:t>
+            </a:r>
+            <a:pPr indent="0" marL="0">
+              <a:buNone/>
+            </a:pPr>
+            <a:r>
+              <a:rPr lang="en-US" sz="950" b="1" dirty="0">
+                <a:solidFill>
+                  <a:srgbClr val="F59E0B"/>
+                </a:solidFill>
+                <a:latin typeface="Arial" pitchFamily="34" charset="0"/>
+                <a:ea typeface="Arial" pitchFamily="34" charset="-122"/>
+                <a:cs typeface="Arial" pitchFamily="34" charset="-120"/>
+              </a:rPr>
+              <a:t>4. Vistas Semánticas (id_trabajador / id_cliente): </a:t>
+            </a:r>
+            <a:pPr indent="0" marL="0">
+              <a:buNone/>
+            </a:pPr>
+            <a:r>
+              <a:rPr lang="en-US" sz="950" dirty="0">
+                <a:solidFill>
+                  <a:srgbClr val="94A3B8"/>
+                </a:solidFill>
+                <a:latin typeface="Arial" pitchFamily="34" charset="0"/>
+                <a:ea typeface="Arial" pitchFamily="34" charset="-122"/>
+                <a:cs typeface="Arial" pitchFamily="34" charset="-120"/>
+              </a:rPr>
+              <a:t>V_TRABAJADORES y V_CLIENTES humanizan el modelo, eliminando identificadores robóticos.</a:t>
             </a:r>
             <a:endParaRPr lang="en-US" sz="950" dirty="0"/>
           </a:p>
